--- a/IGP_-_CLINI_COMERCIO_IMPORTAC.pptx
+++ b/IGP_-_CLINI_COMERCIO_IMPORTAC.pptx
@@ -162,7 +162,7 @@
                 <c:formatCode>General</c:formatCode>
                 <c:ptCount val="2"/>
                 <c:pt idx="0">
-                  <c:v>54</c:v>
+                  <c:v>0</c:v>
                 </c:pt>
                 <c:pt idx="1">
                   <c:v>81</c:v>
@@ -211,7 +211,7 @@
                 <c:formatCode>General</c:formatCode>
                 <c:ptCount val="2"/>
                 <c:pt idx="0">
-                  <c:v>1</c:v>
+                  <c:v>0</c:v>
                 </c:pt>
                 <c:pt idx="1">
                   <c:v>2</c:v>
@@ -3688,7 +3688,7 @@
         <p:spPr>
           <a:xfrm>
             <a:off x="1005840" y="2240279"/>
-            <a:ext cx="2377439" cy="891540"/>
+            <a:ext cx="2377440" cy="868680"/>
           </a:xfrm>
           <a:prstGeom prst="rect">
             <a:avLst/>
@@ -3722,8 +3722,8 @@
         </p:nvSpPr>
         <p:spPr>
           <a:xfrm>
-            <a:off x="1005840" y="3058668"/>
-            <a:ext cx="2377439" cy="548640"/>
+            <a:off x="1005840" y="3090672"/>
+            <a:ext cx="2377440" cy="411480"/>
           </a:xfrm>
           <a:prstGeom prst="rect">
             <a:avLst/>
@@ -3803,7 +3803,7 @@
         <p:spPr>
           <a:xfrm>
             <a:off x="3931920" y="2240279"/>
-            <a:ext cx="2377439" cy="891540"/>
+            <a:ext cx="2377440" cy="868680"/>
           </a:xfrm>
           <a:prstGeom prst="rect">
             <a:avLst/>
@@ -3837,8 +3837,8 @@
         </p:nvSpPr>
         <p:spPr>
           <a:xfrm>
-            <a:off x="3931920" y="3058668"/>
-            <a:ext cx="2377439" cy="548640"/>
+            <a:off x="3931920" y="3090672"/>
+            <a:ext cx="2377440" cy="411480"/>
           </a:xfrm>
           <a:prstGeom prst="rect">
             <a:avLst/>
@@ -3918,7 +3918,7 @@
         <p:spPr>
           <a:xfrm>
             <a:off x="6858000" y="2240279"/>
-            <a:ext cx="2377439" cy="891540"/>
+            <a:ext cx="2377440" cy="868680"/>
           </a:xfrm>
           <a:prstGeom prst="rect">
             <a:avLst/>
@@ -3952,8 +3952,8 @@
         </p:nvSpPr>
         <p:spPr>
           <a:xfrm>
-            <a:off x="6858000" y="3058668"/>
-            <a:ext cx="2377439" cy="548640"/>
+            <a:off x="6858000" y="3090672"/>
+            <a:ext cx="2377440" cy="411480"/>
           </a:xfrm>
           <a:prstGeom prst="rect">
             <a:avLst/>
@@ -4033,7 +4033,7 @@
         <p:spPr>
           <a:xfrm>
             <a:off x="9784080" y="2240279"/>
-            <a:ext cx="2377439" cy="891540"/>
+            <a:ext cx="2377440" cy="868680"/>
           </a:xfrm>
           <a:prstGeom prst="rect">
             <a:avLst/>
@@ -4067,8 +4067,8 @@
         </p:nvSpPr>
         <p:spPr>
           <a:xfrm>
-            <a:off x="9784080" y="3058668"/>
-            <a:ext cx="2377439" cy="548640"/>
+            <a:off x="9784080" y="3090672"/>
+            <a:ext cx="2377440" cy="411480"/>
           </a:xfrm>
           <a:prstGeom prst="rect">
             <a:avLst/>
@@ -4121,7 +4121,7 @@
               <a:tr h="475488">
                 <a:tc>
                   <a:txBody>
-                    <a:bodyPr wrap="square"/>
+                    <a:bodyPr/>
                     <a:lstStyle/>
                     <a:p>
                       <a:pPr algn="ctr"/>
@@ -4144,7 +4144,7 @@
                 </a:tc>
                 <a:tc>
                   <a:txBody>
-                    <a:bodyPr wrap="square"/>
+                    <a:bodyPr/>
                     <a:lstStyle/>
                     <a:p>
                       <a:pPr algn="ctr"/>
@@ -4167,7 +4167,7 @@
                 </a:tc>
                 <a:tc>
                   <a:txBody>
-                    <a:bodyPr wrap="square"/>
+                    <a:bodyPr/>
                     <a:lstStyle/>
                     <a:p>
                       <a:pPr algn="ctr"/>
@@ -4190,7 +4190,7 @@
                 </a:tc>
                 <a:tc>
                   <a:txBody>
-                    <a:bodyPr wrap="square"/>
+                    <a:bodyPr/>
                     <a:lstStyle/>
                     <a:p>
                       <a:pPr algn="ctr"/>
@@ -4215,18 +4215,18 @@
               <a:tr h="475488">
                 <a:tc>
                   <a:txBody>
-                    <a:bodyPr wrap="square"/>
-                    <a:lstStyle/>
-                    <a:p>
-                      <a:pPr algn="l"/>
-                      <a:r>
-                        <a:rPr sz="1000" b="0">
-                          <a:solidFill>
-                            <a:srgbClr val="1D1B43"/>
-                          </a:solidFill>
-                          <a:latin typeface="Calibri"/>
-                        </a:rPr>
-                        <a:t>Total Entregas</a:t>
+                    <a:bodyPr/>
+                    <a:lstStyle/>
+                    <a:p>
+                      <a:pPr algn="l"/>
+                      <a:r>
+                        <a:rPr sz="1000" b="0">
+                          <a:solidFill>
+                            <a:srgbClr val="1D1B43"/>
+                          </a:solidFill>
+                          <a:latin typeface="Calibri"/>
+                        </a:rPr>
+                        <a:t>Total</a:t>
                       </a:r>
                     </a:p>
                   </a:txBody>
@@ -4238,18 +4238,18 @@
                 </a:tc>
                 <a:tc>
                   <a:txBody>
-                    <a:bodyPr wrap="square"/>
-                    <a:lstStyle/>
-                    <a:p>
-                      <a:pPr algn="l"/>
-                      <a:r>
-                        <a:rPr sz="1000" b="0">
-                          <a:solidFill>
-                            <a:srgbClr val="1D1B43"/>
-                          </a:solidFill>
-                          <a:latin typeface="Calibri"/>
-                        </a:rPr>
-                        <a:t>55</a:t>
+                    <a:bodyPr/>
+                    <a:lstStyle/>
+                    <a:p>
+                      <a:pPr algn="l"/>
+                      <a:r>
+                        <a:rPr sz="1000" b="0">
+                          <a:solidFill>
+                            <a:srgbClr val="1D1B43"/>
+                          </a:solidFill>
+                          <a:latin typeface="Calibri"/>
+                        </a:rPr>
+                        <a:t>0</a:t>
                       </a:r>
                     </a:p>
                   </a:txBody>
@@ -4261,7 +4261,7 @@
                 </a:tc>
                 <a:tc>
                   <a:txBody>
-                    <a:bodyPr wrap="square"/>
+                    <a:bodyPr/>
                     <a:lstStyle/>
                     <a:p>
                       <a:pPr algn="l"/>
@@ -4284,18 +4284,18 @@
                 </a:tc>
                 <a:tc>
                   <a:txBody>
-                    <a:bodyPr wrap="square"/>
-                    <a:lstStyle/>
-                    <a:p>
-                      <a:pPr algn="l"/>
-                      <a:r>
-                        <a:rPr sz="1000" b="0">
-                          <a:solidFill>
-                            <a:srgbClr val="1D1B43"/>
-                          </a:solidFill>
-                          <a:latin typeface="Calibri"/>
-                        </a:rPr>
-                        <a:t>+ 28</a:t>
+                    <a:bodyPr/>
+                    <a:lstStyle/>
+                    <a:p>
+                      <a:pPr algn="l"/>
+                      <a:r>
+                        <a:rPr sz="1000" b="0">
+                          <a:solidFill>
+                            <a:srgbClr val="1D1B43"/>
+                          </a:solidFill>
+                          <a:latin typeface="Calibri"/>
+                        </a:rPr>
+                        <a:t>+ 83</a:t>
                       </a:r>
                     </a:p>
                   </a:txBody>
@@ -4309,7 +4309,7 @@
               <a:tr h="475488">
                 <a:tc>
                   <a:txBody>
-                    <a:bodyPr wrap="square"/>
+                    <a:bodyPr/>
                     <a:lstStyle/>
                     <a:p>
                       <a:pPr algn="l"/>
@@ -4332,18 +4332,18 @@
                 </a:tc>
                 <a:tc>
                   <a:txBody>
-                    <a:bodyPr wrap="square"/>
-                    <a:lstStyle/>
-                    <a:p>
-                      <a:pPr algn="l"/>
-                      <a:r>
-                        <a:rPr sz="1000" b="0">
-                          <a:solidFill>
-                            <a:srgbClr val="1D1B43"/>
-                          </a:solidFill>
-                          <a:latin typeface="Calibri"/>
-                        </a:rPr>
-                        <a:t>54</a:t>
+                    <a:bodyPr/>
+                    <a:lstStyle/>
+                    <a:p>
+                      <a:pPr algn="l"/>
+                      <a:r>
+                        <a:rPr sz="1000" b="0">
+                          <a:solidFill>
+                            <a:srgbClr val="1D1B43"/>
+                          </a:solidFill>
+                          <a:latin typeface="Calibri"/>
+                        </a:rPr>
+                        <a:t>0</a:t>
                       </a:r>
                     </a:p>
                   </a:txBody>
@@ -4355,7 +4355,7 @@
                 </a:tc>
                 <a:tc>
                   <a:txBody>
-                    <a:bodyPr wrap="square"/>
+                    <a:bodyPr/>
                     <a:lstStyle/>
                     <a:p>
                       <a:pPr algn="l"/>
@@ -4378,18 +4378,18 @@
                 </a:tc>
                 <a:tc>
                   <a:txBody>
-                    <a:bodyPr wrap="square"/>
-                    <a:lstStyle/>
-                    <a:p>
-                      <a:pPr algn="l"/>
-                      <a:r>
-                        <a:rPr sz="1000" b="0">
-                          <a:solidFill>
-                            <a:srgbClr val="1D1B43"/>
-                          </a:solidFill>
-                          <a:latin typeface="Calibri"/>
-                        </a:rPr>
-                        <a:t>+ 27</a:t>
+                    <a:bodyPr/>
+                    <a:lstStyle/>
+                    <a:p>
+                      <a:pPr algn="l"/>
+                      <a:r>
+                        <a:rPr sz="1000" b="0">
+                          <a:solidFill>
+                            <a:srgbClr val="1D1B43"/>
+                          </a:solidFill>
+                          <a:latin typeface="Calibri"/>
+                        </a:rPr>
+                        <a:t>+ 81</a:t>
                       </a:r>
                     </a:p>
                   </a:txBody>
@@ -4403,18 +4403,18 @@
               <a:tr h="475488">
                 <a:tc>
                   <a:txBody>
-                    <a:bodyPr wrap="square"/>
-                    <a:lstStyle/>
-                    <a:p>
-                      <a:pPr algn="l"/>
-                      <a:r>
-                        <a:rPr sz="1000" b="0">
-                          <a:solidFill>
-                            <a:srgbClr val="1D1B43"/>
-                          </a:solidFill>
-                          <a:latin typeface="Calibri"/>
-                        </a:rPr>
-                        <a:t>Fora do Prazo</a:t>
+                    <a:bodyPr/>
+                    <a:lstStyle/>
+                    <a:p>
+                      <a:pPr algn="l"/>
+                      <a:r>
+                        <a:rPr sz="1000" b="0">
+                          <a:solidFill>
+                            <a:srgbClr val="1D1B43"/>
+                          </a:solidFill>
+                          <a:latin typeface="Calibri"/>
+                        </a:rPr>
+                        <a:t>Fora Prazo</a:t>
                       </a:r>
                     </a:p>
                   </a:txBody>
@@ -4426,18 +4426,18 @@
                 </a:tc>
                 <a:tc>
                   <a:txBody>
-                    <a:bodyPr wrap="square"/>
-                    <a:lstStyle/>
-                    <a:p>
-                      <a:pPr algn="l"/>
-                      <a:r>
-                        <a:rPr sz="1000" b="0">
-                          <a:solidFill>
-                            <a:srgbClr val="1D1B43"/>
-                          </a:solidFill>
-                          <a:latin typeface="Calibri"/>
-                        </a:rPr>
-                        <a:t>1</a:t>
+                    <a:bodyPr/>
+                    <a:lstStyle/>
+                    <a:p>
+                      <a:pPr algn="l"/>
+                      <a:r>
+                        <a:rPr sz="1000" b="0">
+                          <a:solidFill>
+                            <a:srgbClr val="1D1B43"/>
+                          </a:solidFill>
+                          <a:latin typeface="Calibri"/>
+                        </a:rPr>
+                        <a:t>0</a:t>
                       </a:r>
                     </a:p>
                   </a:txBody>
@@ -4449,7 +4449,7 @@
                 </a:tc>
                 <a:tc>
                   <a:txBody>
-                    <a:bodyPr wrap="square"/>
+                    <a:bodyPr/>
                     <a:lstStyle/>
                     <a:p>
                       <a:pPr algn="l"/>
@@ -4472,18 +4472,18 @@
                 </a:tc>
                 <a:tc>
                   <a:txBody>
-                    <a:bodyPr wrap="square"/>
-                    <a:lstStyle/>
-                    <a:p>
-                      <a:pPr algn="l"/>
-                      <a:r>
-                        <a:rPr sz="1000" b="0">
-                          <a:solidFill>
-                            <a:srgbClr val="1D1B43"/>
-                          </a:solidFill>
-                          <a:latin typeface="Calibri"/>
-                        </a:rPr>
-                        <a:t>+ 1</a:t>
+                    <a:bodyPr/>
+                    <a:lstStyle/>
+                    <a:p>
+                      <a:pPr algn="l"/>
+                      <a:r>
+                        <a:rPr sz="1000" b="0">
+                          <a:solidFill>
+                            <a:srgbClr val="1D1B43"/>
+                          </a:solidFill>
+                          <a:latin typeface="Calibri"/>
+                        </a:rPr>
+                        <a:t>+ 2</a:t>
                       </a:r>
                     </a:p>
                   </a:txBody>
@@ -4497,7 +4497,7 @@
               <a:tr h="475488">
                 <a:tc>
                   <a:txBody>
-                    <a:bodyPr wrap="square"/>
+                    <a:bodyPr/>
                     <a:lstStyle/>
                     <a:p>
                       <a:pPr algn="l"/>
@@ -4520,18 +4520,18 @@
                 </a:tc>
                 <a:tc>
                   <a:txBody>
-                    <a:bodyPr wrap="square"/>
-                    <a:lstStyle/>
-                    <a:p>
-                      <a:pPr algn="l"/>
-                      <a:r>
-                        <a:rPr sz="1000" b="0">
-                          <a:solidFill>
-                            <a:srgbClr val="1D1B43"/>
-                          </a:solidFill>
-                          <a:latin typeface="Calibri"/>
-                        </a:rPr>
-                        <a:t>98.2%</a:t>
+                    <a:bodyPr/>
+                    <a:lstStyle/>
+                    <a:p>
+                      <a:pPr algn="l"/>
+                      <a:r>
+                        <a:rPr sz="1000" b="0">
+                          <a:solidFill>
+                            <a:srgbClr val="1D1B43"/>
+                          </a:solidFill>
+                          <a:latin typeface="Calibri"/>
+                        </a:rPr>
+                        <a:t>97.6%</a:t>
                       </a:r>
                     </a:p>
                   </a:txBody>
@@ -4543,7 +4543,7 @@
                 </a:tc>
                 <a:tc>
                   <a:txBody>
-                    <a:bodyPr wrap="square"/>
+                    <a:bodyPr/>
                     <a:lstStyle/>
                     <a:p>
                       <a:pPr algn="l"/>
@@ -4566,18 +4566,18 @@
                 </a:tc>
                 <a:tc>
                   <a:txBody>
-                    <a:bodyPr wrap="square"/>
-                    <a:lstStyle/>
-                    <a:p>
-                      <a:pPr algn="l"/>
-                      <a:r>
-                        <a:rPr sz="1000" b="0">
-                          <a:solidFill>
-                            <a:srgbClr val="1D1B43"/>
-                          </a:solidFill>
-                          <a:latin typeface="Calibri"/>
-                        </a:rPr>
-                        <a:t>- 0.6pp</a:t>
+                    <a:bodyPr/>
+                    <a:lstStyle/>
+                    <a:p>
+                      <a:pPr algn="l"/>
+                      <a:r>
+                        <a:rPr sz="1000" b="0">
+                          <a:solidFill>
+                            <a:srgbClr val="1D1B43"/>
+                          </a:solidFill>
+                          <a:latin typeface="Calibri"/>
+                        </a:rPr>
+                        <a:t>+ 0.0pp</a:t>
                       </a:r>
                     </a:p>
                   </a:txBody>
@@ -4766,7 +4766,7 @@
               <a:tr h="438912">
                 <a:tc>
                   <a:txBody>
-                    <a:bodyPr wrap="square"/>
+                    <a:bodyPr/>
                     <a:lstStyle/>
                     <a:p>
                       <a:pPr algn="ctr"/>
@@ -4789,7 +4789,7 @@
                 </a:tc>
                 <a:tc>
                   <a:txBody>
-                    <a:bodyPr wrap="square"/>
+                    <a:bodyPr/>
                     <a:lstStyle/>
                     <a:p>
                       <a:pPr algn="ctr"/>
@@ -4812,7 +4812,7 @@
                 </a:tc>
                 <a:tc>
                   <a:txBody>
-                    <a:bodyPr wrap="square"/>
+                    <a:bodyPr/>
                     <a:lstStyle/>
                     <a:p>
                       <a:pPr algn="ctr"/>
@@ -4835,7 +4835,7 @@
                 </a:tc>
                 <a:tc>
                   <a:txBody>
-                    <a:bodyPr wrap="square"/>
+                    <a:bodyPr/>
                     <a:lstStyle/>
                     <a:p>
                       <a:pPr algn="ctr"/>
@@ -4858,7 +4858,7 @@
                 </a:tc>
                 <a:tc>
                   <a:txBody>
-                    <a:bodyPr wrap="square"/>
+                    <a:bodyPr/>
                     <a:lstStyle/>
                     <a:p>
                       <a:pPr algn="ctr"/>
@@ -4883,7 +4883,7 @@
               <a:tr h="438912">
                 <a:tc>
                   <a:txBody>
-                    <a:bodyPr wrap="square"/>
+                    <a:bodyPr/>
                     <a:lstStyle/>
                     <a:p>
                       <a:pPr algn="l"/>
@@ -4906,18 +4906,18 @@
                 </a:tc>
                 <a:tc>
                   <a:txBody>
-                    <a:bodyPr wrap="square"/>
-                    <a:lstStyle/>
-                    <a:p>
-                      <a:pPr algn="l"/>
-                      <a:r>
-                        <a:rPr sz="1000" b="0">
-                          <a:solidFill>
-                            <a:srgbClr val="1D1B43"/>
-                          </a:solidFill>
-                          <a:latin typeface="Calibri"/>
-                        </a:rPr>
-                        <a:t>55</a:t>
+                    <a:bodyPr/>
+                    <a:lstStyle/>
+                    <a:p>
+                      <a:pPr algn="l"/>
+                      <a:r>
+                        <a:rPr sz="1000" b="0">
+                          <a:solidFill>
+                            <a:srgbClr val="1D1B43"/>
+                          </a:solidFill>
+                          <a:latin typeface="Calibri"/>
+                        </a:rPr>
+                        <a:t>0</a:t>
                       </a:r>
                     </a:p>
                   </a:txBody>
@@ -4929,18 +4929,18 @@
                 </a:tc>
                 <a:tc>
                   <a:txBody>
-                    <a:bodyPr wrap="square"/>
-                    <a:lstStyle/>
-                    <a:p>
-                      <a:pPr algn="l"/>
-                      <a:r>
-                        <a:rPr sz="1000" b="0">
-                          <a:solidFill>
-                            <a:srgbClr val="1D1B43"/>
-                          </a:solidFill>
-                          <a:latin typeface="Calibri"/>
-                        </a:rPr>
-                        <a:t>54</a:t>
+                    <a:bodyPr/>
+                    <a:lstStyle/>
+                    <a:p>
+                      <a:pPr algn="l"/>
+                      <a:r>
+                        <a:rPr sz="1000" b="0">
+                          <a:solidFill>
+                            <a:srgbClr val="1D1B43"/>
+                          </a:solidFill>
+                          <a:latin typeface="Calibri"/>
+                        </a:rPr>
+                        <a:t>0</a:t>
                       </a:r>
                     </a:p>
                   </a:txBody>
@@ -4952,18 +4952,18 @@
                 </a:tc>
                 <a:tc>
                   <a:txBody>
-                    <a:bodyPr wrap="square"/>
-                    <a:lstStyle/>
-                    <a:p>
-                      <a:pPr algn="l"/>
-                      <a:r>
-                        <a:rPr sz="1000" b="0">
-                          <a:solidFill>
-                            <a:srgbClr val="1D1B43"/>
-                          </a:solidFill>
-                          <a:latin typeface="Calibri"/>
-                        </a:rPr>
-                        <a:t>1</a:t>
+                    <a:bodyPr/>
+                    <a:lstStyle/>
+                    <a:p>
+                      <a:pPr algn="l"/>
+                      <a:r>
+                        <a:rPr sz="1000" b="0">
+                          <a:solidFill>
+                            <a:srgbClr val="1D1B43"/>
+                          </a:solidFill>
+                          <a:latin typeface="Calibri"/>
+                        </a:rPr>
+                        <a:t>0</a:t>
                       </a:r>
                     </a:p>
                   </a:txBody>
@@ -4975,18 +4975,18 @@
                 </a:tc>
                 <a:tc>
                   <a:txBody>
-                    <a:bodyPr wrap="square"/>
-                    <a:lstStyle/>
-                    <a:p>
-                      <a:pPr algn="l"/>
-                      <a:r>
-                        <a:rPr sz="1000" b="0">
-                          <a:solidFill>
-                            <a:srgbClr val="1D1B43"/>
-                          </a:solidFill>
-                          <a:latin typeface="Calibri"/>
-                        </a:rPr>
-                        <a:t>98.2%</a:t>
+                    <a:bodyPr/>
+                    <a:lstStyle/>
+                    <a:p>
+                      <a:pPr algn="l"/>
+                      <a:r>
+                        <a:rPr sz="1000" b="0">
+                          <a:solidFill>
+                            <a:srgbClr val="1D1B43"/>
+                          </a:solidFill>
+                          <a:latin typeface="Calibri"/>
+                        </a:rPr>
+                        <a:t>97.6%</a:t>
                       </a:r>
                     </a:p>
                   </a:txBody>
@@ -5000,7 +5000,7 @@
               <a:tr h="438912">
                 <a:tc>
                   <a:txBody>
-                    <a:bodyPr wrap="square"/>
+                    <a:bodyPr/>
                     <a:lstStyle/>
                     <a:p>
                       <a:pPr algn="l"/>
@@ -5023,7 +5023,7 @@
                 </a:tc>
                 <a:tc>
                   <a:txBody>
-                    <a:bodyPr wrap="square"/>
+                    <a:bodyPr/>
                     <a:lstStyle/>
                     <a:p>
                       <a:pPr algn="l"/>
@@ -5046,7 +5046,7 @@
                 </a:tc>
                 <a:tc>
                   <a:txBody>
-                    <a:bodyPr wrap="square"/>
+                    <a:bodyPr/>
                     <a:lstStyle/>
                     <a:p>
                       <a:pPr algn="l"/>
@@ -5069,7 +5069,7 @@
                 </a:tc>
                 <a:tc>
                   <a:txBody>
-                    <a:bodyPr wrap="square"/>
+                    <a:bodyPr/>
                     <a:lstStyle/>
                     <a:p>
                       <a:pPr algn="l"/>
@@ -5092,7 +5092,7 @@
                 </a:tc>
                 <a:tc>
                   <a:txBody>
-                    <a:bodyPr wrap="square"/>
+                    <a:bodyPr/>
                     <a:lstStyle/>
                     <a:p>
                       <a:pPr algn="l"/>
@@ -5352,7 +5352,7 @@
               <a:tr h="384048">
                 <a:tc>
                   <a:txBody>
-                    <a:bodyPr wrap="square"/>
+                    <a:bodyPr/>
                     <a:lstStyle/>
                     <a:p>
                       <a:pPr algn="ctr"/>
@@ -5375,7 +5375,7 @@
                 </a:tc>
                 <a:tc>
                   <a:txBody>
-                    <a:bodyPr wrap="square"/>
+                    <a:bodyPr/>
                     <a:lstStyle/>
                     <a:p>
                       <a:pPr algn="ctr"/>
@@ -5398,7 +5398,7 @@
                 </a:tc>
                 <a:tc>
                   <a:txBody>
-                    <a:bodyPr wrap="square"/>
+                    <a:bodyPr/>
                     <a:lstStyle/>
                     <a:p>
                       <a:pPr algn="ctr"/>
@@ -5421,7 +5421,7 @@
                 </a:tc>
                 <a:tc>
                   <a:txBody>
-                    <a:bodyPr wrap="square"/>
+                    <a:bodyPr/>
                     <a:lstStyle/>
                     <a:p>
                       <a:pPr algn="ctr"/>
@@ -5444,7 +5444,7 @@
                 </a:tc>
                 <a:tc>
                   <a:txBody>
-                    <a:bodyPr wrap="square"/>
+                    <a:bodyPr/>
                     <a:lstStyle/>
                     <a:p>
                       <a:pPr algn="ctr"/>
@@ -5469,7 +5469,7 @@
               <a:tr h="384048">
                 <a:tc>
                   <a:txBody>
-                    <a:bodyPr wrap="square"/>
+                    <a:bodyPr/>
                     <a:lstStyle/>
                     <a:p>
                       <a:pPr algn="l"/>
@@ -5492,7 +5492,7 @@
                 </a:tc>
                 <a:tc>
                   <a:txBody>
-                    <a:bodyPr wrap="square"/>
+                    <a:bodyPr/>
                     <a:lstStyle/>
                     <a:p>
                       <a:pPr algn="l"/>
@@ -5515,7 +5515,7 @@
                 </a:tc>
                 <a:tc>
                   <a:txBody>
-                    <a:bodyPr wrap="square"/>
+                    <a:bodyPr/>
                     <a:lstStyle/>
                     <a:p>
                       <a:pPr algn="l"/>
@@ -5538,7 +5538,7 @@
                 </a:tc>
                 <a:tc>
                   <a:txBody>
-                    <a:bodyPr wrap="square"/>
+                    <a:bodyPr/>
                     <a:lstStyle/>
                     <a:p>
                       <a:pPr algn="l"/>
@@ -5561,7 +5561,7 @@
                 </a:tc>
                 <a:tc>
                   <a:txBody>
-                    <a:bodyPr wrap="square"/>
+                    <a:bodyPr/>
                     <a:lstStyle/>
                     <a:p>
                       <a:pPr algn="l"/>
@@ -5586,7 +5586,7 @@
               <a:tr h="384048">
                 <a:tc>
                   <a:txBody>
-                    <a:bodyPr wrap="square"/>
+                    <a:bodyPr/>
                     <a:lstStyle/>
                     <a:p>
                       <a:pPr algn="l"/>
@@ -5609,7 +5609,7 @@
                 </a:tc>
                 <a:tc>
                   <a:txBody>
-                    <a:bodyPr wrap="square"/>
+                    <a:bodyPr/>
                     <a:lstStyle/>
                     <a:p>
                       <a:pPr algn="l"/>
@@ -5632,7 +5632,7 @@
                 </a:tc>
                 <a:tc>
                   <a:txBody>
-                    <a:bodyPr wrap="square"/>
+                    <a:bodyPr/>
                     <a:lstStyle/>
                     <a:p>
                       <a:pPr algn="l"/>
@@ -5655,7 +5655,7 @@
                 </a:tc>
                 <a:tc>
                   <a:txBody>
-                    <a:bodyPr wrap="square"/>
+                    <a:bodyPr/>
                     <a:lstStyle/>
                     <a:p>
                       <a:pPr algn="l"/>
@@ -5678,7 +5678,7 @@
                 </a:tc>
                 <a:tc>
                   <a:txBody>
-                    <a:bodyPr wrap="square"/>
+                    <a:bodyPr/>
                     <a:lstStyle/>
                     <a:p>
                       <a:pPr algn="l"/>
@@ -5861,7 +5861,7 @@
               <a:tr h="457200">
                 <a:tc>
                   <a:txBody>
-                    <a:bodyPr wrap="square"/>
+                    <a:bodyPr/>
                     <a:lstStyle/>
                     <a:p>
                       <a:pPr algn="ctr"/>
@@ -5884,7 +5884,7 @@
                 </a:tc>
                 <a:tc>
                   <a:txBody>
-                    <a:bodyPr wrap="square"/>
+                    <a:bodyPr/>
                     <a:lstStyle/>
                     <a:p>
                       <a:pPr algn="ctr"/>
@@ -5907,7 +5907,7 @@
                 </a:tc>
                 <a:tc>
                   <a:txBody>
-                    <a:bodyPr wrap="square"/>
+                    <a:bodyPr/>
                     <a:lstStyle/>
                     <a:p>
                       <a:pPr algn="ctr"/>
@@ -5930,7 +5930,7 @@
                 </a:tc>
                 <a:tc>
                   <a:txBody>
-                    <a:bodyPr wrap="square"/>
+                    <a:bodyPr/>
                     <a:lstStyle/>
                     <a:p>
                       <a:pPr algn="ctr"/>
@@ -5953,7 +5953,7 @@
                 </a:tc>
                 <a:tc>
                   <a:txBody>
-                    <a:bodyPr wrap="square"/>
+                    <a:bodyPr/>
                     <a:lstStyle/>
                     <a:p>
                       <a:pPr algn="ctr"/>
@@ -5976,7 +5976,7 @@
                 </a:tc>
                 <a:tc>
                   <a:txBody>
-                    <a:bodyPr wrap="square"/>
+                    <a:bodyPr/>
                     <a:lstStyle/>
                     <a:p>
                       <a:pPr algn="ctr"/>
@@ -6001,7 +6001,7 @@
               <a:tr h="457200">
                 <a:tc>
                   <a:txBody>
-                    <a:bodyPr wrap="square"/>
+                    <a:bodyPr/>
                     <a:lstStyle/>
                     <a:p>
                       <a:pPr algn="l"/>
@@ -6024,7 +6024,7 @@
                 </a:tc>
                 <a:tc>
                   <a:txBody>
-                    <a:bodyPr wrap="square"/>
+                    <a:bodyPr/>
                     <a:lstStyle/>
                     <a:p>
                       <a:pPr algn="l"/>
@@ -6047,7 +6047,7 @@
                 </a:tc>
                 <a:tc>
                   <a:txBody>
-                    <a:bodyPr wrap="square"/>
+                    <a:bodyPr/>
                     <a:lstStyle/>
                     <a:p>
                       <a:pPr algn="l"/>
@@ -6070,7 +6070,7 @@
                 </a:tc>
                 <a:tc>
                   <a:txBody>
-                    <a:bodyPr wrap="square"/>
+                    <a:bodyPr/>
                     <a:lstStyle/>
                     <a:p>
                       <a:pPr algn="l"/>
@@ -6093,7 +6093,7 @@
                 </a:tc>
                 <a:tc>
                   <a:txBody>
-                    <a:bodyPr wrap="square"/>
+                    <a:bodyPr/>
                     <a:lstStyle/>
                     <a:p>
                       <a:pPr algn="l"/>
@@ -6116,7 +6116,7 @@
                 </a:tc>
                 <a:tc>
                   <a:txBody>
-                    <a:bodyPr wrap="square"/>
+                    <a:bodyPr/>
                     <a:lstStyle/>
                     <a:p>
                       <a:pPr algn="l"/>
@@ -6141,7 +6141,7 @@
               <a:tr h="457200">
                 <a:tc>
                   <a:txBody>
-                    <a:bodyPr wrap="square"/>
+                    <a:bodyPr/>
                     <a:lstStyle/>
                     <a:p>
                       <a:pPr algn="l"/>
@@ -6164,7 +6164,7 @@
                 </a:tc>
                 <a:tc>
                   <a:txBody>
-                    <a:bodyPr wrap="square"/>
+                    <a:bodyPr/>
                     <a:lstStyle/>
                     <a:p>
                       <a:pPr algn="l"/>
@@ -6187,7 +6187,7 @@
                 </a:tc>
                 <a:tc>
                   <a:txBody>
-                    <a:bodyPr wrap="square"/>
+                    <a:bodyPr/>
                     <a:lstStyle/>
                     <a:p>
                       <a:pPr algn="l"/>
@@ -6210,7 +6210,7 @@
                 </a:tc>
                 <a:tc>
                   <a:txBody>
-                    <a:bodyPr wrap="square"/>
+                    <a:bodyPr/>
                     <a:lstStyle/>
                     <a:p>
                       <a:pPr algn="l"/>
@@ -6233,7 +6233,7 @@
                 </a:tc>
                 <a:tc>
                   <a:txBody>
-                    <a:bodyPr wrap="square"/>
+                    <a:bodyPr/>
                     <a:lstStyle/>
                     <a:p>
                       <a:pPr algn="l"/>
@@ -6256,7 +6256,7 @@
                 </a:tc>
                 <a:tc>
                   <a:txBody>
-                    <a:bodyPr wrap="square"/>
+                    <a:bodyPr/>
                     <a:lstStyle/>
                     <a:p>
                       <a:pPr algn="l"/>
@@ -6281,7 +6281,7 @@
               <a:tr h="457200">
                 <a:tc>
                   <a:txBody>
-                    <a:bodyPr wrap="square"/>
+                    <a:bodyPr/>
                     <a:lstStyle/>
                     <a:p>
                       <a:pPr algn="l"/>
@@ -6304,7 +6304,7 @@
                 </a:tc>
                 <a:tc>
                   <a:txBody>
-                    <a:bodyPr wrap="square"/>
+                    <a:bodyPr/>
                     <a:lstStyle/>
                     <a:p>
                       <a:pPr algn="l"/>
@@ -6327,7 +6327,7 @@
                 </a:tc>
                 <a:tc>
                   <a:txBody>
-                    <a:bodyPr wrap="square"/>
+                    <a:bodyPr/>
                     <a:lstStyle/>
                     <a:p>
                       <a:pPr algn="l"/>
@@ -6350,7 +6350,7 @@
                 </a:tc>
                 <a:tc>
                   <a:txBody>
-                    <a:bodyPr wrap="square"/>
+                    <a:bodyPr/>
                     <a:lstStyle/>
                     <a:p>
                       <a:pPr algn="l"/>
@@ -6373,7 +6373,7 @@
                 </a:tc>
                 <a:tc>
                   <a:txBody>
-                    <a:bodyPr wrap="square"/>
+                    <a:bodyPr/>
                     <a:lstStyle/>
                     <a:p>
                       <a:pPr algn="l"/>
@@ -6396,7 +6396,7 @@
                 </a:tc>
                 <a:tc>
                   <a:txBody>
-                    <a:bodyPr wrap="square"/>
+                    <a:bodyPr/>
                     <a:lstStyle/>
                     <a:p>
                       <a:pPr algn="l"/>
@@ -6580,7 +6580,7 @@
               <a:tr h="292608">
                 <a:tc>
                   <a:txBody>
-                    <a:bodyPr wrap="square"/>
+                    <a:bodyPr/>
                     <a:lstStyle/>
                     <a:p>
                       <a:pPr algn="ctr"/>
@@ -6603,7 +6603,7 @@
                 </a:tc>
                 <a:tc>
                   <a:txBody>
-                    <a:bodyPr wrap="square"/>
+                    <a:bodyPr/>
                     <a:lstStyle/>
                     <a:p>
                       <a:pPr algn="ctr"/>
@@ -6626,7 +6626,7 @@
                 </a:tc>
                 <a:tc>
                   <a:txBody>
-                    <a:bodyPr wrap="square"/>
+                    <a:bodyPr/>
                     <a:lstStyle/>
                     <a:p>
                       <a:pPr algn="ctr"/>
@@ -6649,7 +6649,7 @@
                 </a:tc>
                 <a:tc>
                   <a:txBody>
-                    <a:bodyPr wrap="square"/>
+                    <a:bodyPr/>
                     <a:lstStyle/>
                     <a:p>
                       <a:pPr algn="ctr"/>
@@ -6672,7 +6672,7 @@
                 </a:tc>
                 <a:tc>
                   <a:txBody>
-                    <a:bodyPr wrap="square"/>
+                    <a:bodyPr/>
                     <a:lstStyle/>
                     <a:p>
                       <a:pPr algn="ctr"/>
@@ -6695,7 +6695,7 @@
                 </a:tc>
                 <a:tc>
                   <a:txBody>
-                    <a:bodyPr wrap="square"/>
+                    <a:bodyPr/>
                     <a:lstStyle/>
                     <a:p>
                       <a:pPr algn="ctr"/>
@@ -6718,7 +6718,7 @@
                 </a:tc>
                 <a:tc>
                   <a:txBody>
-                    <a:bodyPr wrap="square"/>
+                    <a:bodyPr/>
                     <a:lstStyle/>
                     <a:p>
                       <a:pPr algn="ctr"/>
@@ -6743,7 +6743,7 @@
               <a:tr h="292608">
                 <a:tc>
                   <a:txBody>
-                    <a:bodyPr wrap="square"/>
+                    <a:bodyPr/>
                     <a:lstStyle/>
                     <a:p>
                       <a:pPr algn="l"/>
@@ -6766,7 +6766,7 @@
                 </a:tc>
                 <a:tc>
                   <a:txBody>
-                    <a:bodyPr wrap="square"/>
+                    <a:bodyPr/>
                     <a:lstStyle/>
                     <a:p>
                       <a:pPr algn="l"/>
@@ -6789,7 +6789,7 @@
                 </a:tc>
                 <a:tc>
                   <a:txBody>
-                    <a:bodyPr wrap="square"/>
+                    <a:bodyPr/>
                     <a:lstStyle/>
                     <a:p>
                       <a:pPr algn="l"/>
@@ -6812,7 +6812,7 @@
                 </a:tc>
                 <a:tc>
                   <a:txBody>
-                    <a:bodyPr wrap="square"/>
+                    <a:bodyPr/>
                     <a:lstStyle/>
                     <a:p>
                       <a:pPr algn="l"/>
@@ -6835,7 +6835,7 @@
                 </a:tc>
                 <a:tc>
                   <a:txBody>
-                    <a:bodyPr wrap="square"/>
+                    <a:bodyPr/>
                     <a:lstStyle/>
                     <a:p>
                       <a:pPr algn="l"/>
@@ -6858,7 +6858,7 @@
                 </a:tc>
                 <a:tc>
                   <a:txBody>
-                    <a:bodyPr wrap="square"/>
+                    <a:bodyPr/>
                     <a:lstStyle/>
                     <a:p>
                       <a:pPr algn="l"/>
@@ -6881,7 +6881,7 @@
                 </a:tc>
                 <a:tc>
                   <a:txBody>
-                    <a:bodyPr wrap="square"/>
+                    <a:bodyPr/>
                     <a:lstStyle/>
                     <a:p>
                       <a:pPr algn="l"/>
@@ -6906,7 +6906,7 @@
               <a:tr h="292608">
                 <a:tc>
                   <a:txBody>
-                    <a:bodyPr wrap="square"/>
+                    <a:bodyPr/>
                     <a:lstStyle/>
                     <a:p>
                       <a:pPr algn="l"/>
@@ -6929,7 +6929,7 @@
                 </a:tc>
                 <a:tc>
                   <a:txBody>
-                    <a:bodyPr wrap="square"/>
+                    <a:bodyPr/>
                     <a:lstStyle/>
                     <a:p>
                       <a:pPr algn="l"/>
@@ -6952,7 +6952,7 @@
                 </a:tc>
                 <a:tc>
                   <a:txBody>
-                    <a:bodyPr wrap="square"/>
+                    <a:bodyPr/>
                     <a:lstStyle/>
                     <a:p>
                       <a:pPr algn="l"/>
@@ -6975,7 +6975,7 @@
                 </a:tc>
                 <a:tc>
                   <a:txBody>
-                    <a:bodyPr wrap="square"/>
+                    <a:bodyPr/>
                     <a:lstStyle/>
                     <a:p>
                       <a:pPr algn="l"/>
@@ -6998,7 +6998,7 @@
                 </a:tc>
                 <a:tc>
                   <a:txBody>
-                    <a:bodyPr wrap="square"/>
+                    <a:bodyPr/>
                     <a:lstStyle/>
                     <a:p>
                       <a:pPr algn="l"/>
@@ -7021,7 +7021,7 @@
                 </a:tc>
                 <a:tc>
                   <a:txBody>
-                    <a:bodyPr wrap="square"/>
+                    <a:bodyPr/>
                     <a:lstStyle/>
                     <a:p>
                       <a:pPr algn="l"/>
@@ -7044,7 +7044,7 @@
                 </a:tc>
                 <a:tc>
                   <a:txBody>
-                    <a:bodyPr wrap="square"/>
+                    <a:bodyPr/>
                     <a:lstStyle/>
                     <a:p>
                       <a:pPr algn="l"/>
@@ -7069,7 +7069,7 @@
               <a:tr h="292608">
                 <a:tc>
                   <a:txBody>
-                    <a:bodyPr wrap="square"/>
+                    <a:bodyPr/>
                     <a:lstStyle/>
                     <a:p>
                       <a:pPr algn="l"/>
@@ -7092,7 +7092,7 @@
                 </a:tc>
                 <a:tc>
                   <a:txBody>
-                    <a:bodyPr wrap="square"/>
+                    <a:bodyPr/>
                     <a:lstStyle/>
                     <a:p>
                       <a:pPr algn="l"/>
@@ -7115,7 +7115,7 @@
                 </a:tc>
                 <a:tc>
                   <a:txBody>
-                    <a:bodyPr wrap="square"/>
+                    <a:bodyPr/>
                     <a:lstStyle/>
                     <a:p>
                       <a:pPr algn="l"/>
@@ -7138,7 +7138,7 @@
                 </a:tc>
                 <a:tc>
                   <a:txBody>
-                    <a:bodyPr wrap="square"/>
+                    <a:bodyPr/>
                     <a:lstStyle/>
                     <a:p>
                       <a:pPr algn="l"/>
@@ -7161,7 +7161,7 @@
                 </a:tc>
                 <a:tc>
                   <a:txBody>
-                    <a:bodyPr wrap="square"/>
+                    <a:bodyPr/>
                     <a:lstStyle/>
                     <a:p>
                       <a:pPr algn="l"/>
@@ -7184,7 +7184,7 @@
                 </a:tc>
                 <a:tc>
                   <a:txBody>
-                    <a:bodyPr wrap="square"/>
+                    <a:bodyPr/>
                     <a:lstStyle/>
                     <a:p>
                       <a:pPr algn="l"/>
@@ -7207,7 +7207,7 @@
                 </a:tc>
                 <a:tc>
                   <a:txBody>
-                    <a:bodyPr wrap="square"/>
+                    <a:bodyPr/>
                     <a:lstStyle/>
                     <a:p>
                       <a:pPr algn="l"/>
@@ -7232,7 +7232,7 @@
               <a:tr h="292608">
                 <a:tc>
                   <a:txBody>
-                    <a:bodyPr wrap="square"/>
+                    <a:bodyPr/>
                     <a:lstStyle/>
                     <a:p>
                       <a:pPr algn="l"/>
@@ -7255,7 +7255,7 @@
                 </a:tc>
                 <a:tc>
                   <a:txBody>
-                    <a:bodyPr wrap="square"/>
+                    <a:bodyPr/>
                     <a:lstStyle/>
                     <a:p>
                       <a:pPr algn="l"/>
@@ -7278,7 +7278,7 @@
                 </a:tc>
                 <a:tc>
                   <a:txBody>
-                    <a:bodyPr wrap="square"/>
+                    <a:bodyPr/>
                     <a:lstStyle/>
                     <a:p>
                       <a:pPr algn="l"/>
@@ -7301,7 +7301,7 @@
                 </a:tc>
                 <a:tc>
                   <a:txBody>
-                    <a:bodyPr wrap="square"/>
+                    <a:bodyPr/>
                     <a:lstStyle/>
                     <a:p>
                       <a:pPr algn="l"/>
@@ -7324,7 +7324,7 @@
                 </a:tc>
                 <a:tc>
                   <a:txBody>
-                    <a:bodyPr wrap="square"/>
+                    <a:bodyPr/>
                     <a:lstStyle/>
                     <a:p>
                       <a:pPr algn="l"/>
@@ -7347,7 +7347,7 @@
                 </a:tc>
                 <a:tc>
                   <a:txBody>
-                    <a:bodyPr wrap="square"/>
+                    <a:bodyPr/>
                     <a:lstStyle/>
                     <a:p>
                       <a:pPr algn="l"/>
@@ -7370,7 +7370,7 @@
                 </a:tc>
                 <a:tc>
                   <a:txBody>
-                    <a:bodyPr wrap="square"/>
+                    <a:bodyPr/>
                     <a:lstStyle/>
                     <a:p>
                       <a:pPr algn="l"/>
@@ -7395,7 +7395,7 @@
               <a:tr h="292608">
                 <a:tc>
                   <a:txBody>
-                    <a:bodyPr wrap="square"/>
+                    <a:bodyPr/>
                     <a:lstStyle/>
                     <a:p>
                       <a:pPr algn="l"/>
@@ -7418,7 +7418,7 @@
                 </a:tc>
                 <a:tc>
                   <a:txBody>
-                    <a:bodyPr wrap="square"/>
+                    <a:bodyPr/>
                     <a:lstStyle/>
                     <a:p>
                       <a:pPr algn="l"/>
@@ -7441,7 +7441,7 @@
                 </a:tc>
                 <a:tc>
                   <a:txBody>
-                    <a:bodyPr wrap="square"/>
+                    <a:bodyPr/>
                     <a:lstStyle/>
                     <a:p>
                       <a:pPr algn="l"/>
@@ -7464,7 +7464,7 @@
                 </a:tc>
                 <a:tc>
                   <a:txBody>
-                    <a:bodyPr wrap="square"/>
+                    <a:bodyPr/>
                     <a:lstStyle/>
                     <a:p>
                       <a:pPr algn="l"/>
@@ -7487,7 +7487,7 @@
                 </a:tc>
                 <a:tc>
                   <a:txBody>
-                    <a:bodyPr wrap="square"/>
+                    <a:bodyPr/>
                     <a:lstStyle/>
                     <a:p>
                       <a:pPr algn="l"/>
@@ -7510,7 +7510,7 @@
                 </a:tc>
                 <a:tc>
                   <a:txBody>
-                    <a:bodyPr wrap="square"/>
+                    <a:bodyPr/>
                     <a:lstStyle/>
                     <a:p>
                       <a:pPr algn="l"/>
@@ -7533,7 +7533,7 @@
                 </a:tc>
                 <a:tc>
                   <a:txBody>
-                    <a:bodyPr wrap="square"/>
+                    <a:bodyPr/>
                     <a:lstStyle/>
                     <a:p>
                       <a:pPr algn="l"/>
@@ -7558,7 +7558,7 @@
               <a:tr h="292608">
                 <a:tc>
                   <a:txBody>
-                    <a:bodyPr wrap="square"/>
+                    <a:bodyPr/>
                     <a:lstStyle/>
                     <a:p>
                       <a:pPr algn="l"/>
@@ -7581,7 +7581,7 @@
                 </a:tc>
                 <a:tc>
                   <a:txBody>
-                    <a:bodyPr wrap="square"/>
+                    <a:bodyPr/>
                     <a:lstStyle/>
                     <a:p>
                       <a:pPr algn="l"/>
@@ -7604,7 +7604,7 @@
                 </a:tc>
                 <a:tc>
                   <a:txBody>
-                    <a:bodyPr wrap="square"/>
+                    <a:bodyPr/>
                     <a:lstStyle/>
                     <a:p>
                       <a:pPr algn="l"/>
@@ -7627,7 +7627,7 @@
                 </a:tc>
                 <a:tc>
                   <a:txBody>
-                    <a:bodyPr wrap="square"/>
+                    <a:bodyPr/>
                     <a:lstStyle/>
                     <a:p>
                       <a:pPr algn="l"/>
@@ -7650,7 +7650,7 @@
                 </a:tc>
                 <a:tc>
                   <a:txBody>
-                    <a:bodyPr wrap="square"/>
+                    <a:bodyPr/>
                     <a:lstStyle/>
                     <a:p>
                       <a:pPr algn="l"/>
@@ -7673,7 +7673,7 @@
                 </a:tc>
                 <a:tc>
                   <a:txBody>
-                    <a:bodyPr wrap="square"/>
+                    <a:bodyPr/>
                     <a:lstStyle/>
                     <a:p>
                       <a:pPr algn="l"/>
@@ -7696,7 +7696,7 @@
                 </a:tc>
                 <a:tc>
                   <a:txBody>
-                    <a:bodyPr wrap="square"/>
+                    <a:bodyPr/>
                     <a:lstStyle/>
                     <a:p>
                       <a:pPr algn="l"/>
@@ -7721,7 +7721,7 @@
               <a:tr h="292608">
                 <a:tc>
                   <a:txBody>
-                    <a:bodyPr wrap="square"/>
+                    <a:bodyPr/>
                     <a:lstStyle/>
                     <a:p>
                       <a:pPr algn="l"/>
@@ -7744,7 +7744,7 @@
                 </a:tc>
                 <a:tc>
                   <a:txBody>
-                    <a:bodyPr wrap="square"/>
+                    <a:bodyPr/>
                     <a:lstStyle/>
                     <a:p>
                       <a:pPr algn="l"/>
@@ -7767,7 +7767,7 @@
                 </a:tc>
                 <a:tc>
                   <a:txBody>
-                    <a:bodyPr wrap="square"/>
+                    <a:bodyPr/>
                     <a:lstStyle/>
                     <a:p>
                       <a:pPr algn="l"/>
@@ -7790,7 +7790,7 @@
                 </a:tc>
                 <a:tc>
                   <a:txBody>
-                    <a:bodyPr wrap="square"/>
+                    <a:bodyPr/>
                     <a:lstStyle/>
                     <a:p>
                       <a:pPr algn="l"/>
@@ -7813,7 +7813,7 @@
                 </a:tc>
                 <a:tc>
                   <a:txBody>
-                    <a:bodyPr wrap="square"/>
+                    <a:bodyPr/>
                     <a:lstStyle/>
                     <a:p>
                       <a:pPr algn="l"/>
@@ -7836,7 +7836,7 @@
                 </a:tc>
                 <a:tc>
                   <a:txBody>
-                    <a:bodyPr wrap="square"/>
+                    <a:bodyPr/>
                     <a:lstStyle/>
                     <a:p>
                       <a:pPr algn="l"/>
@@ -7859,7 +7859,7 @@
                 </a:tc>
                 <a:tc>
                   <a:txBody>
-                    <a:bodyPr wrap="square"/>
+                    <a:bodyPr/>
                     <a:lstStyle/>
                     <a:p>
                       <a:pPr algn="l"/>
@@ -7884,7 +7884,7 @@
               <a:tr h="292608">
                 <a:tc>
                   <a:txBody>
-                    <a:bodyPr wrap="square"/>
+                    <a:bodyPr/>
                     <a:lstStyle/>
                     <a:p>
                       <a:pPr algn="l"/>
@@ -7907,7 +7907,7 @@
                 </a:tc>
                 <a:tc>
                   <a:txBody>
-                    <a:bodyPr wrap="square"/>
+                    <a:bodyPr/>
                     <a:lstStyle/>
                     <a:p>
                       <a:pPr algn="l"/>
@@ -7930,7 +7930,7 @@
                 </a:tc>
                 <a:tc>
                   <a:txBody>
-                    <a:bodyPr wrap="square"/>
+                    <a:bodyPr/>
                     <a:lstStyle/>
                     <a:p>
                       <a:pPr algn="l"/>
@@ -7953,7 +7953,7 @@
                 </a:tc>
                 <a:tc>
                   <a:txBody>
-                    <a:bodyPr wrap="square"/>
+                    <a:bodyPr/>
                     <a:lstStyle/>
                     <a:p>
                       <a:pPr algn="l"/>
@@ -7976,7 +7976,7 @@
                 </a:tc>
                 <a:tc>
                   <a:txBody>
-                    <a:bodyPr wrap="square"/>
+                    <a:bodyPr/>
                     <a:lstStyle/>
                     <a:p>
                       <a:pPr algn="l"/>
@@ -7999,7 +7999,7 @@
                 </a:tc>
                 <a:tc>
                   <a:txBody>
-                    <a:bodyPr wrap="square"/>
+                    <a:bodyPr/>
                     <a:lstStyle/>
                     <a:p>
                       <a:pPr algn="l"/>
@@ -8022,7 +8022,7 @@
                 </a:tc>
                 <a:tc>
                   <a:txBody>
-                    <a:bodyPr wrap="square"/>
+                    <a:bodyPr/>
                     <a:lstStyle/>
                     <a:p>
                       <a:pPr algn="l"/>
@@ -8047,7 +8047,7 @@
               <a:tr h="292608">
                 <a:tc>
                   <a:txBody>
-                    <a:bodyPr wrap="square"/>
+                    <a:bodyPr/>
                     <a:lstStyle/>
                     <a:p>
                       <a:pPr algn="l"/>
@@ -8070,7 +8070,7 @@
                 </a:tc>
                 <a:tc>
                   <a:txBody>
-                    <a:bodyPr wrap="square"/>
+                    <a:bodyPr/>
                     <a:lstStyle/>
                     <a:p>
                       <a:pPr algn="l"/>
@@ -8093,7 +8093,7 @@
                 </a:tc>
                 <a:tc>
                   <a:txBody>
-                    <a:bodyPr wrap="square"/>
+                    <a:bodyPr/>
                     <a:lstStyle/>
                     <a:p>
                       <a:pPr algn="l"/>
@@ -8116,7 +8116,7 @@
                 </a:tc>
                 <a:tc>
                   <a:txBody>
-                    <a:bodyPr wrap="square"/>
+                    <a:bodyPr/>
                     <a:lstStyle/>
                     <a:p>
                       <a:pPr algn="l"/>
@@ -8139,7 +8139,7 @@
                 </a:tc>
                 <a:tc>
                   <a:txBody>
-                    <a:bodyPr wrap="square"/>
+                    <a:bodyPr/>
                     <a:lstStyle/>
                     <a:p>
                       <a:pPr algn="l"/>
@@ -8162,7 +8162,7 @@
                 </a:tc>
                 <a:tc>
                   <a:txBody>
-                    <a:bodyPr wrap="square"/>
+                    <a:bodyPr/>
                     <a:lstStyle/>
                     <a:p>
                       <a:pPr algn="l"/>
@@ -8185,7 +8185,7 @@
                 </a:tc>
                 <a:tc>
                   <a:txBody>
-                    <a:bodyPr wrap="square"/>
+                    <a:bodyPr/>
                     <a:lstStyle/>
                     <a:p>
                       <a:pPr algn="l"/>
@@ -8210,7 +8210,7 @@
               <a:tr h="292608">
                 <a:tc>
                   <a:txBody>
-                    <a:bodyPr wrap="square"/>
+                    <a:bodyPr/>
                     <a:lstStyle/>
                     <a:p>
                       <a:pPr algn="l"/>
@@ -8233,7 +8233,7 @@
                 </a:tc>
                 <a:tc>
                   <a:txBody>
-                    <a:bodyPr wrap="square"/>
+                    <a:bodyPr/>
                     <a:lstStyle/>
                     <a:p>
                       <a:pPr algn="l"/>
@@ -8256,7 +8256,7 @@
                 </a:tc>
                 <a:tc>
                   <a:txBody>
-                    <a:bodyPr wrap="square"/>
+                    <a:bodyPr/>
                     <a:lstStyle/>
                     <a:p>
                       <a:pPr algn="l"/>
@@ -8279,7 +8279,7 @@
                 </a:tc>
                 <a:tc>
                   <a:txBody>
-                    <a:bodyPr wrap="square"/>
+                    <a:bodyPr/>
                     <a:lstStyle/>
                     <a:p>
                       <a:pPr algn="l"/>
@@ -8302,7 +8302,7 @@
                 </a:tc>
                 <a:tc>
                   <a:txBody>
-                    <a:bodyPr wrap="square"/>
+                    <a:bodyPr/>
                     <a:lstStyle/>
                     <a:p>
                       <a:pPr algn="l"/>
@@ -8325,7 +8325,7 @@
                 </a:tc>
                 <a:tc>
                   <a:txBody>
-                    <a:bodyPr wrap="square"/>
+                    <a:bodyPr/>
                     <a:lstStyle/>
                     <a:p>
                       <a:pPr algn="l"/>
@@ -8348,7 +8348,7 @@
                 </a:tc>
                 <a:tc>
                   <a:txBody>
-                    <a:bodyPr wrap="square"/>
+                    <a:bodyPr/>
                     <a:lstStyle/>
                     <a:p>
                       <a:pPr algn="l"/>
@@ -8373,7 +8373,7 @@
               <a:tr h="292608">
                 <a:tc>
                   <a:txBody>
-                    <a:bodyPr wrap="square"/>
+                    <a:bodyPr/>
                     <a:lstStyle/>
                     <a:p>
                       <a:pPr algn="l"/>
@@ -8396,7 +8396,7 @@
                 </a:tc>
                 <a:tc>
                   <a:txBody>
-                    <a:bodyPr wrap="square"/>
+                    <a:bodyPr/>
                     <a:lstStyle/>
                     <a:p>
                       <a:pPr algn="l"/>
@@ -8419,7 +8419,7 @@
                 </a:tc>
                 <a:tc>
                   <a:txBody>
-                    <a:bodyPr wrap="square"/>
+                    <a:bodyPr/>
                     <a:lstStyle/>
                     <a:p>
                       <a:pPr algn="l"/>
@@ -8442,7 +8442,7 @@
                 </a:tc>
                 <a:tc>
                   <a:txBody>
-                    <a:bodyPr wrap="square"/>
+                    <a:bodyPr/>
                     <a:lstStyle/>
                     <a:p>
                       <a:pPr algn="l"/>
@@ -8465,7 +8465,7 @@
                 </a:tc>
                 <a:tc>
                   <a:txBody>
-                    <a:bodyPr wrap="square"/>
+                    <a:bodyPr/>
                     <a:lstStyle/>
                     <a:p>
                       <a:pPr algn="l"/>
@@ -8488,7 +8488,7 @@
                 </a:tc>
                 <a:tc>
                   <a:txBody>
-                    <a:bodyPr wrap="square"/>
+                    <a:bodyPr/>
                     <a:lstStyle/>
                     <a:p>
                       <a:pPr algn="l"/>
@@ -8511,7 +8511,7 @@
                 </a:tc>
                 <a:tc>
                   <a:txBody>
-                    <a:bodyPr wrap="square"/>
+                    <a:bodyPr/>
                     <a:lstStyle/>
                     <a:p>
                       <a:pPr algn="l"/>
@@ -8536,7 +8536,7 @@
               <a:tr h="292608">
                 <a:tc>
                   <a:txBody>
-                    <a:bodyPr wrap="square"/>
+                    <a:bodyPr/>
                     <a:lstStyle/>
                     <a:p>
                       <a:pPr algn="l"/>
@@ -8559,7 +8559,7 @@
                 </a:tc>
                 <a:tc>
                   <a:txBody>
-                    <a:bodyPr wrap="square"/>
+                    <a:bodyPr/>
                     <a:lstStyle/>
                     <a:p>
                       <a:pPr algn="l"/>
@@ -8582,7 +8582,7 @@
                 </a:tc>
                 <a:tc>
                   <a:txBody>
-                    <a:bodyPr wrap="square"/>
+                    <a:bodyPr/>
                     <a:lstStyle/>
                     <a:p>
                       <a:pPr algn="l"/>
@@ -8605,7 +8605,7 @@
                 </a:tc>
                 <a:tc>
                   <a:txBody>
-                    <a:bodyPr wrap="square"/>
+                    <a:bodyPr/>
                     <a:lstStyle/>
                     <a:p>
                       <a:pPr algn="l"/>
@@ -8628,7 +8628,7 @@
                 </a:tc>
                 <a:tc>
                   <a:txBody>
-                    <a:bodyPr wrap="square"/>
+                    <a:bodyPr/>
                     <a:lstStyle/>
                     <a:p>
                       <a:pPr algn="l"/>
@@ -8651,7 +8651,7 @@
                 </a:tc>
                 <a:tc>
                   <a:txBody>
-                    <a:bodyPr wrap="square"/>
+                    <a:bodyPr/>
                     <a:lstStyle/>
                     <a:p>
                       <a:pPr algn="l"/>
@@ -8674,7 +8674,7 @@
                 </a:tc>
                 <a:tc>
                   <a:txBody>
-                    <a:bodyPr wrap="square"/>
+                    <a:bodyPr/>
                     <a:lstStyle/>
                     <a:p>
                       <a:pPr algn="l"/>
@@ -8699,7 +8699,7 @@
               <a:tr h="292608">
                 <a:tc>
                   <a:txBody>
-                    <a:bodyPr wrap="square"/>
+                    <a:bodyPr/>
                     <a:lstStyle/>
                     <a:p>
                       <a:pPr algn="l"/>
@@ -8722,7 +8722,7 @@
                 </a:tc>
                 <a:tc>
                   <a:txBody>
-                    <a:bodyPr wrap="square"/>
+                    <a:bodyPr/>
                     <a:lstStyle/>
                     <a:p>
                       <a:pPr algn="l"/>
@@ -8745,7 +8745,7 @@
                 </a:tc>
                 <a:tc>
                   <a:txBody>
-                    <a:bodyPr wrap="square"/>
+                    <a:bodyPr/>
                     <a:lstStyle/>
                     <a:p>
                       <a:pPr algn="l"/>
@@ -8768,7 +8768,7 @@
                 </a:tc>
                 <a:tc>
                   <a:txBody>
-                    <a:bodyPr wrap="square"/>
+                    <a:bodyPr/>
                     <a:lstStyle/>
                     <a:p>
                       <a:pPr algn="l"/>
@@ -8791,7 +8791,7 @@
                 </a:tc>
                 <a:tc>
                   <a:txBody>
-                    <a:bodyPr wrap="square"/>
+                    <a:bodyPr/>
                     <a:lstStyle/>
                     <a:p>
                       <a:pPr algn="l"/>
@@ -8814,7 +8814,7 @@
                 </a:tc>
                 <a:tc>
                   <a:txBody>
-                    <a:bodyPr wrap="square"/>
+                    <a:bodyPr/>
                     <a:lstStyle/>
                     <a:p>
                       <a:pPr algn="l"/>
@@ -8837,7 +8837,7 @@
                 </a:tc>
                 <a:tc>
                   <a:txBody>
-                    <a:bodyPr wrap="square"/>
+                    <a:bodyPr/>
                     <a:lstStyle/>
                     <a:p>
                       <a:pPr algn="l"/>
@@ -8862,7 +8862,7 @@
               <a:tr h="292608">
                 <a:tc>
                   <a:txBody>
-                    <a:bodyPr wrap="square"/>
+                    <a:bodyPr/>
                     <a:lstStyle/>
                     <a:p>
                       <a:pPr algn="l"/>
@@ -8885,7 +8885,7 @@
                 </a:tc>
                 <a:tc>
                   <a:txBody>
-                    <a:bodyPr wrap="square"/>
+                    <a:bodyPr/>
                     <a:lstStyle/>
                     <a:p>
                       <a:pPr algn="l"/>
@@ -8908,7 +8908,7 @@
                 </a:tc>
                 <a:tc>
                   <a:txBody>
-                    <a:bodyPr wrap="square"/>
+                    <a:bodyPr/>
                     <a:lstStyle/>
                     <a:p>
                       <a:pPr algn="l"/>
@@ -8931,7 +8931,7 @@
                 </a:tc>
                 <a:tc>
                   <a:txBody>
-                    <a:bodyPr wrap="square"/>
+                    <a:bodyPr/>
                     <a:lstStyle/>
                     <a:p>
                       <a:pPr algn="l"/>
@@ -8954,7 +8954,7 @@
                 </a:tc>
                 <a:tc>
                   <a:txBody>
-                    <a:bodyPr wrap="square"/>
+                    <a:bodyPr/>
                     <a:lstStyle/>
                     <a:p>
                       <a:pPr algn="l"/>
@@ -8977,7 +8977,7 @@
                 </a:tc>
                 <a:tc>
                   <a:txBody>
-                    <a:bodyPr wrap="square"/>
+                    <a:bodyPr/>
                     <a:lstStyle/>
                     <a:p>
                       <a:pPr algn="l"/>
@@ -9000,7 +9000,7 @@
                 </a:tc>
                 <a:tc>
                   <a:txBody>
-                    <a:bodyPr wrap="square"/>
+                    <a:bodyPr/>
                     <a:lstStyle/>
                     <a:p>
                       <a:pPr algn="l"/>

--- a/IGP_-_CLINI_COMERCIO_IMPORTAC.pptx
+++ b/IGP_-_CLINI_COMERCIO_IMPORTAC.pptx
@@ -147,10 +147,10 @@
               <c:strCache>
                 <c:ptCount val="2"/>
                 <c:pt idx="0">
-                  <c:v>Marco 2026</c:v>
+                  <c:v>Abril 2026</c:v>
                 </c:pt>
                 <c:pt idx="1">
-                  <c:v>Abril 2026</c:v>
+                  <c:v>Maio 2026</c:v>
                 </c:pt>
               </c:strCache>
             </c:strRef>
@@ -162,10 +162,10 @@
                 <c:formatCode>General</c:formatCode>
                 <c:ptCount val="2"/>
                 <c:pt idx="0">
-                  <c:v>0</c:v>
+                  <c:v>82</c:v>
                 </c:pt>
                 <c:pt idx="1">
-                  <c:v>81</c:v>
+                  <c:v>52</c:v>
                 </c:pt>
               </c:numCache>
             </c:numRef>
@@ -196,10 +196,10 @@
               <c:strCache>
                 <c:ptCount val="2"/>
                 <c:pt idx="0">
-                  <c:v>Marco 2026</c:v>
+                  <c:v>Abril 2026</c:v>
                 </c:pt>
                 <c:pt idx="1">
-                  <c:v>Abril 2026</c:v>
+                  <c:v>Maio 2026</c:v>
                 </c:pt>
               </c:strCache>
             </c:strRef>
@@ -211,10 +211,10 @@
                 <c:formatCode>General</c:formatCode>
                 <c:ptCount val="2"/>
                 <c:pt idx="0">
-                  <c:v>0</c:v>
+                  <c:v>1</c:v>
                 </c:pt>
                 <c:pt idx="1">
-                  <c:v>2</c:v>
+                  <c:v>5</c:v>
                 </c:pt>
               </c:numCache>
             </c:numRef>
@@ -3387,7 +3387,7 @@
                 </a:solidFill>
                 <a:latin typeface="Calibri"/>
               </a:rPr>
-              <a:t>INDICADORES ABRIL 2026</a:t>
+              <a:t>INDICADORES MAIO 2026</a:t>
             </a:r>
           </a:p>
         </p:txBody>
@@ -3709,7 +3709,7 @@
                 </a:solidFill>
                 <a:latin typeface="Calibri"/>
               </a:rPr>
-              <a:t>83</a:t>
+              <a:t>57</a:t>
             </a:r>
           </a:p>
         </p:txBody>
@@ -3824,7 +3824,7 @@
                 </a:solidFill>
                 <a:latin typeface="Calibri"/>
               </a:rPr>
-              <a:t>81</a:t>
+              <a:t>52</a:t>
             </a:r>
           </a:p>
         </p:txBody>
@@ -3939,7 +3939,7 @@
                 </a:solidFill>
                 <a:latin typeface="Calibri"/>
               </a:rPr>
-              <a:t>2</a:t>
+              <a:t>5</a:t>
             </a:r>
           </a:p>
         </p:txBody>
@@ -4050,11 +4050,11 @@
             <a:r>
               <a:rPr sz="2800" b="1">
                 <a:solidFill>
-                  <a:srgbClr val="10B981"/>
+                  <a:srgbClr val="F59E0B"/>
                 </a:solidFill>
                 <a:latin typeface="Calibri"/>
               </a:rPr>
-              <a:t>97.6%</a:t>
+              <a:t>91.2%</a:t>
             </a:r>
           </a:p>
         </p:txBody>
@@ -4155,7 +4155,7 @@
                           </a:solidFill>
                           <a:latin typeface="Calibri"/>
                         </a:rPr>
-                        <a:t>Marco 2026</a:t>
+                        <a:t>Abril 2026</a:t>
                       </a:r>
                     </a:p>
                   </a:txBody>
@@ -4178,7 +4178,7 @@
                           </a:solidFill>
                           <a:latin typeface="Calibri"/>
                         </a:rPr>
-                        <a:t>Abril 2026</a:t>
+                        <a:t>Maio 2026</a:t>
                       </a:r>
                     </a:p>
                   </a:txBody>
@@ -4249,7 +4249,7 @@
                           </a:solidFill>
                           <a:latin typeface="Calibri"/>
                         </a:rPr>
-                        <a:t>0</a:t>
+                        <a:t>83</a:t>
                       </a:r>
                     </a:p>
                   </a:txBody>
@@ -4272,7 +4272,7 @@
                           </a:solidFill>
                           <a:latin typeface="Calibri"/>
                         </a:rPr>
-                        <a:t>83</a:t>
+                        <a:t>57</a:t>
                       </a:r>
                     </a:p>
                   </a:txBody>
@@ -4295,7 +4295,7 @@
                           </a:solidFill>
                           <a:latin typeface="Calibri"/>
                         </a:rPr>
-                        <a:t>+ 83</a:t>
+                        <a:t>- 26</a:t>
                       </a:r>
                     </a:p>
                   </a:txBody>
@@ -4343,7 +4343,7 @@
                           </a:solidFill>
                           <a:latin typeface="Calibri"/>
                         </a:rPr>
-                        <a:t>0</a:t>
+                        <a:t>82</a:t>
                       </a:r>
                     </a:p>
                   </a:txBody>
@@ -4366,7 +4366,7 @@
                           </a:solidFill>
                           <a:latin typeface="Calibri"/>
                         </a:rPr>
-                        <a:t>81</a:t>
+                        <a:t>52</a:t>
                       </a:r>
                     </a:p>
                   </a:txBody>
@@ -4389,7 +4389,7 @@
                           </a:solidFill>
                           <a:latin typeface="Calibri"/>
                         </a:rPr>
-                        <a:t>+ 81</a:t>
+                        <a:t>- 30</a:t>
                       </a:r>
                     </a:p>
                   </a:txBody>
@@ -4437,7 +4437,7 @@
                           </a:solidFill>
                           <a:latin typeface="Calibri"/>
                         </a:rPr>
-                        <a:t>0</a:t>
+                        <a:t>1</a:t>
                       </a:r>
                     </a:p>
                   </a:txBody>
@@ -4460,7 +4460,7 @@
                           </a:solidFill>
                           <a:latin typeface="Calibri"/>
                         </a:rPr>
-                        <a:t>2</a:t>
+                        <a:t>5</a:t>
                       </a:r>
                     </a:p>
                   </a:txBody>
@@ -4483,7 +4483,7 @@
                           </a:solidFill>
                           <a:latin typeface="Calibri"/>
                         </a:rPr>
-                        <a:t>+ 2</a:t>
+                        <a:t>+ 4</a:t>
                       </a:r>
                     </a:p>
                   </a:txBody>
@@ -4531,7 +4531,7 @@
                           </a:solidFill>
                           <a:latin typeface="Calibri"/>
                         </a:rPr>
-                        <a:t>97.6%</a:t>
+                        <a:t>98.8%</a:t>
                       </a:r>
                     </a:p>
                   </a:txBody>
@@ -4554,7 +4554,7 @@
                           </a:solidFill>
                           <a:latin typeface="Calibri"/>
                         </a:rPr>
-                        <a:t>97.6%</a:t>
+                        <a:t>91.2%</a:t>
                       </a:r>
                     </a:p>
                   </a:txBody>
@@ -4577,7 +4577,7 @@
                           </a:solidFill>
                           <a:latin typeface="Calibri"/>
                         </a:rPr>
-                        <a:t>+ 0.0pp</a:t>
+                        <a:t>- 7.6pp</a:t>
                       </a:r>
                     </a:p>
                   </a:txBody>
@@ -4894,7 +4894,7 @@
                           </a:solidFill>
                           <a:latin typeface="Calibri"/>
                         </a:rPr>
-                        <a:t>Marco 2026</a:t>
+                        <a:t>Abril 2026</a:t>
                       </a:r>
                     </a:p>
                   </a:txBody>
@@ -4917,7 +4917,7 @@
                           </a:solidFill>
                           <a:latin typeface="Calibri"/>
                         </a:rPr>
-                        <a:t>0</a:t>
+                        <a:t>83</a:t>
                       </a:r>
                     </a:p>
                   </a:txBody>
@@ -4940,7 +4940,7 @@
                           </a:solidFill>
                           <a:latin typeface="Calibri"/>
                         </a:rPr>
-                        <a:t>0</a:t>
+                        <a:t>82</a:t>
                       </a:r>
                     </a:p>
                   </a:txBody>
@@ -4963,7 +4963,7 @@
                           </a:solidFill>
                           <a:latin typeface="Calibri"/>
                         </a:rPr>
-                        <a:t>0</a:t>
+                        <a:t>1</a:t>
                       </a:r>
                     </a:p>
                   </a:txBody>
@@ -4986,7 +4986,7 @@
                           </a:solidFill>
                           <a:latin typeface="Calibri"/>
                         </a:rPr>
-                        <a:t>97.6%</a:t>
+                        <a:t>98.8%</a:t>
                       </a:r>
                     </a:p>
                   </a:txBody>
@@ -5011,7 +5011,7 @@
                           </a:solidFill>
                           <a:latin typeface="Calibri"/>
                         </a:rPr>
-                        <a:t>Abril 2026</a:t>
+                        <a:t>Maio 2026</a:t>
                       </a:r>
                     </a:p>
                   </a:txBody>
@@ -5034,7 +5034,7 @@
                           </a:solidFill>
                           <a:latin typeface="Calibri"/>
                         </a:rPr>
-                        <a:t>83</a:t>
+                        <a:t>57</a:t>
                       </a:r>
                     </a:p>
                   </a:txBody>
@@ -5057,7 +5057,7 @@
                           </a:solidFill>
                           <a:latin typeface="Calibri"/>
                         </a:rPr>
-                        <a:t>81</a:t>
+                        <a:t>52</a:t>
                       </a:r>
                     </a:p>
                   </a:txBody>
@@ -5080,7 +5080,7 @@
                           </a:solidFill>
                           <a:latin typeface="Calibri"/>
                         </a:rPr>
-                        <a:t>2</a:t>
+                        <a:t>5</a:t>
                       </a:r>
                     </a:p>
                   </a:txBody>
@@ -5103,7 +5103,7 @@
                           </a:solidFill>
                           <a:latin typeface="Calibri"/>
                         </a:rPr>
-                        <a:t>97.6%</a:t>
+                        <a:t>91.2%</a:t>
                       </a:r>
                     </a:p>
                   </a:txBody>
@@ -5191,7 +5191,7 @@
                 </a:solidFill>
                 <a:latin typeface="Calibri"/>
               </a:rPr>
-              <a:t>PERFORMANCE: 97.6% - EXCELENTE</a:t>
+              <a:t>PERFORMANCE: 91.2% - REGULAR</a:t>
             </a:r>
           </a:p>
         </p:txBody>
@@ -5276,7 +5276,7 @@
                 </a:solidFill>
                 <a:latin typeface="Calibri"/>
               </a:rPr>
-              <a:t>OCORRENCIAS FORA DO PRAZO (2)</a:t>
+              <a:t>OCORRENCIAS FORA DO PRAZO (5)</a:t>
             </a:r>
           </a:p>
         </p:txBody>
@@ -5334,7 +5334,7 @@
         </p:nvGraphicFramePr>
         <p:xfrm>
           <a:off x="457200" y="1828800"/>
-          <a:ext cx="11429999" cy="1152144"/>
+          <a:ext cx="11429999" cy="2304288"/>
         </p:xfrm>
         <a:graphic>
           <a:graphicData uri="http://schemas.openxmlformats.org/drawingml/2006/table">
@@ -5480,7 +5480,7 @@
                           </a:solidFill>
                           <a:latin typeface="Calibri"/>
                         </a:rPr>
-                        <a:t>278242</a:t>
+                        <a:t>280764</a:t>
                       </a:r>
                     </a:p>
                   </a:txBody>
@@ -5503,7 +5503,7 @@
                           </a:solidFill>
                           <a:latin typeface="Calibri"/>
                         </a:rPr>
-                        <a:t>IGP - CLINI COMERCIO - SAO JOSE DOS PINHAIS / PR</a:t>
+                        <a:t>RICARDO FRANCIO ME - VIDEIRA / SC</a:t>
                       </a:r>
                     </a:p>
                   </a:txBody>
@@ -5526,7 +5526,7 @@
                           </a:solidFill>
                           <a:latin typeface="Calibri"/>
                         </a:rPr>
-                        <a:t>SAO JOSE DOS PINHAIS/PR</a:t>
+                        <a:t>VIDEIRA/SC</a:t>
                       </a:r>
                     </a:p>
                   </a:txBody>
@@ -5549,7 +5549,7 @@
                           </a:solidFill>
                           <a:latin typeface="Calibri"/>
                         </a:rPr>
-                        <a:t>10/04/2026</a:t>
+                        <a:t>05/05/2026</a:t>
                       </a:r>
                     </a:p>
                   </a:txBody>
@@ -5572,7 +5572,7 @@
                           </a:solidFill>
                           <a:latin typeface="Calibri"/>
                         </a:rPr>
-                        <a:t>ENTREGUE FORA DO PRAZO</a:t>
+                        <a:t>FORA DO PRAZO</a:t>
                       </a:r>
                     </a:p>
                   </a:txBody>
@@ -5597,7 +5597,7 @@
                           </a:solidFill>
                           <a:latin typeface="Calibri"/>
                         </a:rPr>
-                        <a:t>280765</a:t>
+                        <a:t>282800</a:t>
                       </a:r>
                     </a:p>
                   </a:txBody>
@@ -5620,7 +5620,7 @@
                           </a:solidFill>
                           <a:latin typeface="Calibri"/>
                         </a:rPr>
-                        <a:t>VR7 CICLES LTDA - LAGES / SC</a:t>
+                        <a:t>BIKE CENTER SHOP COM - ITAJAI / SC</a:t>
                       </a:r>
                     </a:p>
                   </a:txBody>
@@ -5643,7 +5643,7 @@
                           </a:solidFill>
                           <a:latin typeface="Calibri"/>
                         </a:rPr>
-                        <a:t>LAGES/SC</a:t>
+                        <a:t>ITAJAI/SC</a:t>
                       </a:r>
                     </a:p>
                   </a:txBody>
@@ -5666,7 +5666,7 @@
                           </a:solidFill>
                           <a:latin typeface="Calibri"/>
                         </a:rPr>
-                        <a:t>30/04/2026</a:t>
+                        <a:t>15/05/2026</a:t>
                       </a:r>
                     </a:p>
                   </a:txBody>
@@ -5689,13 +5689,364 @@
                           </a:solidFill>
                           <a:latin typeface="Calibri"/>
                         </a:rPr>
-                        <a:t>ENTREGUE FORA DO PRAZO</a:t>
+                        <a:t>FORA DO PRAZO</a:t>
                       </a:r>
                     </a:p>
                   </a:txBody>
                   <a:tcPr>
                     <a:solidFill>
                       <a:srgbClr val="F2F2F2"/>
+                    </a:solidFill>
+                  </a:tcPr>
+                </a:tc>
+              </a:tr>
+              <a:tr h="384048">
+                <a:tc>
+                  <a:txBody>
+                    <a:bodyPr/>
+                    <a:lstStyle/>
+                    <a:p>
+                      <a:pPr algn="l"/>
+                      <a:r>
+                        <a:rPr sz="1000" b="0">
+                          <a:solidFill>
+                            <a:srgbClr val="1D1B43"/>
+                          </a:solidFill>
+                          <a:latin typeface="Calibri"/>
+                        </a:rPr>
+                        <a:t>283061</a:t>
+                      </a:r>
+                    </a:p>
+                  </a:txBody>
+                  <a:tcPr>
+                    <a:solidFill>
+                      <a:srgbClr val="FFFFFF"/>
+                    </a:solidFill>
+                  </a:tcPr>
+                </a:tc>
+                <a:tc>
+                  <a:txBody>
+                    <a:bodyPr/>
+                    <a:lstStyle/>
+                    <a:p>
+                      <a:pPr algn="l"/>
+                      <a:r>
+                        <a:rPr sz="1000" b="0">
+                          <a:solidFill>
+                            <a:srgbClr val="1D1B43"/>
+                          </a:solidFill>
+                          <a:latin typeface="Calibri"/>
+                        </a:rPr>
+                        <a:t>IGP - CLINI COMERCIO - SAO JOSE DOS PINHAIS / PR</a:t>
+                      </a:r>
+                    </a:p>
+                  </a:txBody>
+                  <a:tcPr>
+                    <a:solidFill>
+                      <a:srgbClr val="FFFFFF"/>
+                    </a:solidFill>
+                  </a:tcPr>
+                </a:tc>
+                <a:tc>
+                  <a:txBody>
+                    <a:bodyPr/>
+                    <a:lstStyle/>
+                    <a:p>
+                      <a:pPr algn="l"/>
+                      <a:r>
+                        <a:rPr sz="1000" b="0">
+                          <a:solidFill>
+                            <a:srgbClr val="1D1B43"/>
+                          </a:solidFill>
+                          <a:latin typeface="Calibri"/>
+                        </a:rPr>
+                        <a:t>SAO JOSE DOS PINHAIS/PR</a:t>
+                      </a:r>
+                    </a:p>
+                  </a:txBody>
+                  <a:tcPr>
+                    <a:solidFill>
+                      <a:srgbClr val="FFFFFF"/>
+                    </a:solidFill>
+                  </a:tcPr>
+                </a:tc>
+                <a:tc>
+                  <a:txBody>
+                    <a:bodyPr/>
+                    <a:lstStyle/>
+                    <a:p>
+                      <a:pPr algn="l"/>
+                      <a:r>
+                        <a:rPr sz="1000" b="0">
+                          <a:solidFill>
+                            <a:srgbClr val="1D1B43"/>
+                          </a:solidFill>
+                          <a:latin typeface="Calibri"/>
+                        </a:rPr>
+                        <a:t>15/05/2026</a:t>
+                      </a:r>
+                    </a:p>
+                  </a:txBody>
+                  <a:tcPr>
+                    <a:solidFill>
+                      <a:srgbClr val="FFFFFF"/>
+                    </a:solidFill>
+                  </a:tcPr>
+                </a:tc>
+                <a:tc>
+                  <a:txBody>
+                    <a:bodyPr/>
+                    <a:lstStyle/>
+                    <a:p>
+                      <a:pPr algn="l"/>
+                      <a:r>
+                        <a:rPr sz="1000" b="0">
+                          <a:solidFill>
+                            <a:srgbClr val="1D1B43"/>
+                          </a:solidFill>
+                          <a:latin typeface="Calibri"/>
+                        </a:rPr>
+                        <a:t>FORA DO PRAZO</a:t>
+                      </a:r>
+                    </a:p>
+                  </a:txBody>
+                  <a:tcPr>
+                    <a:solidFill>
+                      <a:srgbClr val="FFFFFF"/>
+                    </a:solidFill>
+                  </a:tcPr>
+                </a:tc>
+              </a:tr>
+              <a:tr h="384048">
+                <a:tc>
+                  <a:txBody>
+                    <a:bodyPr/>
+                    <a:lstStyle/>
+                    <a:p>
+                      <a:pPr algn="l"/>
+                      <a:r>
+                        <a:rPr sz="1000" b="0">
+                          <a:solidFill>
+                            <a:srgbClr val="1D1B43"/>
+                          </a:solidFill>
+                          <a:latin typeface="Calibri"/>
+                        </a:rPr>
+                        <a:t>283151</a:t>
+                      </a:r>
+                    </a:p>
+                  </a:txBody>
+                  <a:tcPr>
+                    <a:solidFill>
+                      <a:srgbClr val="F2F2F2"/>
+                    </a:solidFill>
+                  </a:tcPr>
+                </a:tc>
+                <a:tc>
+                  <a:txBody>
+                    <a:bodyPr/>
+                    <a:lstStyle/>
+                    <a:p>
+                      <a:pPr algn="l"/>
+                      <a:r>
+                        <a:rPr sz="1000" b="0">
+                          <a:solidFill>
+                            <a:srgbClr val="1D1B43"/>
+                          </a:solidFill>
+                          <a:latin typeface="Calibri"/>
+                        </a:rPr>
+                        <a:t>HERBERT PAUL BRANDT - LONTRAS / SC</a:t>
+                      </a:r>
+                    </a:p>
+                  </a:txBody>
+                  <a:tcPr>
+                    <a:solidFill>
+                      <a:srgbClr val="F2F2F2"/>
+                    </a:solidFill>
+                  </a:tcPr>
+                </a:tc>
+                <a:tc>
+                  <a:txBody>
+                    <a:bodyPr/>
+                    <a:lstStyle/>
+                    <a:p>
+                      <a:pPr algn="l"/>
+                      <a:r>
+                        <a:rPr sz="1000" b="0">
+                          <a:solidFill>
+                            <a:srgbClr val="1D1B43"/>
+                          </a:solidFill>
+                          <a:latin typeface="Calibri"/>
+                        </a:rPr>
+                        <a:t>LONTRAS/SC</a:t>
+                      </a:r>
+                    </a:p>
+                  </a:txBody>
+                  <a:tcPr>
+                    <a:solidFill>
+                      <a:srgbClr val="F2F2F2"/>
+                    </a:solidFill>
+                  </a:tcPr>
+                </a:tc>
+                <a:tc>
+                  <a:txBody>
+                    <a:bodyPr/>
+                    <a:lstStyle/>
+                    <a:p>
+                      <a:pPr algn="l"/>
+                      <a:r>
+                        <a:rPr sz="1000" b="0">
+                          <a:solidFill>
+                            <a:srgbClr val="1D1B43"/>
+                          </a:solidFill>
+                          <a:latin typeface="Calibri"/>
+                        </a:rPr>
+                        <a:t>18/05/2026</a:t>
+                      </a:r>
+                    </a:p>
+                  </a:txBody>
+                  <a:tcPr>
+                    <a:solidFill>
+                      <a:srgbClr val="F2F2F2"/>
+                    </a:solidFill>
+                  </a:tcPr>
+                </a:tc>
+                <a:tc>
+                  <a:txBody>
+                    <a:bodyPr/>
+                    <a:lstStyle/>
+                    <a:p>
+                      <a:pPr algn="l"/>
+                      <a:r>
+                        <a:rPr sz="1000" b="0">
+                          <a:solidFill>
+                            <a:srgbClr val="1D1B43"/>
+                          </a:solidFill>
+                          <a:latin typeface="Calibri"/>
+                        </a:rPr>
+                        <a:t>FORA DO PRAZO</a:t>
+                      </a:r>
+                    </a:p>
+                  </a:txBody>
+                  <a:tcPr>
+                    <a:solidFill>
+                      <a:srgbClr val="F2F2F2"/>
+                    </a:solidFill>
+                  </a:tcPr>
+                </a:tc>
+              </a:tr>
+              <a:tr h="384048">
+                <a:tc>
+                  <a:txBody>
+                    <a:bodyPr/>
+                    <a:lstStyle/>
+                    <a:p>
+                      <a:pPr algn="l"/>
+                      <a:r>
+                        <a:rPr sz="1000" b="0">
+                          <a:solidFill>
+                            <a:srgbClr val="1D1B43"/>
+                          </a:solidFill>
+                          <a:latin typeface="Calibri"/>
+                        </a:rPr>
+                        <a:t>283242</a:t>
+                      </a:r>
+                    </a:p>
+                  </a:txBody>
+                  <a:tcPr>
+                    <a:solidFill>
+                      <a:srgbClr val="FFFFFF"/>
+                    </a:solidFill>
+                  </a:tcPr>
+                </a:tc>
+                <a:tc>
+                  <a:txBody>
+                    <a:bodyPr/>
+                    <a:lstStyle/>
+                    <a:p>
+                      <a:pPr algn="l"/>
+                      <a:r>
+                        <a:rPr sz="1000" b="0">
+                          <a:solidFill>
+                            <a:srgbClr val="1D1B43"/>
+                          </a:solidFill>
+                          <a:latin typeface="Calibri"/>
+                        </a:rPr>
+                        <a:t>CICLO EVO IMPORTACAO - ITAJAI / SC</a:t>
+                      </a:r>
+                    </a:p>
+                  </a:txBody>
+                  <a:tcPr>
+                    <a:solidFill>
+                      <a:srgbClr val="FFFFFF"/>
+                    </a:solidFill>
+                  </a:tcPr>
+                </a:tc>
+                <a:tc>
+                  <a:txBody>
+                    <a:bodyPr/>
+                    <a:lstStyle/>
+                    <a:p>
+                      <a:pPr algn="l"/>
+                      <a:r>
+                        <a:rPr sz="1000" b="0">
+                          <a:solidFill>
+                            <a:srgbClr val="1D1B43"/>
+                          </a:solidFill>
+                          <a:latin typeface="Calibri"/>
+                        </a:rPr>
+                        <a:t>ITAJAI/SC</a:t>
+                      </a:r>
+                    </a:p>
+                  </a:txBody>
+                  <a:tcPr>
+                    <a:solidFill>
+                      <a:srgbClr val="FFFFFF"/>
+                    </a:solidFill>
+                  </a:tcPr>
+                </a:tc>
+                <a:tc>
+                  <a:txBody>
+                    <a:bodyPr/>
+                    <a:lstStyle/>
+                    <a:p>
+                      <a:pPr algn="l"/>
+                      <a:r>
+                        <a:rPr sz="1000" b="0">
+                          <a:solidFill>
+                            <a:srgbClr val="1D1B43"/>
+                          </a:solidFill>
+                          <a:latin typeface="Calibri"/>
+                        </a:rPr>
+                        <a:t>19/05/2026</a:t>
+                      </a:r>
+                    </a:p>
+                  </a:txBody>
+                  <a:tcPr>
+                    <a:solidFill>
+                      <a:srgbClr val="FFFFFF"/>
+                    </a:solidFill>
+                  </a:tcPr>
+                </a:tc>
+                <a:tc>
+                  <a:txBody>
+                    <a:bodyPr/>
+                    <a:lstStyle/>
+                    <a:p>
+                      <a:pPr algn="l"/>
+                      <a:r>
+                        <a:rPr sz="1000" b="0">
+                          <a:solidFill>
+                            <a:srgbClr val="1D1B43"/>
+                          </a:solidFill>
+                          <a:latin typeface="Calibri"/>
+                        </a:rPr>
+                        <a:t>FORA DO PRAZO</a:t>
+                      </a:r>
+                    </a:p>
+                  </a:txBody>
+                  <a:tcPr>
+                    <a:solidFill>
+                      <a:srgbClr val="FFFFFF"/>
                     </a:solidFill>
                   </a:tcPr>
                 </a:tc>
@@ -6035,7 +6386,7 @@
                           </a:solidFill>
                           <a:latin typeface="Calibri"/>
                         </a:rPr>
-                        <a:t>52</a:t>
+                        <a:t>35</a:t>
                       </a:r>
                     </a:p>
                   </a:txBody>
@@ -6058,7 +6409,7 @@
                           </a:solidFill>
                           <a:latin typeface="Calibri"/>
                         </a:rPr>
-                        <a:t>51</a:t>
+                        <a:t>31</a:t>
                       </a:r>
                     </a:p>
                   </a:txBody>
@@ -6081,7 +6432,7 @@
                           </a:solidFill>
                           <a:latin typeface="Calibri"/>
                         </a:rPr>
-                        <a:t>1</a:t>
+                        <a:t>4</a:t>
                       </a:r>
                     </a:p>
                   </a:txBody>
@@ -6104,7 +6455,7 @@
                           </a:solidFill>
                           <a:latin typeface="Calibri"/>
                         </a:rPr>
-                        <a:t>98.1%</a:t>
+                        <a:t>88.6%</a:t>
                       </a:r>
                     </a:p>
                   </a:txBody>
@@ -6127,7 +6478,7 @@
                           </a:solidFill>
                           <a:latin typeface="Calibri"/>
                         </a:rPr>
-                        <a:t>Excelente</a:t>
+                        <a:t>Regular</a:t>
                       </a:r>
                     </a:p>
                   </a:txBody>
@@ -6152,7 +6503,7 @@
                           </a:solidFill>
                           <a:latin typeface="Calibri"/>
                         </a:rPr>
-                        <a:t>PR</a:t>
+                        <a:t>SP</a:t>
                       </a:r>
                     </a:p>
                   </a:txBody>
@@ -6175,7 +6526,7 @@
                           </a:solidFill>
                           <a:latin typeface="Calibri"/>
                         </a:rPr>
-                        <a:t>17</a:t>
+                        <a:t>12</a:t>
                       </a:r>
                     </a:p>
                   </a:txBody>
@@ -6198,7 +6549,7 @@
                           </a:solidFill>
                           <a:latin typeface="Calibri"/>
                         </a:rPr>
-                        <a:t>16</a:t>
+                        <a:t>12</a:t>
                       </a:r>
                     </a:p>
                   </a:txBody>
@@ -6221,7 +6572,7 @@
                           </a:solidFill>
                           <a:latin typeface="Calibri"/>
                         </a:rPr>
-                        <a:t>1</a:t>
+                        <a:t>0</a:t>
                       </a:r>
                     </a:p>
                   </a:txBody>
@@ -6244,7 +6595,7 @@
                           </a:solidFill>
                           <a:latin typeface="Calibri"/>
                         </a:rPr>
-                        <a:t>94.1%</a:t>
+                        <a:t>100.0%</a:t>
                       </a:r>
                     </a:p>
                   </a:txBody>
@@ -6267,7 +6618,7 @@
                           </a:solidFill>
                           <a:latin typeface="Calibri"/>
                         </a:rPr>
-                        <a:t>Regular</a:t>
+                        <a:t>Excelente</a:t>
                       </a:r>
                     </a:p>
                   </a:txBody>
@@ -6292,7 +6643,7 @@
                           </a:solidFill>
                           <a:latin typeface="Calibri"/>
                         </a:rPr>
-                        <a:t>SP</a:t>
+                        <a:t>PR</a:t>
                       </a:r>
                     </a:p>
                   </a:txBody>
@@ -6315,7 +6666,7 @@
                           </a:solidFill>
                           <a:latin typeface="Calibri"/>
                         </a:rPr>
-                        <a:t>14</a:t>
+                        <a:t>10</a:t>
                       </a:r>
                     </a:p>
                   </a:txBody>
@@ -6338,7 +6689,7 @@
                           </a:solidFill>
                           <a:latin typeface="Calibri"/>
                         </a:rPr>
-                        <a:t>14</a:t>
+                        <a:t>9</a:t>
                       </a:r>
                     </a:p>
                   </a:txBody>
@@ -6361,7 +6712,7 @@
                           </a:solidFill>
                           <a:latin typeface="Calibri"/>
                         </a:rPr>
-                        <a:t>0</a:t>
+                        <a:t>1</a:t>
                       </a:r>
                     </a:p>
                   </a:txBody>
@@ -6384,7 +6735,7 @@
                           </a:solidFill>
                           <a:latin typeface="Calibri"/>
                         </a:rPr>
-                        <a:t>100.0%</a:t>
+                        <a:t>90.0%</a:t>
                       </a:r>
                     </a:p>
                   </a:txBody>
@@ -6407,7 +6758,7 @@
                           </a:solidFill>
                           <a:latin typeface="Calibri"/>
                         </a:rPr>
-                        <a:t>Excelente</a:t>
+                        <a:t>Regular</a:t>
                       </a:r>
                     </a:p>
                   </a:txBody>
@@ -6502,7 +6853,7 @@
                 </a:solidFill>
                 <a:latin typeface="Calibri"/>
               </a:rPr>
-              <a:t>TOP DESTINATARIOS (29 pontos)</a:t>
+              <a:t>TOP DESTINATARIOS (32 pontos)</a:t>
             </a:r>
           </a:p>
         </p:txBody>
@@ -6800,7 +7151,7 @@
                           </a:solidFill>
                           <a:latin typeface="Calibri"/>
                         </a:rPr>
-                        <a:t>17</a:t>
+                        <a:t>9</a:t>
                       </a:r>
                     </a:p>
                   </a:txBody>
@@ -6823,7 +7174,7 @@
                           </a:solidFill>
                           <a:latin typeface="Calibri"/>
                         </a:rPr>
-                        <a:t>16</a:t>
+                        <a:t>8</a:t>
                       </a:r>
                     </a:p>
                   </a:txBody>
@@ -6869,7 +7220,7 @@
                           </a:solidFill>
                           <a:latin typeface="Calibri"/>
                         </a:rPr>
-                        <a:t>94.1%</a:t>
+                        <a:t>88.9%</a:t>
                       </a:r>
                     </a:p>
                   </a:txBody>
@@ -6940,7 +7291,7 @@
                           </a:solidFill>
                           <a:latin typeface="Calibri"/>
                         </a:rPr>
-                        <a:t>FELIPE MARANGONU ME - BLUMENAU / SC</a:t>
+                        <a:t>CICLES HOFFMANN COME - FLORIANOPOLIS / SC</a:t>
                       </a:r>
                     </a:p>
                   </a:txBody>
@@ -6963,7 +7314,7 @@
                           </a:solidFill>
                           <a:latin typeface="Calibri"/>
                         </a:rPr>
-                        <a:t>6</a:t>
+                        <a:t>5</a:t>
                       </a:r>
                     </a:p>
                   </a:txBody>
@@ -6986,7 +7337,7 @@
                           </a:solidFill>
                           <a:latin typeface="Calibri"/>
                         </a:rPr>
-                        <a:t>6</a:t>
+                        <a:t>5</a:t>
                       </a:r>
                     </a:p>
                   </a:txBody>
@@ -7103,7 +7454,7 @@
                           </a:solidFill>
                           <a:latin typeface="Calibri"/>
                         </a:rPr>
-                        <a:t>RAFAEL PONCHEKI - ME - JOINVILLE / SC</a:t>
+                        <a:t>CARBON COMERCIO DE B - CRICIUMA / SC</a:t>
                       </a:r>
                     </a:p>
                   </a:txBody>
@@ -7126,7 +7477,7 @@
                           </a:solidFill>
                           <a:latin typeface="Calibri"/>
                         </a:rPr>
-                        <a:t>6</a:t>
+                        <a:t>4</a:t>
                       </a:r>
                     </a:p>
                   </a:txBody>
@@ -7149,7 +7500,7 @@
                           </a:solidFill>
                           <a:latin typeface="Calibri"/>
                         </a:rPr>
-                        <a:t>6</a:t>
+                        <a:t>4</a:t>
                       </a:r>
                     </a:p>
                   </a:txBody>
@@ -7266,7 +7617,7 @@
                           </a:solidFill>
                           <a:latin typeface="Calibri"/>
                         </a:rPr>
-                        <a:t>CARBON COMERCIO DE B - CRICIUMA / SC</a:t>
+                        <a:t>AK VASCONCELOS - SAO PAULO / SP</a:t>
                       </a:r>
                     </a:p>
                   </a:txBody>
@@ -7289,7 +7640,7 @@
                           </a:solidFill>
                           <a:latin typeface="Calibri"/>
                         </a:rPr>
-                        <a:t>5</a:t>
+                        <a:t>3</a:t>
                       </a:r>
                     </a:p>
                   </a:txBody>
@@ -7312,7 +7663,7 @@
                           </a:solidFill>
                           <a:latin typeface="Calibri"/>
                         </a:rPr>
-                        <a:t>5</a:t>
+                        <a:t>3</a:t>
                       </a:r>
                     </a:p>
                   </a:txBody>
@@ -7429,7 +7780,7 @@
                           </a:solidFill>
                           <a:latin typeface="Calibri"/>
                         </a:rPr>
-                        <a:t>AK VASCONCELOS - SAO PAULO / SP</a:t>
+                        <a:t>CASTRO&amp;LIN MANUT - SAO PAULO / SP</a:t>
                       </a:r>
                     </a:p>
                   </a:txBody>
@@ -7452,7 +7803,7 @@
                           </a:solidFill>
                           <a:latin typeface="Calibri"/>
                         </a:rPr>
-                        <a:t>5</a:t>
+                        <a:t>3</a:t>
                       </a:r>
                     </a:p>
                   </a:txBody>
@@ -7475,7 +7826,7 @@
                           </a:solidFill>
                           <a:latin typeface="Calibri"/>
                         </a:rPr>
-                        <a:t>5</a:t>
+                        <a:t>3</a:t>
                       </a:r>
                     </a:p>
                   </a:txBody>
@@ -7592,7 +7943,7 @@
                           </a:solidFill>
                           <a:latin typeface="Calibri"/>
                         </a:rPr>
-                        <a:t>SF BIKES - INDAIAL / SC</a:t>
+                        <a:t>DEMARCHI S BIKE SHOP - SAO BENTO DO SUL / SC</a:t>
                       </a:r>
                     </a:p>
                   </a:txBody>
@@ -7615,7 +7966,7 @@
                           </a:solidFill>
                           <a:latin typeface="Calibri"/>
                         </a:rPr>
-                        <a:t>4</a:t>
+                        <a:t>2</a:t>
                       </a:r>
                     </a:p>
                   </a:txBody>
@@ -7638,7 +7989,7 @@
                           </a:solidFill>
                           <a:latin typeface="Calibri"/>
                         </a:rPr>
-                        <a:t>4</a:t>
+                        <a:t>2</a:t>
                       </a:r>
                     </a:p>
                   </a:txBody>
@@ -7755,7 +8106,7 @@
                           </a:solidFill>
                           <a:latin typeface="Calibri"/>
                         </a:rPr>
-                        <a:t>CICLES HOFFMANN COME - FLORIANOPOLIS / SC</a:t>
+                        <a:t>MARCELO MOSER - BLUMENAU / SC</a:t>
                       </a:r>
                     </a:p>
                   </a:txBody>
@@ -7778,7 +8129,7 @@
                           </a:solidFill>
                           <a:latin typeface="Calibri"/>
                         </a:rPr>
-                        <a:t>4</a:t>
+                        <a:t>2</a:t>
                       </a:r>
                     </a:p>
                   </a:txBody>
@@ -7801,7 +8152,7 @@
                           </a:solidFill>
                           <a:latin typeface="Calibri"/>
                         </a:rPr>
-                        <a:t>4</a:t>
+                        <a:t>2</a:t>
                       </a:r>
                     </a:p>
                   </a:txBody>
@@ -7918,7 +8269,7 @@
                           </a:solidFill>
                           <a:latin typeface="Calibri"/>
                         </a:rPr>
-                        <a:t>FAN BIKES LTDA - SAO JOAO BATISTA / SC</a:t>
+                        <a:t>PORTOEXPRESS LOGISTI - ITAJAI / SC</a:t>
                       </a:r>
                     </a:p>
                   </a:txBody>
@@ -7941,7 +8292,7 @@
                           </a:solidFill>
                           <a:latin typeface="Calibri"/>
                         </a:rPr>
-                        <a:t>4</a:t>
+                        <a:t>2</a:t>
                       </a:r>
                     </a:p>
                   </a:txBody>
@@ -7964,7 +8315,7 @@
                           </a:solidFill>
                           <a:latin typeface="Calibri"/>
                         </a:rPr>
-                        <a:t>4</a:t>
+                        <a:t>2</a:t>
                       </a:r>
                     </a:p>
                   </a:txBody>
@@ -8081,7 +8432,7 @@
                           </a:solidFill>
                           <a:latin typeface="Calibri"/>
                         </a:rPr>
-                        <a:t>IGP-CLINI COM IMP EX - INDAIATUBA / SP</a:t>
+                        <a:t>MATHEUS CONTATORI VO - ITAJAI / SC</a:t>
                       </a:r>
                     </a:p>
                   </a:txBody>
@@ -8104,7 +8455,7 @@
                           </a:solidFill>
                           <a:latin typeface="Calibri"/>
                         </a:rPr>
-                        <a:t>3</a:t>
+                        <a:t>2</a:t>
                       </a:r>
                     </a:p>
                   </a:txBody>
@@ -8127,7 +8478,7 @@
                           </a:solidFill>
                           <a:latin typeface="Calibri"/>
                         </a:rPr>
-                        <a:t>3</a:t>
+                        <a:t>2</a:t>
                       </a:r>
                     </a:p>
                   </a:txBody>
@@ -8244,7 +8595,7 @@
                           </a:solidFill>
                           <a:latin typeface="Calibri"/>
                         </a:rPr>
-                        <a:t>CICLO EVO IMPORTACAO - ITAJAI / SC</a:t>
+                        <a:t>WEIGMANN BICICLETAS - BLUMENAU / SC</a:t>
                       </a:r>
                     </a:p>
                   </a:txBody>
@@ -8267,7 +8618,7 @@
                           </a:solidFill>
                           <a:latin typeface="Calibri"/>
                         </a:rPr>
-                        <a:t>3</a:t>
+                        <a:t>2</a:t>
                       </a:r>
                     </a:p>
                   </a:txBody>
@@ -8290,7 +8641,7 @@
                           </a:solidFill>
                           <a:latin typeface="Calibri"/>
                         </a:rPr>
-                        <a:t>3</a:t>
+                        <a:t>2</a:t>
                       </a:r>
                     </a:p>
                   </a:txBody>
@@ -8407,7 +8758,7 @@
                           </a:solidFill>
                           <a:latin typeface="Calibri"/>
                         </a:rPr>
-                        <a:t>COLINA BIKES LTDA - JOINVILLE / SC</a:t>
+                        <a:t>RICARDO FRANCIO ME - VIDEIRA / SC</a:t>
                       </a:r>
                     </a:p>
                   </a:txBody>
@@ -8453,7 +8804,7 @@
                           </a:solidFill>
                           <a:latin typeface="Calibri"/>
                         </a:rPr>
-                        <a:t>2</a:t>
+                        <a:t>1</a:t>
                       </a:r>
                     </a:p>
                   </a:txBody>
@@ -8476,7 +8827,7 @@
                           </a:solidFill>
                           <a:latin typeface="Calibri"/>
                         </a:rPr>
-                        <a:t>0</a:t>
+                        <a:t>1</a:t>
                       </a:r>
                     </a:p>
                   </a:txBody>
@@ -8499,7 +8850,7 @@
                           </a:solidFill>
                           <a:latin typeface="Calibri"/>
                         </a:rPr>
-                        <a:t>100.0%</a:t>
+                        <a:t>50.0%</a:t>
                       </a:r>
                     </a:p>
                   </a:txBody>
@@ -8522,7 +8873,7 @@
                           </a:solidFill>
                           <a:latin typeface="Calibri"/>
                         </a:rPr>
-                        <a:t>Excelente</a:t>
+                        <a:t>Atencao</a:t>
                       </a:r>
                     </a:p>
                   </a:txBody>
@@ -8570,7 +8921,7 @@
                           </a:solidFill>
                           <a:latin typeface="Calibri"/>
                         </a:rPr>
-                        <a:t>BIKE XTREME COMERCIO - TUBARAO / SC</a:t>
+                        <a:t>CICLO EVO IMPORTACAO - ITAJAI / SC</a:t>
                       </a:r>
                     </a:p>
                   </a:txBody>
@@ -8593,7 +8944,7 @@
                           </a:solidFill>
                           <a:latin typeface="Calibri"/>
                         </a:rPr>
-                        <a:t>2</a:t>
+                        <a:t>1</a:t>
                       </a:r>
                     </a:p>
                   </a:txBody>
@@ -8616,7 +8967,7 @@
                           </a:solidFill>
                           <a:latin typeface="Calibri"/>
                         </a:rPr>
-                        <a:t>2</a:t>
+                        <a:t>0</a:t>
                       </a:r>
                     </a:p>
                   </a:txBody>
@@ -8639,7 +8990,7 @@
                           </a:solidFill>
                           <a:latin typeface="Calibri"/>
                         </a:rPr>
-                        <a:t>0</a:t>
+                        <a:t>1</a:t>
                       </a:r>
                     </a:p>
                   </a:txBody>
@@ -8662,7 +9013,7 @@
                           </a:solidFill>
                           <a:latin typeface="Calibri"/>
                         </a:rPr>
-                        <a:t>100.0%</a:t>
+                        <a:t>0.0%</a:t>
                       </a:r>
                     </a:p>
                   </a:txBody>
@@ -8685,7 +9036,7 @@
                           </a:solidFill>
                           <a:latin typeface="Calibri"/>
                         </a:rPr>
-                        <a:t>Excelente</a:t>
+                        <a:t>Atencao</a:t>
                       </a:r>
                     </a:p>
                   </a:txBody>
@@ -8733,7 +9084,7 @@
                           </a:solidFill>
                           <a:latin typeface="Calibri"/>
                         </a:rPr>
-                        <a:t>DEMARCHI S BIKE SHOP - SAO BENTO DO SUL / SC</a:t>
+                        <a:t>BIKE021 - SAO PAULO / SP</a:t>
                       </a:r>
                     </a:p>
                   </a:txBody>
@@ -8756,7 +9107,7 @@
                           </a:solidFill>
                           <a:latin typeface="Calibri"/>
                         </a:rPr>
-                        <a:t>2</a:t>
+                        <a:t>1</a:t>
                       </a:r>
                     </a:p>
                   </a:txBody>
@@ -8779,7 +9130,7 @@
                           </a:solidFill>
                           <a:latin typeface="Calibri"/>
                         </a:rPr>
-                        <a:t>2</a:t>
+                        <a:t>1</a:t>
                       </a:r>
                     </a:p>
                   </a:txBody>
@@ -8896,7 +9247,7 @@
                           </a:solidFill>
                           <a:latin typeface="Calibri"/>
                         </a:rPr>
-                        <a:t>SMILE CICLES COMERCI - SAO PAULO / SP</a:t>
+                        <a:t>BIKE HOUSE LTDA ME - BLUMENAU / SC</a:t>
                       </a:r>
                     </a:p>
                   </a:txBody>
@@ -8919,7 +9270,7 @@
                           </a:solidFill>
                           <a:latin typeface="Calibri"/>
                         </a:rPr>
-                        <a:t>2</a:t>
+                        <a:t>1</a:t>
                       </a:r>
                     </a:p>
                   </a:txBody>
@@ -8942,7 +9293,7 @@
                           </a:solidFill>
                           <a:latin typeface="Calibri"/>
                         </a:rPr>
-                        <a:t>2</a:t>
+                        <a:t>1</a:t>
                       </a:r>
                     </a:p>
                   </a:txBody>

--- a/IGP_-_CLINI_COMERCIO_IMPORTAC.pptx
+++ b/IGP_-_CLINI_COMERCIO_IMPORTAC.pptx
@@ -143,29 +143,23 @@
           </c:spPr>
           <c:cat>
             <c:strRef>
-              <c:f>Sheet1!$A$2:$A$3</c:f>
+              <c:f>Sheet1!$A$2:$A$2</c:f>
               <c:strCache>
-                <c:ptCount val="2"/>
+                <c:ptCount val="1"/>
                 <c:pt idx="0">
                   <c:v>Abril 2026</c:v>
-                </c:pt>
-                <c:pt idx="1">
-                  <c:v>Maio 2026</c:v>
                 </c:pt>
               </c:strCache>
             </c:strRef>
           </c:cat>
           <c:val>
             <c:numRef>
-              <c:f>Sheet1!$B$2:$B$3</c:f>
+              <c:f>Sheet1!$B$2:$B$2</c:f>
               <c:numCache>
                 <c:formatCode>General</c:formatCode>
-                <c:ptCount val="2"/>
+                <c:ptCount val="1"/>
                 <c:pt idx="0">
                   <c:v>82</c:v>
-                </c:pt>
-                <c:pt idx="1">
-                  <c:v>52</c:v>
                 </c:pt>
               </c:numCache>
             </c:numRef>
@@ -192,29 +186,23 @@
           </c:spPr>
           <c:cat>
             <c:strRef>
-              <c:f>Sheet1!$A$2:$A$3</c:f>
+              <c:f>Sheet1!$A$2:$A$2</c:f>
               <c:strCache>
-                <c:ptCount val="2"/>
+                <c:ptCount val="1"/>
                 <c:pt idx="0">
                   <c:v>Abril 2026</c:v>
-                </c:pt>
-                <c:pt idx="1">
-                  <c:v>Maio 2026</c:v>
                 </c:pt>
               </c:strCache>
             </c:strRef>
           </c:cat>
           <c:val>
             <c:numRef>
-              <c:f>Sheet1!$C$2:$C$3</c:f>
+              <c:f>Sheet1!$C$2:$C$2</c:f>
               <c:numCache>
                 <c:formatCode>General</c:formatCode>
-                <c:ptCount val="2"/>
+                <c:ptCount val="1"/>
                 <c:pt idx="0">
                   <c:v>1</c:v>
-                </c:pt>
-                <c:pt idx="1">
-                  <c:v>5</c:v>
                 </c:pt>
               </c:numCache>
             </c:numRef>
@@ -3387,7 +3375,7 @@
                 </a:solidFill>
                 <a:latin typeface="Calibri"/>
               </a:rPr>
-              <a:t>INDICADORES MAIO 2026</a:t>
+              <a:t>INDICADORES ABRIL 2026</a:t>
             </a:r>
           </a:p>
         </p:txBody>
@@ -3494,14 +3482,13 @@
           <a:p>
             <a:pPr algn="ctr"/>
             <a:r>
-              <a:rPr sz="1600" b="1">
+              <a:rPr sz="1400" b="1">
                 <a:solidFill>
                   <a:srgbClr val="FFFFFF"/>
                 </a:solidFill>
                 <a:latin typeface="Calibri"/>
               </a:rPr>
-              <a:t>Nossa rota e ir alem das
-entregas!</a:t>
+              <a:t>Nossa rota e ir alem das entregas!</a:t>
             </a:r>
           </a:p>
         </p:txBody>
@@ -3709,7 +3696,7 @@
                 </a:solidFill>
                 <a:latin typeface="Calibri"/>
               </a:rPr>
-              <a:t>57</a:t>
+              <a:t>83</a:t>
             </a:r>
           </a:p>
         </p:txBody>
@@ -3824,7 +3811,7 @@
                 </a:solidFill>
                 <a:latin typeface="Calibri"/>
               </a:rPr>
-              <a:t>52</a:t>
+              <a:t>82</a:t>
             </a:r>
           </a:p>
         </p:txBody>
@@ -3939,7 +3926,7 @@
                 </a:solidFill>
                 <a:latin typeface="Calibri"/>
               </a:rPr>
-              <a:t>5</a:t>
+              <a:t>1</a:t>
             </a:r>
           </a:p>
         </p:txBody>
@@ -4050,11 +4037,11 @@
             <a:r>
               <a:rPr sz="2800" b="1">
                 <a:solidFill>
-                  <a:srgbClr val="F59E0B"/>
+                  <a:srgbClr val="10B981"/>
                 </a:solidFill>
                 <a:latin typeface="Calibri"/>
               </a:rPr>
-              <a:t>91.2%</a:t>
+              <a:t>98.8%</a:t>
             </a:r>
           </a:p>
         </p:txBody>
@@ -4155,30 +4142,30 @@
                           </a:solidFill>
                           <a:latin typeface="Calibri"/>
                         </a:rPr>
+                        <a:t>Marco 2026</a:t>
+                      </a:r>
+                    </a:p>
+                  </a:txBody>
+                  <a:tcPr>
+                    <a:solidFill>
+                      <a:srgbClr val="1D1B43"/>
+                    </a:solidFill>
+                  </a:tcPr>
+                </a:tc>
+                <a:tc>
+                  <a:txBody>
+                    <a:bodyPr/>
+                    <a:lstStyle/>
+                    <a:p>
+                      <a:pPr algn="ctr"/>
+                      <a:r>
+                        <a:rPr sz="1100" b="1">
+                          <a:solidFill>
+                            <a:srgbClr val="FFFFFF"/>
+                          </a:solidFill>
+                          <a:latin typeface="Calibri"/>
+                        </a:rPr>
                         <a:t>Abril 2026</a:t>
-                      </a:r>
-                    </a:p>
-                  </a:txBody>
-                  <a:tcPr>
-                    <a:solidFill>
-                      <a:srgbClr val="1D1B43"/>
-                    </a:solidFill>
-                  </a:tcPr>
-                </a:tc>
-                <a:tc>
-                  <a:txBody>
-                    <a:bodyPr/>
-                    <a:lstStyle/>
-                    <a:p>
-                      <a:pPr algn="ctr"/>
-                      <a:r>
-                        <a:rPr sz="1100" b="1">
-                          <a:solidFill>
-                            <a:srgbClr val="FFFFFF"/>
-                          </a:solidFill>
-                          <a:latin typeface="Calibri"/>
-                        </a:rPr>
-                        <a:t>Maio 2026</a:t>
                       </a:r>
                     </a:p>
                   </a:txBody>
@@ -4249,6 +4236,29 @@
                           </a:solidFill>
                           <a:latin typeface="Calibri"/>
                         </a:rPr>
+                        <a:t>-</a:t>
+                      </a:r>
+                    </a:p>
+                  </a:txBody>
+                  <a:tcPr>
+                    <a:solidFill>
+                      <a:srgbClr val="FFFFFF"/>
+                    </a:solidFill>
+                  </a:tcPr>
+                </a:tc>
+                <a:tc>
+                  <a:txBody>
+                    <a:bodyPr/>
+                    <a:lstStyle/>
+                    <a:p>
+                      <a:pPr algn="l"/>
+                      <a:r>
+                        <a:rPr sz="1000" b="0">
+                          <a:solidFill>
+                            <a:srgbClr val="1D1B43"/>
+                          </a:solidFill>
+                          <a:latin typeface="Calibri"/>
+                        </a:rPr>
                         <a:t>83</a:t>
                       </a:r>
                     </a:p>
@@ -4272,30 +4282,7 @@
                           </a:solidFill>
                           <a:latin typeface="Calibri"/>
                         </a:rPr>
-                        <a:t>57</a:t>
-                      </a:r>
-                    </a:p>
-                  </a:txBody>
-                  <a:tcPr>
-                    <a:solidFill>
-                      <a:srgbClr val="FFFFFF"/>
-                    </a:solidFill>
-                  </a:tcPr>
-                </a:tc>
-                <a:tc>
-                  <a:txBody>
-                    <a:bodyPr/>
-                    <a:lstStyle/>
-                    <a:p>
-                      <a:pPr algn="l"/>
-                      <a:r>
-                        <a:rPr sz="1000" b="0">
-                          <a:solidFill>
-                            <a:srgbClr val="1D1B43"/>
-                          </a:solidFill>
-                          <a:latin typeface="Calibri"/>
-                        </a:rPr>
-                        <a:t>- 26</a:t>
+                        <a:t>-</a:t>
                       </a:r>
                     </a:p>
                   </a:txBody>
@@ -4343,6 +4330,29 @@
                           </a:solidFill>
                           <a:latin typeface="Calibri"/>
                         </a:rPr>
+                        <a:t>-</a:t>
+                      </a:r>
+                    </a:p>
+                  </a:txBody>
+                  <a:tcPr>
+                    <a:solidFill>
+                      <a:srgbClr val="F2F2F2"/>
+                    </a:solidFill>
+                  </a:tcPr>
+                </a:tc>
+                <a:tc>
+                  <a:txBody>
+                    <a:bodyPr/>
+                    <a:lstStyle/>
+                    <a:p>
+                      <a:pPr algn="l"/>
+                      <a:r>
+                        <a:rPr sz="1000" b="0">
+                          <a:solidFill>
+                            <a:srgbClr val="1D1B43"/>
+                          </a:solidFill>
+                          <a:latin typeface="Calibri"/>
+                        </a:rPr>
                         <a:t>82</a:t>
                       </a:r>
                     </a:p>
@@ -4366,30 +4376,7 @@
                           </a:solidFill>
                           <a:latin typeface="Calibri"/>
                         </a:rPr>
-                        <a:t>52</a:t>
-                      </a:r>
-                    </a:p>
-                  </a:txBody>
-                  <a:tcPr>
-                    <a:solidFill>
-                      <a:srgbClr val="F2F2F2"/>
-                    </a:solidFill>
-                  </a:tcPr>
-                </a:tc>
-                <a:tc>
-                  <a:txBody>
-                    <a:bodyPr/>
-                    <a:lstStyle/>
-                    <a:p>
-                      <a:pPr algn="l"/>
-                      <a:r>
-                        <a:rPr sz="1000" b="0">
-                          <a:solidFill>
-                            <a:srgbClr val="1D1B43"/>
-                          </a:solidFill>
-                          <a:latin typeface="Calibri"/>
-                        </a:rPr>
-                        <a:t>- 30</a:t>
+                        <a:t>-</a:t>
                       </a:r>
                     </a:p>
                   </a:txBody>
@@ -4437,6 +4424,29 @@
                           </a:solidFill>
                           <a:latin typeface="Calibri"/>
                         </a:rPr>
+                        <a:t>-</a:t>
+                      </a:r>
+                    </a:p>
+                  </a:txBody>
+                  <a:tcPr>
+                    <a:solidFill>
+                      <a:srgbClr val="FFFFFF"/>
+                    </a:solidFill>
+                  </a:tcPr>
+                </a:tc>
+                <a:tc>
+                  <a:txBody>
+                    <a:bodyPr/>
+                    <a:lstStyle/>
+                    <a:p>
+                      <a:pPr algn="l"/>
+                      <a:r>
+                        <a:rPr sz="1000" b="0">
+                          <a:solidFill>
+                            <a:srgbClr val="1D1B43"/>
+                          </a:solidFill>
+                          <a:latin typeface="Calibri"/>
+                        </a:rPr>
                         <a:t>1</a:t>
                       </a:r>
                     </a:p>
@@ -4460,30 +4470,7 @@
                           </a:solidFill>
                           <a:latin typeface="Calibri"/>
                         </a:rPr>
-                        <a:t>5</a:t>
-                      </a:r>
-                    </a:p>
-                  </a:txBody>
-                  <a:tcPr>
-                    <a:solidFill>
-                      <a:srgbClr val="FFFFFF"/>
-                    </a:solidFill>
-                  </a:tcPr>
-                </a:tc>
-                <a:tc>
-                  <a:txBody>
-                    <a:bodyPr/>
-                    <a:lstStyle/>
-                    <a:p>
-                      <a:pPr algn="l"/>
-                      <a:r>
-                        <a:rPr sz="1000" b="0">
-                          <a:solidFill>
-                            <a:srgbClr val="1D1B43"/>
-                          </a:solidFill>
-                          <a:latin typeface="Calibri"/>
-                        </a:rPr>
-                        <a:t>+ 4</a:t>
+                        <a:t>-</a:t>
                       </a:r>
                     </a:p>
                   </a:txBody>
@@ -4531,6 +4518,29 @@
                           </a:solidFill>
                           <a:latin typeface="Calibri"/>
                         </a:rPr>
+                        <a:t>-</a:t>
+                      </a:r>
+                    </a:p>
+                  </a:txBody>
+                  <a:tcPr>
+                    <a:solidFill>
+                      <a:srgbClr val="F2F2F2"/>
+                    </a:solidFill>
+                  </a:tcPr>
+                </a:tc>
+                <a:tc>
+                  <a:txBody>
+                    <a:bodyPr/>
+                    <a:lstStyle/>
+                    <a:p>
+                      <a:pPr algn="l"/>
+                      <a:r>
+                        <a:rPr sz="1000" b="0">
+                          <a:solidFill>
+                            <a:srgbClr val="1D1B43"/>
+                          </a:solidFill>
+                          <a:latin typeface="Calibri"/>
+                        </a:rPr>
                         <a:t>98.8%</a:t>
                       </a:r>
                     </a:p>
@@ -4554,30 +4564,7 @@
                           </a:solidFill>
                           <a:latin typeface="Calibri"/>
                         </a:rPr>
-                        <a:t>91.2%</a:t>
-                      </a:r>
-                    </a:p>
-                  </a:txBody>
-                  <a:tcPr>
-                    <a:solidFill>
-                      <a:srgbClr val="F2F2F2"/>
-                    </a:solidFill>
-                  </a:tcPr>
-                </a:tc>
-                <a:tc>
-                  <a:txBody>
-                    <a:bodyPr/>
-                    <a:lstStyle/>
-                    <a:p>
-                      <a:pPr algn="l"/>
-                      <a:r>
-                        <a:rPr sz="1000" b="0">
-                          <a:solidFill>
-                            <a:srgbClr val="1D1B43"/>
-                          </a:solidFill>
-                          <a:latin typeface="Calibri"/>
-                        </a:rPr>
-                        <a:t>- 7.6pp</a:t>
+                        <a:t>-</a:t>
                       </a:r>
                     </a:p>
                   </a:txBody>
@@ -4748,7 +4735,7 @@
         </p:nvGraphicFramePr>
         <p:xfrm>
           <a:off x="7955279" y="2286000"/>
-          <a:ext cx="4480560" cy="1316736"/>
+          <a:ext cx="4480560" cy="877824"/>
         </p:xfrm>
         <a:graphic>
           <a:graphicData uri="http://schemas.openxmlformats.org/drawingml/2006/table">
@@ -4993,123 +4980,6 @@
                   <a:tcPr>
                     <a:solidFill>
                       <a:srgbClr val="FFFFFF"/>
-                    </a:solidFill>
-                  </a:tcPr>
-                </a:tc>
-              </a:tr>
-              <a:tr h="438912">
-                <a:tc>
-                  <a:txBody>
-                    <a:bodyPr/>
-                    <a:lstStyle/>
-                    <a:p>
-                      <a:pPr algn="l"/>
-                      <a:r>
-                        <a:rPr sz="1000" b="0">
-                          <a:solidFill>
-                            <a:srgbClr val="1D1B43"/>
-                          </a:solidFill>
-                          <a:latin typeface="Calibri"/>
-                        </a:rPr>
-                        <a:t>Maio 2026</a:t>
-                      </a:r>
-                    </a:p>
-                  </a:txBody>
-                  <a:tcPr>
-                    <a:solidFill>
-                      <a:srgbClr val="F2F2F2"/>
-                    </a:solidFill>
-                  </a:tcPr>
-                </a:tc>
-                <a:tc>
-                  <a:txBody>
-                    <a:bodyPr/>
-                    <a:lstStyle/>
-                    <a:p>
-                      <a:pPr algn="l"/>
-                      <a:r>
-                        <a:rPr sz="1000" b="0">
-                          <a:solidFill>
-                            <a:srgbClr val="1D1B43"/>
-                          </a:solidFill>
-                          <a:latin typeface="Calibri"/>
-                        </a:rPr>
-                        <a:t>57</a:t>
-                      </a:r>
-                    </a:p>
-                  </a:txBody>
-                  <a:tcPr>
-                    <a:solidFill>
-                      <a:srgbClr val="F2F2F2"/>
-                    </a:solidFill>
-                  </a:tcPr>
-                </a:tc>
-                <a:tc>
-                  <a:txBody>
-                    <a:bodyPr/>
-                    <a:lstStyle/>
-                    <a:p>
-                      <a:pPr algn="l"/>
-                      <a:r>
-                        <a:rPr sz="1000" b="0">
-                          <a:solidFill>
-                            <a:srgbClr val="1D1B43"/>
-                          </a:solidFill>
-                          <a:latin typeface="Calibri"/>
-                        </a:rPr>
-                        <a:t>52</a:t>
-                      </a:r>
-                    </a:p>
-                  </a:txBody>
-                  <a:tcPr>
-                    <a:solidFill>
-                      <a:srgbClr val="F2F2F2"/>
-                    </a:solidFill>
-                  </a:tcPr>
-                </a:tc>
-                <a:tc>
-                  <a:txBody>
-                    <a:bodyPr/>
-                    <a:lstStyle/>
-                    <a:p>
-                      <a:pPr algn="l"/>
-                      <a:r>
-                        <a:rPr sz="1000" b="0">
-                          <a:solidFill>
-                            <a:srgbClr val="1D1B43"/>
-                          </a:solidFill>
-                          <a:latin typeface="Calibri"/>
-                        </a:rPr>
-                        <a:t>5</a:t>
-                      </a:r>
-                    </a:p>
-                  </a:txBody>
-                  <a:tcPr>
-                    <a:solidFill>
-                      <a:srgbClr val="F2F2F2"/>
-                    </a:solidFill>
-                  </a:tcPr>
-                </a:tc>
-                <a:tc>
-                  <a:txBody>
-                    <a:bodyPr/>
-                    <a:lstStyle/>
-                    <a:p>
-                      <a:pPr algn="l"/>
-                      <a:r>
-                        <a:rPr sz="1000" b="0">
-                          <a:solidFill>
-                            <a:srgbClr val="1D1B43"/>
-                          </a:solidFill>
-                          <a:latin typeface="Calibri"/>
-                        </a:rPr>
-                        <a:t>91.2%</a:t>
-                      </a:r>
-                    </a:p>
-                  </a:txBody>
-                  <a:tcPr>
-                    <a:solidFill>
-                      <a:srgbClr val="F2F2F2"/>
                     </a:solidFill>
                   </a:tcPr>
                 </a:tc>
@@ -5191,7 +5061,7 @@
                 </a:solidFill>
                 <a:latin typeface="Calibri"/>
               </a:rPr>
-              <a:t>PERFORMANCE: 91.2% - REGULAR</a:t>
+              <a:t>PERFORMANCE: 98.8% - EXCELENTE</a:t>
             </a:r>
           </a:p>
         </p:txBody>
@@ -5276,7 +5146,7 @@
                 </a:solidFill>
                 <a:latin typeface="Calibri"/>
               </a:rPr>
-              <a:t>OCORRENCIAS FORA DO PRAZO (5)</a:t>
+              <a:t>OCORRENCIAS FORA DO PRAZO (1)</a:t>
             </a:r>
           </a:p>
         </p:txBody>
@@ -5334,7 +5204,7 @@
         </p:nvGraphicFramePr>
         <p:xfrm>
           <a:off x="457200" y="1828800"/>
-          <a:ext cx="11429999" cy="2304288"/>
+          <a:ext cx="11429999" cy="768096"/>
         </p:xfrm>
         <a:graphic>
           <a:graphicData uri="http://schemas.openxmlformats.org/drawingml/2006/table">
@@ -5480,7 +5350,7 @@
                           </a:solidFill>
                           <a:latin typeface="Calibri"/>
                         </a:rPr>
-                        <a:t>280764</a:t>
+                        <a:t>280765</a:t>
                       </a:r>
                     </a:p>
                   </a:txBody>
@@ -5503,7 +5373,7 @@
                           </a:solidFill>
                           <a:latin typeface="Calibri"/>
                         </a:rPr>
-                        <a:t>RICARDO FRANCIO ME - VIDEIRA / SC</a:t>
+                        <a:t>VR7 CICLES LTDA - LAGES / SC</a:t>
                       </a:r>
                     </a:p>
                   </a:txBody>
@@ -5526,7 +5396,7 @@
                           </a:solidFill>
                           <a:latin typeface="Calibri"/>
                         </a:rPr>
-                        <a:t>VIDEIRA/SC</a:t>
+                        <a:t>LAGES/SC</a:t>
                       </a:r>
                     </a:p>
                   </a:txBody>
@@ -5549,7 +5419,7 @@
                           </a:solidFill>
                           <a:latin typeface="Calibri"/>
                         </a:rPr>
-                        <a:t>05/05/2026</a:t>
+                        <a:t>30/04/2026</a:t>
                       </a:r>
                     </a:p>
                   </a:txBody>
@@ -5572,475 +5442,7 @@
                           </a:solidFill>
                           <a:latin typeface="Calibri"/>
                         </a:rPr>
-                        <a:t>FORA DO PRAZO</a:t>
-                      </a:r>
-                    </a:p>
-                  </a:txBody>
-                  <a:tcPr>
-                    <a:solidFill>
-                      <a:srgbClr val="FFFFFF"/>
-                    </a:solidFill>
-                  </a:tcPr>
-                </a:tc>
-              </a:tr>
-              <a:tr h="384048">
-                <a:tc>
-                  <a:txBody>
-                    <a:bodyPr/>
-                    <a:lstStyle/>
-                    <a:p>
-                      <a:pPr algn="l"/>
-                      <a:r>
-                        <a:rPr sz="1000" b="0">
-                          <a:solidFill>
-                            <a:srgbClr val="1D1B43"/>
-                          </a:solidFill>
-                          <a:latin typeface="Calibri"/>
-                        </a:rPr>
-                        <a:t>282800</a:t>
-                      </a:r>
-                    </a:p>
-                  </a:txBody>
-                  <a:tcPr>
-                    <a:solidFill>
-                      <a:srgbClr val="F2F2F2"/>
-                    </a:solidFill>
-                  </a:tcPr>
-                </a:tc>
-                <a:tc>
-                  <a:txBody>
-                    <a:bodyPr/>
-                    <a:lstStyle/>
-                    <a:p>
-                      <a:pPr algn="l"/>
-                      <a:r>
-                        <a:rPr sz="1000" b="0">
-                          <a:solidFill>
-                            <a:srgbClr val="1D1B43"/>
-                          </a:solidFill>
-                          <a:latin typeface="Calibri"/>
-                        </a:rPr>
-                        <a:t>BIKE CENTER SHOP COM - ITAJAI / SC</a:t>
-                      </a:r>
-                    </a:p>
-                  </a:txBody>
-                  <a:tcPr>
-                    <a:solidFill>
-                      <a:srgbClr val="F2F2F2"/>
-                    </a:solidFill>
-                  </a:tcPr>
-                </a:tc>
-                <a:tc>
-                  <a:txBody>
-                    <a:bodyPr/>
-                    <a:lstStyle/>
-                    <a:p>
-                      <a:pPr algn="l"/>
-                      <a:r>
-                        <a:rPr sz="1000" b="0">
-                          <a:solidFill>
-                            <a:srgbClr val="1D1B43"/>
-                          </a:solidFill>
-                          <a:latin typeface="Calibri"/>
-                        </a:rPr>
-                        <a:t>ITAJAI/SC</a:t>
-                      </a:r>
-                    </a:p>
-                  </a:txBody>
-                  <a:tcPr>
-                    <a:solidFill>
-                      <a:srgbClr val="F2F2F2"/>
-                    </a:solidFill>
-                  </a:tcPr>
-                </a:tc>
-                <a:tc>
-                  <a:txBody>
-                    <a:bodyPr/>
-                    <a:lstStyle/>
-                    <a:p>
-                      <a:pPr algn="l"/>
-                      <a:r>
-                        <a:rPr sz="1000" b="0">
-                          <a:solidFill>
-                            <a:srgbClr val="1D1B43"/>
-                          </a:solidFill>
-                          <a:latin typeface="Calibri"/>
-                        </a:rPr>
-                        <a:t>15/05/2026</a:t>
-                      </a:r>
-                    </a:p>
-                  </a:txBody>
-                  <a:tcPr>
-                    <a:solidFill>
-                      <a:srgbClr val="F2F2F2"/>
-                    </a:solidFill>
-                  </a:tcPr>
-                </a:tc>
-                <a:tc>
-                  <a:txBody>
-                    <a:bodyPr/>
-                    <a:lstStyle/>
-                    <a:p>
-                      <a:pPr algn="l"/>
-                      <a:r>
-                        <a:rPr sz="1000" b="0">
-                          <a:solidFill>
-                            <a:srgbClr val="1D1B43"/>
-                          </a:solidFill>
-                          <a:latin typeface="Calibri"/>
-                        </a:rPr>
-                        <a:t>FORA DO PRAZO</a:t>
-                      </a:r>
-                    </a:p>
-                  </a:txBody>
-                  <a:tcPr>
-                    <a:solidFill>
-                      <a:srgbClr val="F2F2F2"/>
-                    </a:solidFill>
-                  </a:tcPr>
-                </a:tc>
-              </a:tr>
-              <a:tr h="384048">
-                <a:tc>
-                  <a:txBody>
-                    <a:bodyPr/>
-                    <a:lstStyle/>
-                    <a:p>
-                      <a:pPr algn="l"/>
-                      <a:r>
-                        <a:rPr sz="1000" b="0">
-                          <a:solidFill>
-                            <a:srgbClr val="1D1B43"/>
-                          </a:solidFill>
-                          <a:latin typeface="Calibri"/>
-                        </a:rPr>
-                        <a:t>283061</a:t>
-                      </a:r>
-                    </a:p>
-                  </a:txBody>
-                  <a:tcPr>
-                    <a:solidFill>
-                      <a:srgbClr val="FFFFFF"/>
-                    </a:solidFill>
-                  </a:tcPr>
-                </a:tc>
-                <a:tc>
-                  <a:txBody>
-                    <a:bodyPr/>
-                    <a:lstStyle/>
-                    <a:p>
-                      <a:pPr algn="l"/>
-                      <a:r>
-                        <a:rPr sz="1000" b="0">
-                          <a:solidFill>
-                            <a:srgbClr val="1D1B43"/>
-                          </a:solidFill>
-                          <a:latin typeface="Calibri"/>
-                        </a:rPr>
-                        <a:t>IGP - CLINI COMERCIO - SAO JOSE DOS PINHAIS / PR</a:t>
-                      </a:r>
-                    </a:p>
-                  </a:txBody>
-                  <a:tcPr>
-                    <a:solidFill>
-                      <a:srgbClr val="FFFFFF"/>
-                    </a:solidFill>
-                  </a:tcPr>
-                </a:tc>
-                <a:tc>
-                  <a:txBody>
-                    <a:bodyPr/>
-                    <a:lstStyle/>
-                    <a:p>
-                      <a:pPr algn="l"/>
-                      <a:r>
-                        <a:rPr sz="1000" b="0">
-                          <a:solidFill>
-                            <a:srgbClr val="1D1B43"/>
-                          </a:solidFill>
-                          <a:latin typeface="Calibri"/>
-                        </a:rPr>
-                        <a:t>SAO JOSE DOS PINHAIS/PR</a:t>
-                      </a:r>
-                    </a:p>
-                  </a:txBody>
-                  <a:tcPr>
-                    <a:solidFill>
-                      <a:srgbClr val="FFFFFF"/>
-                    </a:solidFill>
-                  </a:tcPr>
-                </a:tc>
-                <a:tc>
-                  <a:txBody>
-                    <a:bodyPr/>
-                    <a:lstStyle/>
-                    <a:p>
-                      <a:pPr algn="l"/>
-                      <a:r>
-                        <a:rPr sz="1000" b="0">
-                          <a:solidFill>
-                            <a:srgbClr val="1D1B43"/>
-                          </a:solidFill>
-                          <a:latin typeface="Calibri"/>
-                        </a:rPr>
-                        <a:t>15/05/2026</a:t>
-                      </a:r>
-                    </a:p>
-                  </a:txBody>
-                  <a:tcPr>
-                    <a:solidFill>
-                      <a:srgbClr val="FFFFFF"/>
-                    </a:solidFill>
-                  </a:tcPr>
-                </a:tc>
-                <a:tc>
-                  <a:txBody>
-                    <a:bodyPr/>
-                    <a:lstStyle/>
-                    <a:p>
-                      <a:pPr algn="l"/>
-                      <a:r>
-                        <a:rPr sz="1000" b="0">
-                          <a:solidFill>
-                            <a:srgbClr val="1D1B43"/>
-                          </a:solidFill>
-                          <a:latin typeface="Calibri"/>
-                        </a:rPr>
-                        <a:t>FORA DO PRAZO</a:t>
-                      </a:r>
-                    </a:p>
-                  </a:txBody>
-                  <a:tcPr>
-                    <a:solidFill>
-                      <a:srgbClr val="FFFFFF"/>
-                    </a:solidFill>
-                  </a:tcPr>
-                </a:tc>
-              </a:tr>
-              <a:tr h="384048">
-                <a:tc>
-                  <a:txBody>
-                    <a:bodyPr/>
-                    <a:lstStyle/>
-                    <a:p>
-                      <a:pPr algn="l"/>
-                      <a:r>
-                        <a:rPr sz="1000" b="0">
-                          <a:solidFill>
-                            <a:srgbClr val="1D1B43"/>
-                          </a:solidFill>
-                          <a:latin typeface="Calibri"/>
-                        </a:rPr>
-                        <a:t>283151</a:t>
-                      </a:r>
-                    </a:p>
-                  </a:txBody>
-                  <a:tcPr>
-                    <a:solidFill>
-                      <a:srgbClr val="F2F2F2"/>
-                    </a:solidFill>
-                  </a:tcPr>
-                </a:tc>
-                <a:tc>
-                  <a:txBody>
-                    <a:bodyPr/>
-                    <a:lstStyle/>
-                    <a:p>
-                      <a:pPr algn="l"/>
-                      <a:r>
-                        <a:rPr sz="1000" b="0">
-                          <a:solidFill>
-                            <a:srgbClr val="1D1B43"/>
-                          </a:solidFill>
-                          <a:latin typeface="Calibri"/>
-                        </a:rPr>
-                        <a:t>HERBERT PAUL BRANDT - LONTRAS / SC</a:t>
-                      </a:r>
-                    </a:p>
-                  </a:txBody>
-                  <a:tcPr>
-                    <a:solidFill>
-                      <a:srgbClr val="F2F2F2"/>
-                    </a:solidFill>
-                  </a:tcPr>
-                </a:tc>
-                <a:tc>
-                  <a:txBody>
-                    <a:bodyPr/>
-                    <a:lstStyle/>
-                    <a:p>
-                      <a:pPr algn="l"/>
-                      <a:r>
-                        <a:rPr sz="1000" b="0">
-                          <a:solidFill>
-                            <a:srgbClr val="1D1B43"/>
-                          </a:solidFill>
-                          <a:latin typeface="Calibri"/>
-                        </a:rPr>
-                        <a:t>LONTRAS/SC</a:t>
-                      </a:r>
-                    </a:p>
-                  </a:txBody>
-                  <a:tcPr>
-                    <a:solidFill>
-                      <a:srgbClr val="F2F2F2"/>
-                    </a:solidFill>
-                  </a:tcPr>
-                </a:tc>
-                <a:tc>
-                  <a:txBody>
-                    <a:bodyPr/>
-                    <a:lstStyle/>
-                    <a:p>
-                      <a:pPr algn="l"/>
-                      <a:r>
-                        <a:rPr sz="1000" b="0">
-                          <a:solidFill>
-                            <a:srgbClr val="1D1B43"/>
-                          </a:solidFill>
-                          <a:latin typeface="Calibri"/>
-                        </a:rPr>
-                        <a:t>18/05/2026</a:t>
-                      </a:r>
-                    </a:p>
-                  </a:txBody>
-                  <a:tcPr>
-                    <a:solidFill>
-                      <a:srgbClr val="F2F2F2"/>
-                    </a:solidFill>
-                  </a:tcPr>
-                </a:tc>
-                <a:tc>
-                  <a:txBody>
-                    <a:bodyPr/>
-                    <a:lstStyle/>
-                    <a:p>
-                      <a:pPr algn="l"/>
-                      <a:r>
-                        <a:rPr sz="1000" b="0">
-                          <a:solidFill>
-                            <a:srgbClr val="1D1B43"/>
-                          </a:solidFill>
-                          <a:latin typeface="Calibri"/>
-                        </a:rPr>
-                        <a:t>FORA DO PRAZO</a:t>
-                      </a:r>
-                    </a:p>
-                  </a:txBody>
-                  <a:tcPr>
-                    <a:solidFill>
-                      <a:srgbClr val="F2F2F2"/>
-                    </a:solidFill>
-                  </a:tcPr>
-                </a:tc>
-              </a:tr>
-              <a:tr h="384048">
-                <a:tc>
-                  <a:txBody>
-                    <a:bodyPr/>
-                    <a:lstStyle/>
-                    <a:p>
-                      <a:pPr algn="l"/>
-                      <a:r>
-                        <a:rPr sz="1000" b="0">
-                          <a:solidFill>
-                            <a:srgbClr val="1D1B43"/>
-                          </a:solidFill>
-                          <a:latin typeface="Calibri"/>
-                        </a:rPr>
-                        <a:t>283242</a:t>
-                      </a:r>
-                    </a:p>
-                  </a:txBody>
-                  <a:tcPr>
-                    <a:solidFill>
-                      <a:srgbClr val="FFFFFF"/>
-                    </a:solidFill>
-                  </a:tcPr>
-                </a:tc>
-                <a:tc>
-                  <a:txBody>
-                    <a:bodyPr/>
-                    <a:lstStyle/>
-                    <a:p>
-                      <a:pPr algn="l"/>
-                      <a:r>
-                        <a:rPr sz="1000" b="0">
-                          <a:solidFill>
-                            <a:srgbClr val="1D1B43"/>
-                          </a:solidFill>
-                          <a:latin typeface="Calibri"/>
-                        </a:rPr>
-                        <a:t>CICLO EVO IMPORTACAO - ITAJAI / SC</a:t>
-                      </a:r>
-                    </a:p>
-                  </a:txBody>
-                  <a:tcPr>
-                    <a:solidFill>
-                      <a:srgbClr val="FFFFFF"/>
-                    </a:solidFill>
-                  </a:tcPr>
-                </a:tc>
-                <a:tc>
-                  <a:txBody>
-                    <a:bodyPr/>
-                    <a:lstStyle/>
-                    <a:p>
-                      <a:pPr algn="l"/>
-                      <a:r>
-                        <a:rPr sz="1000" b="0">
-                          <a:solidFill>
-                            <a:srgbClr val="1D1B43"/>
-                          </a:solidFill>
-                          <a:latin typeface="Calibri"/>
-                        </a:rPr>
-                        <a:t>ITAJAI/SC</a:t>
-                      </a:r>
-                    </a:p>
-                  </a:txBody>
-                  <a:tcPr>
-                    <a:solidFill>
-                      <a:srgbClr val="FFFFFF"/>
-                    </a:solidFill>
-                  </a:tcPr>
-                </a:tc>
-                <a:tc>
-                  <a:txBody>
-                    <a:bodyPr/>
-                    <a:lstStyle/>
-                    <a:p>
-                      <a:pPr algn="l"/>
-                      <a:r>
-                        <a:rPr sz="1000" b="0">
-                          <a:solidFill>
-                            <a:srgbClr val="1D1B43"/>
-                          </a:solidFill>
-                          <a:latin typeface="Calibri"/>
-                        </a:rPr>
-                        <a:t>19/05/2026</a:t>
-                      </a:r>
-                    </a:p>
-                  </a:txBody>
-                  <a:tcPr>
-                    <a:solidFill>
-                      <a:srgbClr val="FFFFFF"/>
-                    </a:solidFill>
-                  </a:tcPr>
-                </a:tc>
-                <a:tc>
-                  <a:txBody>
-                    <a:bodyPr/>
-                    <a:lstStyle/>
-                    <a:p>
-                      <a:pPr algn="l"/>
-                      <a:r>
-                        <a:rPr sz="1000" b="0">
-                          <a:solidFill>
-                            <a:srgbClr val="1D1B43"/>
-                          </a:solidFill>
-                          <a:latin typeface="Calibri"/>
-                        </a:rPr>
-                        <a:t>FORA DO PRAZO</a:t>
+                        <a:t>ENTREGUE FORA DO PRAZO</a:t>
                       </a:r>
                     </a:p>
                   </a:txBody>
@@ -6386,7 +5788,7 @@
                           </a:solidFill>
                           <a:latin typeface="Calibri"/>
                         </a:rPr>
-                        <a:t>35</a:t>
+                        <a:t>52</a:t>
                       </a:r>
                     </a:p>
                   </a:txBody>
@@ -6409,7 +5811,7 @@
                           </a:solidFill>
                           <a:latin typeface="Calibri"/>
                         </a:rPr>
-                        <a:t>31</a:t>
+                        <a:t>51</a:t>
                       </a:r>
                     </a:p>
                   </a:txBody>
@@ -6432,7 +5834,7 @@
                           </a:solidFill>
                           <a:latin typeface="Calibri"/>
                         </a:rPr>
-                        <a:t>4</a:t>
+                        <a:t>1</a:t>
                       </a:r>
                     </a:p>
                   </a:txBody>
@@ -6455,7 +5857,7 @@
                           </a:solidFill>
                           <a:latin typeface="Calibri"/>
                         </a:rPr>
-                        <a:t>88.6%</a:t>
+                        <a:t>98.1%</a:t>
                       </a:r>
                     </a:p>
                   </a:txBody>
@@ -6478,7 +5880,7 @@
                           </a:solidFill>
                           <a:latin typeface="Calibri"/>
                         </a:rPr>
-                        <a:t>Regular</a:t>
+                        <a:t>Excelente</a:t>
                       </a:r>
                     </a:p>
                   </a:txBody>
@@ -6503,7 +5905,7 @@
                           </a:solidFill>
                           <a:latin typeface="Calibri"/>
                         </a:rPr>
-                        <a:t>SP</a:t>
+                        <a:t>PR</a:t>
                       </a:r>
                     </a:p>
                   </a:txBody>
@@ -6526,7 +5928,7 @@
                           </a:solidFill>
                           <a:latin typeface="Calibri"/>
                         </a:rPr>
-                        <a:t>12</a:t>
+                        <a:t>17</a:t>
                       </a:r>
                     </a:p>
                   </a:txBody>
@@ -6549,7 +5951,7 @@
                           </a:solidFill>
                           <a:latin typeface="Calibri"/>
                         </a:rPr>
-                        <a:t>12</a:t>
+                        <a:t>17</a:t>
                       </a:r>
                     </a:p>
                   </a:txBody>
@@ -6643,7 +6045,7 @@
                           </a:solidFill>
                           <a:latin typeface="Calibri"/>
                         </a:rPr>
-                        <a:t>PR</a:t>
+                        <a:t>SP</a:t>
                       </a:r>
                     </a:p>
                   </a:txBody>
@@ -6666,7 +6068,7 @@
                           </a:solidFill>
                           <a:latin typeface="Calibri"/>
                         </a:rPr>
-                        <a:t>10</a:t>
+                        <a:t>14</a:t>
                       </a:r>
                     </a:p>
                   </a:txBody>
@@ -6689,7 +6091,7 @@
                           </a:solidFill>
                           <a:latin typeface="Calibri"/>
                         </a:rPr>
-                        <a:t>9</a:t>
+                        <a:t>14</a:t>
                       </a:r>
                     </a:p>
                   </a:txBody>
@@ -6712,7 +6114,7 @@
                           </a:solidFill>
                           <a:latin typeface="Calibri"/>
                         </a:rPr>
-                        <a:t>1</a:t>
+                        <a:t>0</a:t>
                       </a:r>
                     </a:p>
                   </a:txBody>
@@ -6735,7 +6137,7 @@
                           </a:solidFill>
                           <a:latin typeface="Calibri"/>
                         </a:rPr>
-                        <a:t>90.0%</a:t>
+                        <a:t>100.0%</a:t>
                       </a:r>
                     </a:p>
                   </a:txBody>
@@ -6758,7 +6160,7 @@
                           </a:solidFill>
                           <a:latin typeface="Calibri"/>
                         </a:rPr>
-                        <a:t>Regular</a:t>
+                        <a:t>Excelente</a:t>
                       </a:r>
                     </a:p>
                   </a:txBody>
@@ -6853,7 +6255,7 @@
                 </a:solidFill>
                 <a:latin typeface="Calibri"/>
               </a:rPr>
-              <a:t>TOP DESTINATARIOS (32 pontos)</a:t>
+              <a:t>TOP DESTINATARIOS (29 pontos)</a:t>
             </a:r>
           </a:p>
         </p:txBody>
@@ -7151,7 +6553,7 @@
                           </a:solidFill>
                           <a:latin typeface="Calibri"/>
                         </a:rPr>
-                        <a:t>9</a:t>
+                        <a:t>17</a:t>
                       </a:r>
                     </a:p>
                   </a:txBody>
@@ -7174,7 +6576,7 @@
                           </a:solidFill>
                           <a:latin typeface="Calibri"/>
                         </a:rPr>
-                        <a:t>8</a:t>
+                        <a:t>17</a:t>
                       </a:r>
                     </a:p>
                   </a:txBody>
@@ -7197,7 +6599,7 @@
                           </a:solidFill>
                           <a:latin typeface="Calibri"/>
                         </a:rPr>
-                        <a:t>1</a:t>
+                        <a:t>0</a:t>
                       </a:r>
                     </a:p>
                   </a:txBody>
@@ -7220,7 +6622,7 @@
                           </a:solidFill>
                           <a:latin typeface="Calibri"/>
                         </a:rPr>
-                        <a:t>88.9%</a:t>
+                        <a:t>100.0%</a:t>
                       </a:r>
                     </a:p>
                   </a:txBody>
@@ -7243,7 +6645,7 @@
                           </a:solidFill>
                           <a:latin typeface="Calibri"/>
                         </a:rPr>
-                        <a:t>Regular</a:t>
+                        <a:t>Excelente</a:t>
                       </a:r>
                     </a:p>
                   </a:txBody>
@@ -7291,7 +6693,7 @@
                           </a:solidFill>
                           <a:latin typeface="Calibri"/>
                         </a:rPr>
-                        <a:t>CICLES HOFFMANN COME - FLORIANOPOLIS / SC</a:t>
+                        <a:t>FELIPE MARANGONU ME - BLUMENAU / SC</a:t>
                       </a:r>
                     </a:p>
                   </a:txBody>
@@ -7314,7 +6716,7 @@
                           </a:solidFill>
                           <a:latin typeface="Calibri"/>
                         </a:rPr>
-                        <a:t>5</a:t>
+                        <a:t>6</a:t>
                       </a:r>
                     </a:p>
                   </a:txBody>
@@ -7337,7 +6739,7 @@
                           </a:solidFill>
                           <a:latin typeface="Calibri"/>
                         </a:rPr>
-                        <a:t>5</a:t>
+                        <a:t>6</a:t>
                       </a:r>
                     </a:p>
                   </a:txBody>
@@ -7454,7 +6856,7 @@
                           </a:solidFill>
                           <a:latin typeface="Calibri"/>
                         </a:rPr>
-                        <a:t>CARBON COMERCIO DE B - CRICIUMA / SC</a:t>
+                        <a:t>RAFAEL PONCHEKI - ME - JOINVILLE / SC</a:t>
                       </a:r>
                     </a:p>
                   </a:txBody>
@@ -7477,7 +6879,7 @@
                           </a:solidFill>
                           <a:latin typeface="Calibri"/>
                         </a:rPr>
-                        <a:t>4</a:t>
+                        <a:t>6</a:t>
                       </a:r>
                     </a:p>
                   </a:txBody>
@@ -7500,7 +6902,7 @@
                           </a:solidFill>
                           <a:latin typeface="Calibri"/>
                         </a:rPr>
-                        <a:t>4</a:t>
+                        <a:t>6</a:t>
                       </a:r>
                     </a:p>
                   </a:txBody>
@@ -7617,7 +7019,7 @@
                           </a:solidFill>
                           <a:latin typeface="Calibri"/>
                         </a:rPr>
-                        <a:t>AK VASCONCELOS - SAO PAULO / SP</a:t>
+                        <a:t>CARBON COMERCIO DE B - CRICIUMA / SC</a:t>
                       </a:r>
                     </a:p>
                   </a:txBody>
@@ -7640,7 +7042,7 @@
                           </a:solidFill>
                           <a:latin typeface="Calibri"/>
                         </a:rPr>
-                        <a:t>3</a:t>
+                        <a:t>5</a:t>
                       </a:r>
                     </a:p>
                   </a:txBody>
@@ -7663,7 +7065,7 @@
                           </a:solidFill>
                           <a:latin typeface="Calibri"/>
                         </a:rPr>
-                        <a:t>3</a:t>
+                        <a:t>5</a:t>
                       </a:r>
                     </a:p>
                   </a:txBody>
@@ -7780,7 +7182,7 @@
                           </a:solidFill>
                           <a:latin typeface="Calibri"/>
                         </a:rPr>
-                        <a:t>CASTRO&amp;LIN MANUT - SAO PAULO / SP</a:t>
+                        <a:t>AK VASCONCELOS - SAO PAULO / SP</a:t>
                       </a:r>
                     </a:p>
                   </a:txBody>
@@ -7803,7 +7205,7 @@
                           </a:solidFill>
                           <a:latin typeface="Calibri"/>
                         </a:rPr>
-                        <a:t>3</a:t>
+                        <a:t>5</a:t>
                       </a:r>
                     </a:p>
                   </a:txBody>
@@ -7826,7 +7228,7 @@
                           </a:solidFill>
                           <a:latin typeface="Calibri"/>
                         </a:rPr>
-                        <a:t>3</a:t>
+                        <a:t>5</a:t>
                       </a:r>
                     </a:p>
                   </a:txBody>
@@ -7943,7 +7345,7 @@
                           </a:solidFill>
                           <a:latin typeface="Calibri"/>
                         </a:rPr>
-                        <a:t>DEMARCHI S BIKE SHOP - SAO BENTO DO SUL / SC</a:t>
+                        <a:t>SF BIKES - INDAIAL / SC</a:t>
                       </a:r>
                     </a:p>
                   </a:txBody>
@@ -7966,7 +7368,7 @@
                           </a:solidFill>
                           <a:latin typeface="Calibri"/>
                         </a:rPr>
-                        <a:t>2</a:t>
+                        <a:t>4</a:t>
                       </a:r>
                     </a:p>
                   </a:txBody>
@@ -7989,7 +7391,7 @@
                           </a:solidFill>
                           <a:latin typeface="Calibri"/>
                         </a:rPr>
-                        <a:t>2</a:t>
+                        <a:t>4</a:t>
                       </a:r>
                     </a:p>
                   </a:txBody>
@@ -8106,7 +7508,7 @@
                           </a:solidFill>
                           <a:latin typeface="Calibri"/>
                         </a:rPr>
-                        <a:t>MARCELO MOSER - BLUMENAU / SC</a:t>
+                        <a:t>CICLES HOFFMANN COME - FLORIANOPOLIS / SC</a:t>
                       </a:r>
                     </a:p>
                   </a:txBody>
@@ -8129,7 +7531,7 @@
                           </a:solidFill>
                           <a:latin typeface="Calibri"/>
                         </a:rPr>
-                        <a:t>2</a:t>
+                        <a:t>4</a:t>
                       </a:r>
                     </a:p>
                   </a:txBody>
@@ -8152,7 +7554,7 @@
                           </a:solidFill>
                           <a:latin typeface="Calibri"/>
                         </a:rPr>
-                        <a:t>2</a:t>
+                        <a:t>4</a:t>
                       </a:r>
                     </a:p>
                   </a:txBody>
@@ -8269,7 +7671,7 @@
                           </a:solidFill>
                           <a:latin typeface="Calibri"/>
                         </a:rPr>
-                        <a:t>PORTOEXPRESS LOGISTI - ITAJAI / SC</a:t>
+                        <a:t>FAN BIKES LTDA - SAO JOAO BATISTA / SC</a:t>
                       </a:r>
                     </a:p>
                   </a:txBody>
@@ -8292,7 +7694,7 @@
                           </a:solidFill>
                           <a:latin typeface="Calibri"/>
                         </a:rPr>
-                        <a:t>2</a:t>
+                        <a:t>4</a:t>
                       </a:r>
                     </a:p>
                   </a:txBody>
@@ -8315,7 +7717,7 @@
                           </a:solidFill>
                           <a:latin typeface="Calibri"/>
                         </a:rPr>
-                        <a:t>2</a:t>
+                        <a:t>4</a:t>
                       </a:r>
                     </a:p>
                   </a:txBody>
@@ -8432,7 +7834,7 @@
                           </a:solidFill>
                           <a:latin typeface="Calibri"/>
                         </a:rPr>
-                        <a:t>MATHEUS CONTATORI VO - ITAJAI / SC</a:t>
+                        <a:t>IGP-CLINI COM IMP EX - INDAIATUBA / SP</a:t>
                       </a:r>
                     </a:p>
                   </a:txBody>
@@ -8455,7 +7857,7 @@
                           </a:solidFill>
                           <a:latin typeface="Calibri"/>
                         </a:rPr>
-                        <a:t>2</a:t>
+                        <a:t>3</a:t>
                       </a:r>
                     </a:p>
                   </a:txBody>
@@ -8478,7 +7880,7 @@
                           </a:solidFill>
                           <a:latin typeface="Calibri"/>
                         </a:rPr>
-                        <a:t>2</a:t>
+                        <a:t>3</a:t>
                       </a:r>
                     </a:p>
                   </a:txBody>
@@ -8595,7 +7997,7 @@
                           </a:solidFill>
                           <a:latin typeface="Calibri"/>
                         </a:rPr>
-                        <a:t>WEIGMANN BICICLETAS - BLUMENAU / SC</a:t>
+                        <a:t>CICLO EVO IMPORTACAO - ITAJAI / SC</a:t>
                       </a:r>
                     </a:p>
                   </a:txBody>
@@ -8618,7 +8020,7 @@
                           </a:solidFill>
                           <a:latin typeface="Calibri"/>
                         </a:rPr>
-                        <a:t>2</a:t>
+                        <a:t>3</a:t>
                       </a:r>
                     </a:p>
                   </a:txBody>
@@ -8641,7 +8043,7 @@
                           </a:solidFill>
                           <a:latin typeface="Calibri"/>
                         </a:rPr>
-                        <a:t>2</a:t>
+                        <a:t>3</a:t>
                       </a:r>
                     </a:p>
                   </a:txBody>
@@ -8758,7 +8160,7 @@
                           </a:solidFill>
                           <a:latin typeface="Calibri"/>
                         </a:rPr>
-                        <a:t>RICARDO FRANCIO ME - VIDEIRA / SC</a:t>
+                        <a:t>COLINA BIKES LTDA - JOINVILLE / SC</a:t>
                       </a:r>
                     </a:p>
                   </a:txBody>
@@ -8804,7 +8206,7 @@
                           </a:solidFill>
                           <a:latin typeface="Calibri"/>
                         </a:rPr>
-                        <a:t>1</a:t>
+                        <a:t>2</a:t>
                       </a:r>
                     </a:p>
                   </a:txBody>
@@ -8827,7 +8229,7 @@
                           </a:solidFill>
                           <a:latin typeface="Calibri"/>
                         </a:rPr>
-                        <a:t>1</a:t>
+                        <a:t>0</a:t>
                       </a:r>
                     </a:p>
                   </a:txBody>
@@ -8850,7 +8252,7 @@
                           </a:solidFill>
                           <a:latin typeface="Calibri"/>
                         </a:rPr>
-                        <a:t>50.0%</a:t>
+                        <a:t>100.0%</a:t>
                       </a:r>
                     </a:p>
                   </a:txBody>
@@ -8873,7 +8275,7 @@
                           </a:solidFill>
                           <a:latin typeface="Calibri"/>
                         </a:rPr>
-                        <a:t>Atencao</a:t>
+                        <a:t>Excelente</a:t>
                       </a:r>
                     </a:p>
                   </a:txBody>
@@ -8921,7 +8323,7 @@
                           </a:solidFill>
                           <a:latin typeface="Calibri"/>
                         </a:rPr>
-                        <a:t>CICLO EVO IMPORTACAO - ITAJAI / SC</a:t>
+                        <a:t>BIKE XTREME COMERCIO - TUBARAO / SC</a:t>
                       </a:r>
                     </a:p>
                   </a:txBody>
@@ -8944,7 +8346,7 @@
                           </a:solidFill>
                           <a:latin typeface="Calibri"/>
                         </a:rPr>
-                        <a:t>1</a:t>
+                        <a:t>2</a:t>
                       </a:r>
                     </a:p>
                   </a:txBody>
@@ -8967,6 +8369,29 @@
                           </a:solidFill>
                           <a:latin typeface="Calibri"/>
                         </a:rPr>
+                        <a:t>2</a:t>
+                      </a:r>
+                    </a:p>
+                  </a:txBody>
+                  <a:tcPr>
+                    <a:solidFill>
+                      <a:srgbClr val="F2F2F2"/>
+                    </a:solidFill>
+                  </a:tcPr>
+                </a:tc>
+                <a:tc>
+                  <a:txBody>
+                    <a:bodyPr/>
+                    <a:lstStyle/>
+                    <a:p>
+                      <a:pPr algn="l"/>
+                      <a:r>
+                        <a:rPr sz="1000" b="0">
+                          <a:solidFill>
+                            <a:srgbClr val="1D1B43"/>
+                          </a:solidFill>
+                          <a:latin typeface="Calibri"/>
+                        </a:rPr>
                         <a:t>0</a:t>
                       </a:r>
                     </a:p>
@@ -8990,7 +8415,7 @@
                           </a:solidFill>
                           <a:latin typeface="Calibri"/>
                         </a:rPr>
-                        <a:t>1</a:t>
+                        <a:t>100.0%</a:t>
                       </a:r>
                     </a:p>
                   </a:txBody>
@@ -9013,30 +8438,7 @@
                           </a:solidFill>
                           <a:latin typeface="Calibri"/>
                         </a:rPr>
-                        <a:t>0.0%</a:t>
-                      </a:r>
-                    </a:p>
-                  </a:txBody>
-                  <a:tcPr>
-                    <a:solidFill>
-                      <a:srgbClr val="F2F2F2"/>
-                    </a:solidFill>
-                  </a:tcPr>
-                </a:tc>
-                <a:tc>
-                  <a:txBody>
-                    <a:bodyPr/>
-                    <a:lstStyle/>
-                    <a:p>
-                      <a:pPr algn="l"/>
-                      <a:r>
-                        <a:rPr sz="1000" b="0">
-                          <a:solidFill>
-                            <a:srgbClr val="1D1B43"/>
-                          </a:solidFill>
-                          <a:latin typeface="Calibri"/>
-                        </a:rPr>
-                        <a:t>Atencao</a:t>
+                        <a:t>Excelente</a:t>
                       </a:r>
                     </a:p>
                   </a:txBody>
@@ -9084,7 +8486,7 @@
                           </a:solidFill>
                           <a:latin typeface="Calibri"/>
                         </a:rPr>
-                        <a:t>BIKE021 - SAO PAULO / SP</a:t>
+                        <a:t>DEMARCHI S BIKE SHOP - SAO BENTO DO SUL / SC</a:t>
                       </a:r>
                     </a:p>
                   </a:txBody>
@@ -9107,7 +8509,7 @@
                           </a:solidFill>
                           <a:latin typeface="Calibri"/>
                         </a:rPr>
-                        <a:t>1</a:t>
+                        <a:t>2</a:t>
                       </a:r>
                     </a:p>
                   </a:txBody>
@@ -9130,7 +8532,7 @@
                           </a:solidFill>
                           <a:latin typeface="Calibri"/>
                         </a:rPr>
-                        <a:t>1</a:t>
+                        <a:t>2</a:t>
                       </a:r>
                     </a:p>
                   </a:txBody>
@@ -9247,7 +8649,7 @@
                           </a:solidFill>
                           <a:latin typeface="Calibri"/>
                         </a:rPr>
-                        <a:t>BIKE HOUSE LTDA ME - BLUMENAU / SC</a:t>
+                        <a:t>SMILE CICLES COMERCI - SAO PAULO / SP</a:t>
                       </a:r>
                     </a:p>
                   </a:txBody>
@@ -9270,7 +8672,7 @@
                           </a:solidFill>
                           <a:latin typeface="Calibri"/>
                         </a:rPr>
-                        <a:t>1</a:t>
+                        <a:t>2</a:t>
                       </a:r>
                     </a:p>
                   </a:txBody>
@@ -9293,7 +8695,7 @@
                           </a:solidFill>
                           <a:latin typeface="Calibri"/>
                         </a:rPr>
-                        <a:t>1</a:t>
+                        <a:t>2</a:t>
                       </a:r>
                     </a:p>
                   </a:txBody>

--- a/IGP_-_CLINI_COMERCIO_IMPORTAC.pptx
+++ b/IGP_-_CLINI_COMERCIO_IMPORTAC.pptx
@@ -143,10 +143,13 @@
           </c:spPr>
           <c:cat>
             <c:strRef>
-              <c:f>Sheet1!$A$2:$A$2</c:f>
+              <c:f>Sheet1!$A$2:$A$3</c:f>
               <c:strCache>
-                <c:ptCount val="1"/>
+                <c:ptCount val="2"/>
                 <c:pt idx="0">
+                  <c:v>Maio 2026</c:v>
+                </c:pt>
+                <c:pt idx="1">
                   <c:v>Abril 2026</c:v>
                 </c:pt>
               </c:strCache>
@@ -154,11 +157,14 @@
           </c:cat>
           <c:val>
             <c:numRef>
-              <c:f>Sheet1!$B$2:$B$2</c:f>
+              <c:f>Sheet1!$B$2:$B$3</c:f>
               <c:numCache>
                 <c:formatCode>General</c:formatCode>
-                <c:ptCount val="1"/>
+                <c:ptCount val="2"/>
                 <c:pt idx="0">
+                  <c:v>52</c:v>
+                </c:pt>
+                <c:pt idx="1">
                   <c:v>82</c:v>
                 </c:pt>
               </c:numCache>
@@ -186,10 +192,13 @@
           </c:spPr>
           <c:cat>
             <c:strRef>
-              <c:f>Sheet1!$A$2:$A$2</c:f>
+              <c:f>Sheet1!$A$2:$A$3</c:f>
               <c:strCache>
-                <c:ptCount val="1"/>
+                <c:ptCount val="2"/>
                 <c:pt idx="0">
+                  <c:v>Maio 2026</c:v>
+                </c:pt>
+                <c:pt idx="1">
                   <c:v>Abril 2026</c:v>
                 </c:pt>
               </c:strCache>
@@ -197,11 +206,14 @@
           </c:cat>
           <c:val>
             <c:numRef>
-              <c:f>Sheet1!$C$2:$C$2</c:f>
+              <c:f>Sheet1!$C$2:$C$3</c:f>
               <c:numCache>
                 <c:formatCode>General</c:formatCode>
-                <c:ptCount val="1"/>
+                <c:ptCount val="2"/>
                 <c:pt idx="0">
+                  <c:v>5</c:v>
+                </c:pt>
+                <c:pt idx="1">
                   <c:v>1</c:v>
                 </c:pt>
               </c:numCache>
@@ -4142,7 +4154,7 @@
                           </a:solidFill>
                           <a:latin typeface="Calibri"/>
                         </a:rPr>
-                        <a:t>Marco 2026</a:t>
+                        <a:t>Maio 2026</a:t>
                       </a:r>
                     </a:p>
                   </a:txBody>
@@ -4236,7 +4248,7 @@
                           </a:solidFill>
                           <a:latin typeface="Calibri"/>
                         </a:rPr>
-                        <a:t>-</a:t>
+                        <a:t>57</a:t>
                       </a:r>
                     </a:p>
                   </a:txBody>
@@ -4282,7 +4294,7 @@
                           </a:solidFill>
                           <a:latin typeface="Calibri"/>
                         </a:rPr>
-                        <a:t>-</a:t>
+                        <a:t>+ 26</a:t>
                       </a:r>
                     </a:p>
                   </a:txBody>
@@ -4330,7 +4342,7 @@
                           </a:solidFill>
                           <a:latin typeface="Calibri"/>
                         </a:rPr>
-                        <a:t>-</a:t>
+                        <a:t>52</a:t>
                       </a:r>
                     </a:p>
                   </a:txBody>
@@ -4376,7 +4388,7 @@
                           </a:solidFill>
                           <a:latin typeface="Calibri"/>
                         </a:rPr>
-                        <a:t>-</a:t>
+                        <a:t>+ 30</a:t>
                       </a:r>
                     </a:p>
                   </a:txBody>
@@ -4424,7 +4436,7 @@
                           </a:solidFill>
                           <a:latin typeface="Calibri"/>
                         </a:rPr>
-                        <a:t>-</a:t>
+                        <a:t>5</a:t>
                       </a:r>
                     </a:p>
                   </a:txBody>
@@ -4470,7 +4482,7 @@
                           </a:solidFill>
                           <a:latin typeface="Calibri"/>
                         </a:rPr>
-                        <a:t>-</a:t>
+                        <a:t>- 4</a:t>
                       </a:r>
                     </a:p>
                   </a:txBody>
@@ -4518,7 +4530,7 @@
                           </a:solidFill>
                           <a:latin typeface="Calibri"/>
                         </a:rPr>
-                        <a:t>-</a:t>
+                        <a:t>91.2%</a:t>
                       </a:r>
                     </a:p>
                   </a:txBody>
@@ -4564,7 +4576,7 @@
                           </a:solidFill>
                           <a:latin typeface="Calibri"/>
                         </a:rPr>
-                        <a:t>-</a:t>
+                        <a:t>+ 7.6pp</a:t>
                       </a:r>
                     </a:p>
                   </a:txBody>
@@ -4735,7 +4747,7 @@
         </p:nvGraphicFramePr>
         <p:xfrm>
           <a:off x="7955279" y="2286000"/>
-          <a:ext cx="4480560" cy="877824"/>
+          <a:ext cx="4480560" cy="1316736"/>
         </p:xfrm>
         <a:graphic>
           <a:graphicData uri="http://schemas.openxmlformats.org/drawingml/2006/table">
@@ -4881,13 +4893,130 @@
                           </a:solidFill>
                           <a:latin typeface="Calibri"/>
                         </a:rPr>
+                        <a:t>Maio 2026</a:t>
+                      </a:r>
+                    </a:p>
+                  </a:txBody>
+                  <a:tcPr>
+                    <a:solidFill>
+                      <a:srgbClr val="FFFFFF"/>
+                    </a:solidFill>
+                  </a:tcPr>
+                </a:tc>
+                <a:tc>
+                  <a:txBody>
+                    <a:bodyPr/>
+                    <a:lstStyle/>
+                    <a:p>
+                      <a:pPr algn="l"/>
+                      <a:r>
+                        <a:rPr sz="1000" b="0">
+                          <a:solidFill>
+                            <a:srgbClr val="1D1B43"/>
+                          </a:solidFill>
+                          <a:latin typeface="Calibri"/>
+                        </a:rPr>
+                        <a:t>57</a:t>
+                      </a:r>
+                    </a:p>
+                  </a:txBody>
+                  <a:tcPr>
+                    <a:solidFill>
+                      <a:srgbClr val="FFFFFF"/>
+                    </a:solidFill>
+                  </a:tcPr>
+                </a:tc>
+                <a:tc>
+                  <a:txBody>
+                    <a:bodyPr/>
+                    <a:lstStyle/>
+                    <a:p>
+                      <a:pPr algn="l"/>
+                      <a:r>
+                        <a:rPr sz="1000" b="0">
+                          <a:solidFill>
+                            <a:srgbClr val="1D1B43"/>
+                          </a:solidFill>
+                          <a:latin typeface="Calibri"/>
+                        </a:rPr>
+                        <a:t>52</a:t>
+                      </a:r>
+                    </a:p>
+                  </a:txBody>
+                  <a:tcPr>
+                    <a:solidFill>
+                      <a:srgbClr val="FFFFFF"/>
+                    </a:solidFill>
+                  </a:tcPr>
+                </a:tc>
+                <a:tc>
+                  <a:txBody>
+                    <a:bodyPr/>
+                    <a:lstStyle/>
+                    <a:p>
+                      <a:pPr algn="l"/>
+                      <a:r>
+                        <a:rPr sz="1000" b="0">
+                          <a:solidFill>
+                            <a:srgbClr val="1D1B43"/>
+                          </a:solidFill>
+                          <a:latin typeface="Calibri"/>
+                        </a:rPr>
+                        <a:t>5</a:t>
+                      </a:r>
+                    </a:p>
+                  </a:txBody>
+                  <a:tcPr>
+                    <a:solidFill>
+                      <a:srgbClr val="FFFFFF"/>
+                    </a:solidFill>
+                  </a:tcPr>
+                </a:tc>
+                <a:tc>
+                  <a:txBody>
+                    <a:bodyPr/>
+                    <a:lstStyle/>
+                    <a:p>
+                      <a:pPr algn="l"/>
+                      <a:r>
+                        <a:rPr sz="1000" b="0">
+                          <a:solidFill>
+                            <a:srgbClr val="1D1B43"/>
+                          </a:solidFill>
+                          <a:latin typeface="Calibri"/>
+                        </a:rPr>
+                        <a:t>91.2%</a:t>
+                      </a:r>
+                    </a:p>
+                  </a:txBody>
+                  <a:tcPr>
+                    <a:solidFill>
+                      <a:srgbClr val="FFFFFF"/>
+                    </a:solidFill>
+                  </a:tcPr>
+                </a:tc>
+              </a:tr>
+              <a:tr h="438912">
+                <a:tc>
+                  <a:txBody>
+                    <a:bodyPr/>
+                    <a:lstStyle/>
+                    <a:p>
+                      <a:pPr algn="l"/>
+                      <a:r>
+                        <a:rPr sz="1000" b="0">
+                          <a:solidFill>
+                            <a:srgbClr val="1D1B43"/>
+                          </a:solidFill>
+                          <a:latin typeface="Calibri"/>
+                        </a:rPr>
                         <a:t>Abril 2026</a:t>
                       </a:r>
                     </a:p>
                   </a:txBody>
                   <a:tcPr>
                     <a:solidFill>
-                      <a:srgbClr val="FFFFFF"/>
+                      <a:srgbClr val="F2F2F2"/>
                     </a:solidFill>
                   </a:tcPr>
                 </a:tc>
@@ -4910,7 +5039,7 @@
                   </a:txBody>
                   <a:tcPr>
                     <a:solidFill>
-                      <a:srgbClr val="FFFFFF"/>
+                      <a:srgbClr val="F2F2F2"/>
                     </a:solidFill>
                   </a:tcPr>
                 </a:tc>
@@ -4933,7 +5062,7 @@
                   </a:txBody>
                   <a:tcPr>
                     <a:solidFill>
-                      <a:srgbClr val="FFFFFF"/>
+                      <a:srgbClr val="F2F2F2"/>
                     </a:solidFill>
                   </a:tcPr>
                 </a:tc>
@@ -4956,7 +5085,7 @@
                   </a:txBody>
                   <a:tcPr>
                     <a:solidFill>
-                      <a:srgbClr val="FFFFFF"/>
+                      <a:srgbClr val="F2F2F2"/>
                     </a:solidFill>
                   </a:tcPr>
                 </a:tc>
@@ -4979,7 +5108,7 @@
                   </a:txBody>
                   <a:tcPr>
                     <a:solidFill>
-                      <a:srgbClr val="FFFFFF"/>
+                      <a:srgbClr val="F2F2F2"/>
                     </a:solidFill>
                   </a:tcPr>
                 </a:tc>

--- a/IGP_-_CLINI_COMERCIO_IMPORTAC.pptx
+++ b/IGP_-_CLINI_COMERCIO_IMPORTAC.pptx
@@ -162,7 +162,7 @@
                 <c:formatCode>General</c:formatCode>
                 <c:ptCount val="2"/>
                 <c:pt idx="0">
-                  <c:v>52</c:v>
+                  <c:v>73</c:v>
                 </c:pt>
                 <c:pt idx="1">
                   <c:v>82</c:v>
@@ -211,7 +211,7 @@
                 <c:formatCode>General</c:formatCode>
                 <c:ptCount val="2"/>
                 <c:pt idx="0">
-                  <c:v>5</c:v>
+                  <c:v>6</c:v>
                 </c:pt>
                 <c:pt idx="1">
                   <c:v>1</c:v>
@@ -4248,7 +4248,7 @@
                           </a:solidFill>
                           <a:latin typeface="Calibri"/>
                         </a:rPr>
-                        <a:t>57</a:t>
+                        <a:t>79</a:t>
                       </a:r>
                     </a:p>
                   </a:txBody>
@@ -4294,7 +4294,7 @@
                           </a:solidFill>
                           <a:latin typeface="Calibri"/>
                         </a:rPr>
-                        <a:t>+ 26</a:t>
+                        <a:t>+ 4</a:t>
                       </a:r>
                     </a:p>
                   </a:txBody>
@@ -4342,7 +4342,7 @@
                           </a:solidFill>
                           <a:latin typeface="Calibri"/>
                         </a:rPr>
-                        <a:t>52</a:t>
+                        <a:t>73</a:t>
                       </a:r>
                     </a:p>
                   </a:txBody>
@@ -4388,7 +4388,7 @@
                           </a:solidFill>
                           <a:latin typeface="Calibri"/>
                         </a:rPr>
-                        <a:t>+ 30</a:t>
+                        <a:t>+ 9</a:t>
                       </a:r>
                     </a:p>
                   </a:txBody>
@@ -4436,7 +4436,7 @@
                           </a:solidFill>
                           <a:latin typeface="Calibri"/>
                         </a:rPr>
-                        <a:t>5</a:t>
+                        <a:t>6</a:t>
                       </a:r>
                     </a:p>
                   </a:txBody>
@@ -4482,7 +4482,7 @@
                           </a:solidFill>
                           <a:latin typeface="Calibri"/>
                         </a:rPr>
-                        <a:t>- 4</a:t>
+                        <a:t>- 5</a:t>
                       </a:r>
                     </a:p>
                   </a:txBody>
@@ -4530,7 +4530,7 @@
                           </a:solidFill>
                           <a:latin typeface="Calibri"/>
                         </a:rPr>
-                        <a:t>91.2%</a:t>
+                        <a:t>92.4%</a:t>
                       </a:r>
                     </a:p>
                   </a:txBody>
@@ -4576,7 +4576,7 @@
                           </a:solidFill>
                           <a:latin typeface="Calibri"/>
                         </a:rPr>
-                        <a:t>+ 7.6pp</a:t>
+                        <a:t>+ 6.4pp</a:t>
                       </a:r>
                     </a:p>
                   </a:txBody>
@@ -4916,7 +4916,7 @@
                           </a:solidFill>
                           <a:latin typeface="Calibri"/>
                         </a:rPr>
-                        <a:t>57</a:t>
+                        <a:t>79</a:t>
                       </a:r>
                     </a:p>
                   </a:txBody>
@@ -4939,7 +4939,7 @@
                           </a:solidFill>
                           <a:latin typeface="Calibri"/>
                         </a:rPr>
-                        <a:t>52</a:t>
+                        <a:t>73</a:t>
                       </a:r>
                     </a:p>
                   </a:txBody>
@@ -4962,7 +4962,7 @@
                           </a:solidFill>
                           <a:latin typeface="Calibri"/>
                         </a:rPr>
-                        <a:t>5</a:t>
+                        <a:t>6</a:t>
                       </a:r>
                     </a:p>
                   </a:txBody>
@@ -4985,7 +4985,7 @@
                           </a:solidFill>
                           <a:latin typeface="Calibri"/>
                         </a:rPr>
-                        <a:t>91.2%</a:t>
+                        <a:t>92.4%</a:t>
                       </a:r>
                     </a:p>
                   </a:txBody>

--- a/IGP_-_CLINI_COMERCIO_IMPORTAC.pptx
+++ b/IGP_-_CLINI_COMERCIO_IMPORTAC.pptx
@@ -147,10 +147,10 @@
               <c:strCache>
                 <c:ptCount val="2"/>
                 <c:pt idx="0">
-                  <c:v>Maio 2026</c:v>
+                  <c:v>Abril 2026</c:v>
                 </c:pt>
                 <c:pt idx="1">
-                  <c:v>Abril 2026</c:v>
+                  <c:v>Maio 2026</c:v>
                 </c:pt>
               </c:strCache>
             </c:strRef>
@@ -162,10 +162,10 @@
                 <c:formatCode>General</c:formatCode>
                 <c:ptCount val="2"/>
                 <c:pt idx="0">
-                  <c:v>73</c:v>
+                  <c:v>82</c:v>
                 </c:pt>
                 <c:pt idx="1">
-                  <c:v>82</c:v>
+                  <c:v>86</c:v>
                 </c:pt>
               </c:numCache>
             </c:numRef>
@@ -196,10 +196,10 @@
               <c:strCache>
                 <c:ptCount val="2"/>
                 <c:pt idx="0">
-                  <c:v>Maio 2026</c:v>
+                  <c:v>Abril 2026</c:v>
                 </c:pt>
                 <c:pt idx="1">
-                  <c:v>Abril 2026</c:v>
+                  <c:v>Maio 2026</c:v>
                 </c:pt>
               </c:strCache>
             </c:strRef>
@@ -211,10 +211,10 @@
                 <c:formatCode>General</c:formatCode>
                 <c:ptCount val="2"/>
                 <c:pt idx="0">
-                  <c:v>6</c:v>
+                  <c:v>1</c:v>
                 </c:pt>
                 <c:pt idx="1">
-                  <c:v>1</c:v>
+                  <c:v>5</c:v>
                 </c:pt>
               </c:numCache>
             </c:numRef>
@@ -3387,7 +3387,7 @@
                 </a:solidFill>
                 <a:latin typeface="Calibri"/>
               </a:rPr>
-              <a:t>INDICADORES ABRIL 2026</a:t>
+              <a:t>INDICADORES MAIO 2026</a:t>
             </a:r>
           </a:p>
         </p:txBody>
@@ -3708,7 +3708,7 @@
                 </a:solidFill>
                 <a:latin typeface="Calibri"/>
               </a:rPr>
-              <a:t>83</a:t>
+              <a:t>91</a:t>
             </a:r>
           </a:p>
         </p:txBody>
@@ -3823,7 +3823,7 @@
                 </a:solidFill>
                 <a:latin typeface="Calibri"/>
               </a:rPr>
-              <a:t>82</a:t>
+              <a:t>86</a:t>
             </a:r>
           </a:p>
         </p:txBody>
@@ -3938,7 +3938,7 @@
                 </a:solidFill>
                 <a:latin typeface="Calibri"/>
               </a:rPr>
-              <a:t>1</a:t>
+              <a:t>5</a:t>
             </a:r>
           </a:p>
         </p:txBody>
@@ -4049,11 +4049,11 @@
             <a:r>
               <a:rPr sz="2800" b="1">
                 <a:solidFill>
-                  <a:srgbClr val="10B981"/>
+                  <a:srgbClr val="F59E0B"/>
                 </a:solidFill>
                 <a:latin typeface="Calibri"/>
               </a:rPr>
-              <a:t>98.8%</a:t>
+              <a:t>94.5%</a:t>
             </a:r>
           </a:p>
         </p:txBody>
@@ -4154,30 +4154,30 @@
                           </a:solidFill>
                           <a:latin typeface="Calibri"/>
                         </a:rPr>
+                        <a:t>Abril 2026</a:t>
+                      </a:r>
+                    </a:p>
+                  </a:txBody>
+                  <a:tcPr>
+                    <a:solidFill>
+                      <a:srgbClr val="1D1B43"/>
+                    </a:solidFill>
+                  </a:tcPr>
+                </a:tc>
+                <a:tc>
+                  <a:txBody>
+                    <a:bodyPr/>
+                    <a:lstStyle/>
+                    <a:p>
+                      <a:pPr algn="ctr"/>
+                      <a:r>
+                        <a:rPr sz="1100" b="1">
+                          <a:solidFill>
+                            <a:srgbClr val="FFFFFF"/>
+                          </a:solidFill>
+                          <a:latin typeface="Calibri"/>
+                        </a:rPr>
                         <a:t>Maio 2026</a:t>
-                      </a:r>
-                    </a:p>
-                  </a:txBody>
-                  <a:tcPr>
-                    <a:solidFill>
-                      <a:srgbClr val="1D1B43"/>
-                    </a:solidFill>
-                  </a:tcPr>
-                </a:tc>
-                <a:tc>
-                  <a:txBody>
-                    <a:bodyPr/>
-                    <a:lstStyle/>
-                    <a:p>
-                      <a:pPr algn="ctr"/>
-                      <a:r>
-                        <a:rPr sz="1100" b="1">
-                          <a:solidFill>
-                            <a:srgbClr val="FFFFFF"/>
-                          </a:solidFill>
-                          <a:latin typeface="Calibri"/>
-                        </a:rPr>
-                        <a:t>Abril 2026</a:t>
                       </a:r>
                     </a:p>
                   </a:txBody>
@@ -4248,7 +4248,7 @@
                           </a:solidFill>
                           <a:latin typeface="Calibri"/>
                         </a:rPr>
-                        <a:t>79</a:t>
+                        <a:t>83</a:t>
                       </a:r>
                     </a:p>
                   </a:txBody>
@@ -4271,7 +4271,7 @@
                           </a:solidFill>
                           <a:latin typeface="Calibri"/>
                         </a:rPr>
-                        <a:t>83</a:t>
+                        <a:t>91</a:t>
                       </a:r>
                     </a:p>
                   </a:txBody>
@@ -4294,7 +4294,7 @@
                           </a:solidFill>
                           <a:latin typeface="Calibri"/>
                         </a:rPr>
-                        <a:t>+ 4</a:t>
+                        <a:t>+ 8</a:t>
                       </a:r>
                     </a:p>
                   </a:txBody>
@@ -4342,7 +4342,7 @@
                           </a:solidFill>
                           <a:latin typeface="Calibri"/>
                         </a:rPr>
-                        <a:t>73</a:t>
+                        <a:t>82</a:t>
                       </a:r>
                     </a:p>
                   </a:txBody>
@@ -4365,7 +4365,7 @@
                           </a:solidFill>
                           <a:latin typeface="Calibri"/>
                         </a:rPr>
-                        <a:t>82</a:t>
+                        <a:t>86</a:t>
                       </a:r>
                     </a:p>
                   </a:txBody>
@@ -4388,7 +4388,7 @@
                           </a:solidFill>
                           <a:latin typeface="Calibri"/>
                         </a:rPr>
-                        <a:t>+ 9</a:t>
+                        <a:t>+ 4</a:t>
                       </a:r>
                     </a:p>
                   </a:txBody>
@@ -4436,7 +4436,7 @@
                           </a:solidFill>
                           <a:latin typeface="Calibri"/>
                         </a:rPr>
-                        <a:t>6</a:t>
+                        <a:t>1</a:t>
                       </a:r>
                     </a:p>
                   </a:txBody>
@@ -4459,7 +4459,7 @@
                           </a:solidFill>
                           <a:latin typeface="Calibri"/>
                         </a:rPr>
-                        <a:t>1</a:t>
+                        <a:t>5</a:t>
                       </a:r>
                     </a:p>
                   </a:txBody>
@@ -4482,7 +4482,7 @@
                           </a:solidFill>
                           <a:latin typeface="Calibri"/>
                         </a:rPr>
-                        <a:t>- 5</a:t>
+                        <a:t>+ 4</a:t>
                       </a:r>
                     </a:p>
                   </a:txBody>
@@ -4530,7 +4530,7 @@
                           </a:solidFill>
                           <a:latin typeface="Calibri"/>
                         </a:rPr>
-                        <a:t>92.4%</a:t>
+                        <a:t>98.8%</a:t>
                       </a:r>
                     </a:p>
                   </a:txBody>
@@ -4553,7 +4553,7 @@
                           </a:solidFill>
                           <a:latin typeface="Calibri"/>
                         </a:rPr>
-                        <a:t>98.8%</a:t>
+                        <a:t>94.5%</a:t>
                       </a:r>
                     </a:p>
                   </a:txBody>
@@ -4576,7 +4576,7 @@
                           </a:solidFill>
                           <a:latin typeface="Calibri"/>
                         </a:rPr>
-                        <a:t>+ 6.4pp</a:t>
+                        <a:t>- 4.3pp</a:t>
                       </a:r>
                     </a:p>
                   </a:txBody>
@@ -4893,7 +4893,7 @@
                           </a:solidFill>
                           <a:latin typeface="Calibri"/>
                         </a:rPr>
-                        <a:t>Maio 2026</a:t>
+                        <a:t>Abril 2026</a:t>
                       </a:r>
                     </a:p>
                   </a:txBody>
@@ -4916,7 +4916,7 @@
                           </a:solidFill>
                           <a:latin typeface="Calibri"/>
                         </a:rPr>
-                        <a:t>79</a:t>
+                        <a:t>83</a:t>
                       </a:r>
                     </a:p>
                   </a:txBody>
@@ -4939,7 +4939,7 @@
                           </a:solidFill>
                           <a:latin typeface="Calibri"/>
                         </a:rPr>
-                        <a:t>73</a:t>
+                        <a:t>82</a:t>
                       </a:r>
                     </a:p>
                   </a:txBody>
@@ -4962,7 +4962,7 @@
                           </a:solidFill>
                           <a:latin typeface="Calibri"/>
                         </a:rPr>
-                        <a:t>6</a:t>
+                        <a:t>1</a:t>
                       </a:r>
                     </a:p>
                   </a:txBody>
@@ -4985,7 +4985,7 @@
                           </a:solidFill>
                           <a:latin typeface="Calibri"/>
                         </a:rPr>
-                        <a:t>92.4%</a:t>
+                        <a:t>98.8%</a:t>
                       </a:r>
                     </a:p>
                   </a:txBody>
@@ -5010,7 +5010,7 @@
                           </a:solidFill>
                           <a:latin typeface="Calibri"/>
                         </a:rPr>
-                        <a:t>Abril 2026</a:t>
+                        <a:t>Maio 2026</a:t>
                       </a:r>
                     </a:p>
                   </a:txBody>
@@ -5033,7 +5033,7 @@
                           </a:solidFill>
                           <a:latin typeface="Calibri"/>
                         </a:rPr>
-                        <a:t>83</a:t>
+                        <a:t>91</a:t>
                       </a:r>
                     </a:p>
                   </a:txBody>
@@ -5056,7 +5056,7 @@
                           </a:solidFill>
                           <a:latin typeface="Calibri"/>
                         </a:rPr>
-                        <a:t>82</a:t>
+                        <a:t>86</a:t>
                       </a:r>
                     </a:p>
                   </a:txBody>
@@ -5079,7 +5079,7 @@
                           </a:solidFill>
                           <a:latin typeface="Calibri"/>
                         </a:rPr>
-                        <a:t>1</a:t>
+                        <a:t>5</a:t>
                       </a:r>
                     </a:p>
                   </a:txBody>
@@ -5102,7 +5102,7 @@
                           </a:solidFill>
                           <a:latin typeface="Calibri"/>
                         </a:rPr>
-                        <a:t>98.8%</a:t>
+                        <a:t>94.5%</a:t>
                       </a:r>
                     </a:p>
                   </a:txBody>
@@ -5190,7 +5190,7 @@
                 </a:solidFill>
                 <a:latin typeface="Calibri"/>
               </a:rPr>
-              <a:t>PERFORMANCE: 98.8% - EXCELENTE</a:t>
+              <a:t>PERFORMANCE: 94.5% - REGULAR</a:t>
             </a:r>
           </a:p>
         </p:txBody>
@@ -5275,7 +5275,7 @@
                 </a:solidFill>
                 <a:latin typeface="Calibri"/>
               </a:rPr>
-              <a:t>OCORRENCIAS FORA DO PRAZO (1)</a:t>
+              <a:t>OCORRENCIAS FORA DO PRAZO (5)</a:t>
             </a:r>
           </a:p>
         </p:txBody>
@@ -5333,7 +5333,7 @@
         </p:nvGraphicFramePr>
         <p:xfrm>
           <a:off x="457200" y="1828800"/>
-          <a:ext cx="11429999" cy="768096"/>
+          <a:ext cx="11429999" cy="2304288"/>
         </p:xfrm>
         <a:graphic>
           <a:graphicData uri="http://schemas.openxmlformats.org/drawingml/2006/table">
@@ -5479,7 +5479,7 @@
                           </a:solidFill>
                           <a:latin typeface="Calibri"/>
                         </a:rPr>
-                        <a:t>280765</a:t>
+                        <a:t>282800</a:t>
                       </a:r>
                     </a:p>
                   </a:txBody>
@@ -5502,7 +5502,7 @@
                           </a:solidFill>
                           <a:latin typeface="Calibri"/>
                         </a:rPr>
-                        <a:t>VR7 CICLES LTDA - LAGES / SC</a:t>
+                        <a:t>BIKE CENTER SHOP COM - ITAJAI / SC</a:t>
                       </a:r>
                     </a:p>
                   </a:txBody>
@@ -5525,7 +5525,7 @@
                           </a:solidFill>
                           <a:latin typeface="Calibri"/>
                         </a:rPr>
-                        <a:t>LAGES/SC</a:t>
+                        <a:t>ITAJAI/SC</a:t>
                       </a:r>
                     </a:p>
                   </a:txBody>
@@ -5548,7 +5548,7 @@
                           </a:solidFill>
                           <a:latin typeface="Calibri"/>
                         </a:rPr>
-                        <a:t>30/04/2026</a:t>
+                        <a:t>15/05/2026</a:t>
                       </a:r>
                     </a:p>
                   </a:txBody>
@@ -5571,7 +5571,475 @@
                           </a:solidFill>
                           <a:latin typeface="Calibri"/>
                         </a:rPr>
+                        <a:t>FORA DO PRAZO</a:t>
+                      </a:r>
+                    </a:p>
+                  </a:txBody>
+                  <a:tcPr>
+                    <a:solidFill>
+                      <a:srgbClr val="FFFFFF"/>
+                    </a:solidFill>
+                  </a:tcPr>
+                </a:tc>
+              </a:tr>
+              <a:tr h="384048">
+                <a:tc>
+                  <a:txBody>
+                    <a:bodyPr/>
+                    <a:lstStyle/>
+                    <a:p>
+                      <a:pPr algn="l"/>
+                      <a:r>
+                        <a:rPr sz="1000" b="0">
+                          <a:solidFill>
+                            <a:srgbClr val="1D1B43"/>
+                          </a:solidFill>
+                          <a:latin typeface="Calibri"/>
+                        </a:rPr>
+                        <a:t>283061</a:t>
+                      </a:r>
+                    </a:p>
+                  </a:txBody>
+                  <a:tcPr>
+                    <a:solidFill>
+                      <a:srgbClr val="F2F2F2"/>
+                    </a:solidFill>
+                  </a:tcPr>
+                </a:tc>
+                <a:tc>
+                  <a:txBody>
+                    <a:bodyPr/>
+                    <a:lstStyle/>
+                    <a:p>
+                      <a:pPr algn="l"/>
+                      <a:r>
+                        <a:rPr sz="1000" b="0">
+                          <a:solidFill>
+                            <a:srgbClr val="1D1B43"/>
+                          </a:solidFill>
+                          <a:latin typeface="Calibri"/>
+                        </a:rPr>
+                        <a:t>IGP - CLINI COMERCIO - SAO JOSE DOS PINHAIS / PR</a:t>
+                      </a:r>
+                    </a:p>
+                  </a:txBody>
+                  <a:tcPr>
+                    <a:solidFill>
+                      <a:srgbClr val="F2F2F2"/>
+                    </a:solidFill>
+                  </a:tcPr>
+                </a:tc>
+                <a:tc>
+                  <a:txBody>
+                    <a:bodyPr/>
+                    <a:lstStyle/>
+                    <a:p>
+                      <a:pPr algn="l"/>
+                      <a:r>
+                        <a:rPr sz="1000" b="0">
+                          <a:solidFill>
+                            <a:srgbClr val="1D1B43"/>
+                          </a:solidFill>
+                          <a:latin typeface="Calibri"/>
+                        </a:rPr>
+                        <a:t>SAO JOSE DOS PINHAIS/PR</a:t>
+                      </a:r>
+                    </a:p>
+                  </a:txBody>
+                  <a:tcPr>
+                    <a:solidFill>
+                      <a:srgbClr val="F2F2F2"/>
+                    </a:solidFill>
+                  </a:tcPr>
+                </a:tc>
+                <a:tc>
+                  <a:txBody>
+                    <a:bodyPr/>
+                    <a:lstStyle/>
+                    <a:p>
+                      <a:pPr algn="l"/>
+                      <a:r>
+                        <a:rPr sz="1000" b="0">
+                          <a:solidFill>
+                            <a:srgbClr val="1D1B43"/>
+                          </a:solidFill>
+                          <a:latin typeface="Calibri"/>
+                        </a:rPr>
+                        <a:t>15/05/2026</a:t>
+                      </a:r>
+                    </a:p>
+                  </a:txBody>
+                  <a:tcPr>
+                    <a:solidFill>
+                      <a:srgbClr val="F2F2F2"/>
+                    </a:solidFill>
+                  </a:tcPr>
+                </a:tc>
+                <a:tc>
+                  <a:txBody>
+                    <a:bodyPr/>
+                    <a:lstStyle/>
+                    <a:p>
+                      <a:pPr algn="l"/>
+                      <a:r>
+                        <a:rPr sz="1000" b="0">
+                          <a:solidFill>
+                            <a:srgbClr val="1D1B43"/>
+                          </a:solidFill>
+                          <a:latin typeface="Calibri"/>
+                        </a:rPr>
+                        <a:t>FORA DO PRAZO</a:t>
+                      </a:r>
+                    </a:p>
+                  </a:txBody>
+                  <a:tcPr>
+                    <a:solidFill>
+                      <a:srgbClr val="F2F2F2"/>
+                    </a:solidFill>
+                  </a:tcPr>
+                </a:tc>
+              </a:tr>
+              <a:tr h="384048">
+                <a:tc>
+                  <a:txBody>
+                    <a:bodyPr/>
+                    <a:lstStyle/>
+                    <a:p>
+                      <a:pPr algn="l"/>
+                      <a:r>
+                        <a:rPr sz="1000" b="0">
+                          <a:solidFill>
+                            <a:srgbClr val="1D1B43"/>
+                          </a:solidFill>
+                          <a:latin typeface="Calibri"/>
+                        </a:rPr>
+                        <a:t>283151</a:t>
+                      </a:r>
+                    </a:p>
+                  </a:txBody>
+                  <a:tcPr>
+                    <a:solidFill>
+                      <a:srgbClr val="FFFFFF"/>
+                    </a:solidFill>
+                  </a:tcPr>
+                </a:tc>
+                <a:tc>
+                  <a:txBody>
+                    <a:bodyPr/>
+                    <a:lstStyle/>
+                    <a:p>
+                      <a:pPr algn="l"/>
+                      <a:r>
+                        <a:rPr sz="1000" b="0">
+                          <a:solidFill>
+                            <a:srgbClr val="1D1B43"/>
+                          </a:solidFill>
+                          <a:latin typeface="Calibri"/>
+                        </a:rPr>
+                        <a:t>HERBERT PAUL BRANDT - LONTRAS / SC</a:t>
+                      </a:r>
+                    </a:p>
+                  </a:txBody>
+                  <a:tcPr>
+                    <a:solidFill>
+                      <a:srgbClr val="FFFFFF"/>
+                    </a:solidFill>
+                  </a:tcPr>
+                </a:tc>
+                <a:tc>
+                  <a:txBody>
+                    <a:bodyPr/>
+                    <a:lstStyle/>
+                    <a:p>
+                      <a:pPr algn="l"/>
+                      <a:r>
+                        <a:rPr sz="1000" b="0">
+                          <a:solidFill>
+                            <a:srgbClr val="1D1B43"/>
+                          </a:solidFill>
+                          <a:latin typeface="Calibri"/>
+                        </a:rPr>
+                        <a:t>LONTRAS/SC</a:t>
+                      </a:r>
+                    </a:p>
+                  </a:txBody>
+                  <a:tcPr>
+                    <a:solidFill>
+                      <a:srgbClr val="FFFFFF"/>
+                    </a:solidFill>
+                  </a:tcPr>
+                </a:tc>
+                <a:tc>
+                  <a:txBody>
+                    <a:bodyPr/>
+                    <a:lstStyle/>
+                    <a:p>
+                      <a:pPr algn="l"/>
+                      <a:r>
+                        <a:rPr sz="1000" b="0">
+                          <a:solidFill>
+                            <a:srgbClr val="1D1B43"/>
+                          </a:solidFill>
+                          <a:latin typeface="Calibri"/>
+                        </a:rPr>
+                        <a:t>18/05/2026</a:t>
+                      </a:r>
+                    </a:p>
+                  </a:txBody>
+                  <a:tcPr>
+                    <a:solidFill>
+                      <a:srgbClr val="FFFFFF"/>
+                    </a:solidFill>
+                  </a:tcPr>
+                </a:tc>
+                <a:tc>
+                  <a:txBody>
+                    <a:bodyPr/>
+                    <a:lstStyle/>
+                    <a:p>
+                      <a:pPr algn="l"/>
+                      <a:r>
+                        <a:rPr sz="1000" b="0">
+                          <a:solidFill>
+                            <a:srgbClr val="1D1B43"/>
+                          </a:solidFill>
+                          <a:latin typeface="Calibri"/>
+                        </a:rPr>
                         <a:t>ENTREGUE FORA DO PRAZO</a:t>
+                      </a:r>
+                    </a:p>
+                  </a:txBody>
+                  <a:tcPr>
+                    <a:solidFill>
+                      <a:srgbClr val="FFFFFF"/>
+                    </a:solidFill>
+                  </a:tcPr>
+                </a:tc>
+              </a:tr>
+              <a:tr h="384048">
+                <a:tc>
+                  <a:txBody>
+                    <a:bodyPr/>
+                    <a:lstStyle/>
+                    <a:p>
+                      <a:pPr algn="l"/>
+                      <a:r>
+                        <a:rPr sz="1000" b="0">
+                          <a:solidFill>
+                            <a:srgbClr val="1D1B43"/>
+                          </a:solidFill>
+                          <a:latin typeface="Calibri"/>
+                        </a:rPr>
+                        <a:t>283847</a:t>
+                      </a:r>
+                    </a:p>
+                  </a:txBody>
+                  <a:tcPr>
+                    <a:solidFill>
+                      <a:srgbClr val="F2F2F2"/>
+                    </a:solidFill>
+                  </a:tcPr>
+                </a:tc>
+                <a:tc>
+                  <a:txBody>
+                    <a:bodyPr/>
+                    <a:lstStyle/>
+                    <a:p>
+                      <a:pPr algn="l"/>
+                      <a:r>
+                        <a:rPr sz="1000" b="0">
+                          <a:solidFill>
+                            <a:srgbClr val="1D1B43"/>
+                          </a:solidFill>
+                          <a:latin typeface="Calibri"/>
+                        </a:rPr>
+                        <a:t>DARBIKE COMERCIO DE - BRUSQUE / SC</a:t>
+                      </a:r>
+                    </a:p>
+                  </a:txBody>
+                  <a:tcPr>
+                    <a:solidFill>
+                      <a:srgbClr val="F2F2F2"/>
+                    </a:solidFill>
+                  </a:tcPr>
+                </a:tc>
+                <a:tc>
+                  <a:txBody>
+                    <a:bodyPr/>
+                    <a:lstStyle/>
+                    <a:p>
+                      <a:pPr algn="l"/>
+                      <a:r>
+                        <a:rPr sz="1000" b="0">
+                          <a:solidFill>
+                            <a:srgbClr val="1D1B43"/>
+                          </a:solidFill>
+                          <a:latin typeface="Calibri"/>
+                        </a:rPr>
+                        <a:t>BRUSQUE/SC</a:t>
+                      </a:r>
+                    </a:p>
+                  </a:txBody>
+                  <a:tcPr>
+                    <a:solidFill>
+                      <a:srgbClr val="F2F2F2"/>
+                    </a:solidFill>
+                  </a:tcPr>
+                </a:tc>
+                <a:tc>
+                  <a:txBody>
+                    <a:bodyPr/>
+                    <a:lstStyle/>
+                    <a:p>
+                      <a:pPr algn="l"/>
+                      <a:r>
+                        <a:rPr sz="1000" b="0">
+                          <a:solidFill>
+                            <a:srgbClr val="1D1B43"/>
+                          </a:solidFill>
+                          <a:latin typeface="Calibri"/>
+                        </a:rPr>
+                        <a:t>21/05/2026</a:t>
+                      </a:r>
+                    </a:p>
+                  </a:txBody>
+                  <a:tcPr>
+                    <a:solidFill>
+                      <a:srgbClr val="F2F2F2"/>
+                    </a:solidFill>
+                  </a:tcPr>
+                </a:tc>
+                <a:tc>
+                  <a:txBody>
+                    <a:bodyPr/>
+                    <a:lstStyle/>
+                    <a:p>
+                      <a:pPr algn="l"/>
+                      <a:r>
+                        <a:rPr sz="1000" b="0">
+                          <a:solidFill>
+                            <a:srgbClr val="1D1B43"/>
+                          </a:solidFill>
+                          <a:latin typeface="Calibri"/>
+                        </a:rPr>
+                        <a:t>ENTREGUE FORA DO PRAZO</a:t>
+                      </a:r>
+                    </a:p>
+                  </a:txBody>
+                  <a:tcPr>
+                    <a:solidFill>
+                      <a:srgbClr val="F2F2F2"/>
+                    </a:solidFill>
+                  </a:tcPr>
+                </a:tc>
+              </a:tr>
+              <a:tr h="384048">
+                <a:tc>
+                  <a:txBody>
+                    <a:bodyPr/>
+                    <a:lstStyle/>
+                    <a:p>
+                      <a:pPr algn="l"/>
+                      <a:r>
+                        <a:rPr sz="1000" b="0">
+                          <a:solidFill>
+                            <a:srgbClr val="1D1B43"/>
+                          </a:solidFill>
+                          <a:latin typeface="Calibri"/>
+                        </a:rPr>
+                        <a:t>285210</a:t>
+                      </a:r>
+                    </a:p>
+                  </a:txBody>
+                  <a:tcPr>
+                    <a:solidFill>
+                      <a:srgbClr val="FFFFFF"/>
+                    </a:solidFill>
+                  </a:tcPr>
+                </a:tc>
+                <a:tc>
+                  <a:txBody>
+                    <a:bodyPr/>
+                    <a:lstStyle/>
+                    <a:p>
+                      <a:pPr algn="l"/>
+                      <a:r>
+                        <a:rPr sz="1000" b="0">
+                          <a:solidFill>
+                            <a:srgbClr val="1D1B43"/>
+                          </a:solidFill>
+                          <a:latin typeface="Calibri"/>
+                        </a:rPr>
+                        <a:t>IGP - CLINI COMERCIO - SAO JOSE DOS PINHAIS / PR</a:t>
+                      </a:r>
+                    </a:p>
+                  </a:txBody>
+                  <a:tcPr>
+                    <a:solidFill>
+                      <a:srgbClr val="FFFFFF"/>
+                    </a:solidFill>
+                  </a:tcPr>
+                </a:tc>
+                <a:tc>
+                  <a:txBody>
+                    <a:bodyPr/>
+                    <a:lstStyle/>
+                    <a:p>
+                      <a:pPr algn="l"/>
+                      <a:r>
+                        <a:rPr sz="1000" b="0">
+                          <a:solidFill>
+                            <a:srgbClr val="1D1B43"/>
+                          </a:solidFill>
+                          <a:latin typeface="Calibri"/>
+                        </a:rPr>
+                        <a:t>SAO JOSE DOS PINHAIS/PR</a:t>
+                      </a:r>
+                    </a:p>
+                  </a:txBody>
+                  <a:tcPr>
+                    <a:solidFill>
+                      <a:srgbClr val="FFFFFF"/>
+                    </a:solidFill>
+                  </a:tcPr>
+                </a:tc>
+                <a:tc>
+                  <a:txBody>
+                    <a:bodyPr/>
+                    <a:lstStyle/>
+                    <a:p>
+                      <a:pPr algn="l"/>
+                      <a:r>
+                        <a:rPr sz="1000" b="0">
+                          <a:solidFill>
+                            <a:srgbClr val="1D1B43"/>
+                          </a:solidFill>
+                          <a:latin typeface="Calibri"/>
+                        </a:rPr>
+                        <a:t>29/05/2026</a:t>
+                      </a:r>
+                    </a:p>
+                  </a:txBody>
+                  <a:tcPr>
+                    <a:solidFill>
+                      <a:srgbClr val="FFFFFF"/>
+                    </a:solidFill>
+                  </a:tcPr>
+                </a:tc>
+                <a:tc>
+                  <a:txBody>
+                    <a:bodyPr/>
+                    <a:lstStyle/>
+                    <a:p>
+                      <a:pPr algn="l"/>
+                      <a:r>
+                        <a:rPr sz="1000" b="0">
+                          <a:solidFill>
+                            <a:srgbClr val="1D1B43"/>
+                          </a:solidFill>
+                          <a:latin typeface="Calibri"/>
+                        </a:rPr>
+                        <a:t>FORA DO PRAZO</a:t>
                       </a:r>
                     </a:p>
                   </a:txBody>
@@ -5917,6 +6385,29 @@
                           </a:solidFill>
                           <a:latin typeface="Calibri"/>
                         </a:rPr>
+                        <a:t>55</a:t>
+                      </a:r>
+                    </a:p>
+                  </a:txBody>
+                  <a:tcPr>
+                    <a:solidFill>
+                      <a:srgbClr val="FFFFFF"/>
+                    </a:solidFill>
+                  </a:tcPr>
+                </a:tc>
+                <a:tc>
+                  <a:txBody>
+                    <a:bodyPr/>
+                    <a:lstStyle/>
+                    <a:p>
+                      <a:pPr algn="l"/>
+                      <a:r>
+                        <a:rPr sz="1000" b="0">
+                          <a:solidFill>
+                            <a:srgbClr val="1D1B43"/>
+                          </a:solidFill>
+                          <a:latin typeface="Calibri"/>
+                        </a:rPr>
                         <a:t>52</a:t>
                       </a:r>
                     </a:p>
@@ -5940,7 +6431,7 @@
                           </a:solidFill>
                           <a:latin typeface="Calibri"/>
                         </a:rPr>
-                        <a:t>51</a:t>
+                        <a:t>3</a:t>
                       </a:r>
                     </a:p>
                   </a:txBody>
@@ -5963,7 +6454,7 @@
                           </a:solidFill>
                           <a:latin typeface="Calibri"/>
                         </a:rPr>
-                        <a:t>1</a:t>
+                        <a:t>94.5%</a:t>
                       </a:r>
                     </a:p>
                   </a:txBody>
@@ -5986,30 +6477,7 @@
                           </a:solidFill>
                           <a:latin typeface="Calibri"/>
                         </a:rPr>
-                        <a:t>98.1%</a:t>
-                      </a:r>
-                    </a:p>
-                  </a:txBody>
-                  <a:tcPr>
-                    <a:solidFill>
-                      <a:srgbClr val="FFFFFF"/>
-                    </a:solidFill>
-                  </a:tcPr>
-                </a:tc>
-                <a:tc>
-                  <a:txBody>
-                    <a:bodyPr/>
-                    <a:lstStyle/>
-                    <a:p>
-                      <a:pPr algn="l"/>
-                      <a:r>
-                        <a:rPr sz="1000" b="0">
-                          <a:solidFill>
-                            <a:srgbClr val="1D1B43"/>
-                          </a:solidFill>
-                          <a:latin typeface="Calibri"/>
-                        </a:rPr>
-                        <a:t>Excelente</a:t>
+                        <a:t>Regular</a:t>
                       </a:r>
                     </a:p>
                   </a:txBody>
@@ -6057,7 +6525,7 @@
                           </a:solidFill>
                           <a:latin typeface="Calibri"/>
                         </a:rPr>
-                        <a:t>17</a:t>
+                        <a:t>18</a:t>
                       </a:r>
                     </a:p>
                   </a:txBody>
@@ -6080,7 +6548,7 @@
                           </a:solidFill>
                           <a:latin typeface="Calibri"/>
                         </a:rPr>
-                        <a:t>17</a:t>
+                        <a:t>16</a:t>
                       </a:r>
                     </a:p>
                   </a:txBody>
@@ -6103,7 +6571,7 @@
                           </a:solidFill>
                           <a:latin typeface="Calibri"/>
                         </a:rPr>
-                        <a:t>0</a:t>
+                        <a:t>2</a:t>
                       </a:r>
                     </a:p>
                   </a:txBody>
@@ -6126,7 +6594,7 @@
                           </a:solidFill>
                           <a:latin typeface="Calibri"/>
                         </a:rPr>
-                        <a:t>100.0%</a:t>
+                        <a:t>88.9%</a:t>
                       </a:r>
                     </a:p>
                   </a:txBody>
@@ -6149,7 +6617,7 @@
                           </a:solidFill>
                           <a:latin typeface="Calibri"/>
                         </a:rPr>
-                        <a:t>Excelente</a:t>
+                        <a:t>Regular</a:t>
                       </a:r>
                     </a:p>
                   </a:txBody>
@@ -6197,7 +6665,7 @@
                           </a:solidFill>
                           <a:latin typeface="Calibri"/>
                         </a:rPr>
-                        <a:t>14</a:t>
+                        <a:t>18</a:t>
                       </a:r>
                     </a:p>
                   </a:txBody>
@@ -6220,7 +6688,7 @@
                           </a:solidFill>
                           <a:latin typeface="Calibri"/>
                         </a:rPr>
-                        <a:t>14</a:t>
+                        <a:t>18</a:t>
                       </a:r>
                     </a:p>
                   </a:txBody>
@@ -6384,7 +6852,7 @@
                 </a:solidFill>
                 <a:latin typeface="Calibri"/>
               </a:rPr>
-              <a:t>TOP DESTINATARIOS (29 pontos)</a:t>
+              <a:t>TOP DESTINATARIOS (36 pontos)</a:t>
             </a:r>
           </a:p>
         </p:txBody>
@@ -6705,7 +7173,7 @@
                           </a:solidFill>
                           <a:latin typeface="Calibri"/>
                         </a:rPr>
-                        <a:t>17</a:t>
+                        <a:t>15</a:t>
                       </a:r>
                     </a:p>
                   </a:txBody>
@@ -6728,7 +7196,7 @@
                           </a:solidFill>
                           <a:latin typeface="Calibri"/>
                         </a:rPr>
-                        <a:t>0</a:t>
+                        <a:t>2</a:t>
                       </a:r>
                     </a:p>
                   </a:txBody>
@@ -6751,7 +7219,7 @@
                           </a:solidFill>
                           <a:latin typeface="Calibri"/>
                         </a:rPr>
-                        <a:t>100.0%</a:t>
+                        <a:t>88.2%</a:t>
                       </a:r>
                     </a:p>
                   </a:txBody>
@@ -6774,7 +7242,7 @@
                           </a:solidFill>
                           <a:latin typeface="Calibri"/>
                         </a:rPr>
-                        <a:t>Excelente</a:t>
+                        <a:t>Regular</a:t>
                       </a:r>
                     </a:p>
                   </a:txBody>
@@ -6822,7 +7290,7 @@
                           </a:solidFill>
                           <a:latin typeface="Calibri"/>
                         </a:rPr>
-                        <a:t>FELIPE MARANGONU ME - BLUMENAU / SC</a:t>
+                        <a:t>CARBON COMERCIO DE B - CRICIUMA / SC</a:t>
                       </a:r>
                     </a:p>
                   </a:txBody>
@@ -6845,7 +7313,7 @@
                           </a:solidFill>
                           <a:latin typeface="Calibri"/>
                         </a:rPr>
-                        <a:t>6</a:t>
+                        <a:t>8</a:t>
                       </a:r>
                     </a:p>
                   </a:txBody>
@@ -6868,7 +7336,7 @@
                           </a:solidFill>
                           <a:latin typeface="Calibri"/>
                         </a:rPr>
-                        <a:t>6</a:t>
+                        <a:t>8</a:t>
                       </a:r>
                     </a:p>
                   </a:txBody>
@@ -6985,7 +7453,7 @@
                           </a:solidFill>
                           <a:latin typeface="Calibri"/>
                         </a:rPr>
-                        <a:t>RAFAEL PONCHEKI - ME - JOINVILLE / SC</a:t>
+                        <a:t>CICLES HOFFMANN COME - FLORIANOPOLIS / SC</a:t>
                       </a:r>
                     </a:p>
                   </a:txBody>
@@ -7008,7 +7476,7 @@
                           </a:solidFill>
                           <a:latin typeface="Calibri"/>
                         </a:rPr>
-                        <a:t>6</a:t>
+                        <a:t>7</a:t>
                       </a:r>
                     </a:p>
                   </a:txBody>
@@ -7031,7 +7499,7 @@
                           </a:solidFill>
                           <a:latin typeface="Calibri"/>
                         </a:rPr>
-                        <a:t>6</a:t>
+                        <a:t>7</a:t>
                       </a:r>
                     </a:p>
                   </a:txBody>
@@ -7148,7 +7616,7 @@
                           </a:solidFill>
                           <a:latin typeface="Calibri"/>
                         </a:rPr>
-                        <a:t>CARBON COMERCIO DE B - CRICIUMA / SC</a:t>
+                        <a:t>AK VASCONCELOS - SAO PAULO / SP</a:t>
                       </a:r>
                     </a:p>
                   </a:txBody>
@@ -7171,7 +7639,7 @@
                           </a:solidFill>
                           <a:latin typeface="Calibri"/>
                         </a:rPr>
-                        <a:t>5</a:t>
+                        <a:t>4</a:t>
                       </a:r>
                     </a:p>
                   </a:txBody>
@@ -7194,7 +7662,7 @@
                           </a:solidFill>
                           <a:latin typeface="Calibri"/>
                         </a:rPr>
-                        <a:t>5</a:t>
+                        <a:t>4</a:t>
                       </a:r>
                     </a:p>
                   </a:txBody>
@@ -7311,7 +7779,7 @@
                           </a:solidFill>
                           <a:latin typeface="Calibri"/>
                         </a:rPr>
-                        <a:t>AK VASCONCELOS - SAO PAULO / SP</a:t>
+                        <a:t>IGP-CLINI COM IMP EX - INDAIATUBA / SP</a:t>
                       </a:r>
                     </a:p>
                   </a:txBody>
@@ -7334,7 +7802,7 @@
                           </a:solidFill>
                           <a:latin typeface="Calibri"/>
                         </a:rPr>
-                        <a:t>5</a:t>
+                        <a:t>4</a:t>
                       </a:r>
                     </a:p>
                   </a:txBody>
@@ -7357,7 +7825,7 @@
                           </a:solidFill>
                           <a:latin typeface="Calibri"/>
                         </a:rPr>
-                        <a:t>5</a:t>
+                        <a:t>4</a:t>
                       </a:r>
                     </a:p>
                   </a:txBody>
@@ -7474,7 +7942,7 @@
                           </a:solidFill>
                           <a:latin typeface="Calibri"/>
                         </a:rPr>
-                        <a:t>SF BIKES - INDAIAL / SC</a:t>
+                        <a:t>PROCICLO BIKE SHOP L - JARAGUA DO SUL / SC</a:t>
                       </a:r>
                     </a:p>
                   </a:txBody>
@@ -7497,7 +7965,7 @@
                           </a:solidFill>
                           <a:latin typeface="Calibri"/>
                         </a:rPr>
-                        <a:t>4</a:t>
+                        <a:t>3</a:t>
                       </a:r>
                     </a:p>
                   </a:txBody>
@@ -7520,7 +7988,7 @@
                           </a:solidFill>
                           <a:latin typeface="Calibri"/>
                         </a:rPr>
-                        <a:t>4</a:t>
+                        <a:t>3</a:t>
                       </a:r>
                     </a:p>
                   </a:txBody>
@@ -7637,7 +8105,7 @@
                           </a:solidFill>
                           <a:latin typeface="Calibri"/>
                         </a:rPr>
-                        <a:t>CICLES HOFFMANN COME - FLORIANOPOLIS / SC</a:t>
+                        <a:t>COLINA BIKES LTDA - JOINVILLE / SC</a:t>
                       </a:r>
                     </a:p>
                   </a:txBody>
@@ -7660,7 +8128,7 @@
                           </a:solidFill>
                           <a:latin typeface="Calibri"/>
                         </a:rPr>
-                        <a:t>4</a:t>
+                        <a:t>3</a:t>
                       </a:r>
                     </a:p>
                   </a:txBody>
@@ -7683,7 +8151,7 @@
                           </a:solidFill>
                           <a:latin typeface="Calibri"/>
                         </a:rPr>
-                        <a:t>4</a:t>
+                        <a:t>3</a:t>
                       </a:r>
                     </a:p>
                   </a:txBody>
@@ -7800,7 +8268,7 @@
                           </a:solidFill>
                           <a:latin typeface="Calibri"/>
                         </a:rPr>
-                        <a:t>FAN BIKES LTDA - SAO JOAO BATISTA / SC</a:t>
+                        <a:t>RICARDO FRANCIO ME - VIDEIRA / SC</a:t>
                       </a:r>
                     </a:p>
                   </a:txBody>
@@ -7823,7 +8291,7 @@
                           </a:solidFill>
                           <a:latin typeface="Calibri"/>
                         </a:rPr>
-                        <a:t>4</a:t>
+                        <a:t>3</a:t>
                       </a:r>
                     </a:p>
                   </a:txBody>
@@ -7846,7 +8314,7 @@
                           </a:solidFill>
                           <a:latin typeface="Calibri"/>
                         </a:rPr>
-                        <a:t>4</a:t>
+                        <a:t>3</a:t>
                       </a:r>
                     </a:p>
                   </a:txBody>
@@ -7963,7 +8431,7 @@
                           </a:solidFill>
                           <a:latin typeface="Calibri"/>
                         </a:rPr>
-                        <a:t>IGP-CLINI COM IMP EX - INDAIATUBA / SP</a:t>
+                        <a:t>FELIPE MARANGONU ME - BLUMENAU / SC</a:t>
                       </a:r>
                     </a:p>
                   </a:txBody>
@@ -8126,7 +8594,7 @@
                           </a:solidFill>
                           <a:latin typeface="Calibri"/>
                         </a:rPr>
-                        <a:t>CICLO EVO IMPORTACAO - ITAJAI / SC</a:t>
+                        <a:t>CASTRO&amp;LIN MANUT - SAO PAULO / SP</a:t>
                       </a:r>
                     </a:p>
                   </a:txBody>
@@ -8289,7 +8757,7 @@
                           </a:solidFill>
                           <a:latin typeface="Calibri"/>
                         </a:rPr>
-                        <a:t>COLINA BIKES LTDA - JOINVILLE / SC</a:t>
+                        <a:t>AC VASCONCELOS ESPOR - SAO PAULO / SP</a:t>
                       </a:r>
                     </a:p>
                   </a:txBody>
@@ -8452,7 +8920,7 @@
                           </a:solidFill>
                           <a:latin typeface="Calibri"/>
                         </a:rPr>
-                        <a:t>BIKE XTREME COMERCIO - TUBARAO / SC</a:t>
+                        <a:t>BIKE CENTER SHOP COM - ITAJAI / SC</a:t>
                       </a:r>
                     </a:p>
                   </a:txBody>
@@ -8498,7 +8966,7 @@
                           </a:solidFill>
                           <a:latin typeface="Calibri"/>
                         </a:rPr>
-                        <a:t>2</a:t>
+                        <a:t>1</a:t>
                       </a:r>
                     </a:p>
                   </a:txBody>
@@ -8521,7 +8989,7 @@
                           </a:solidFill>
                           <a:latin typeface="Calibri"/>
                         </a:rPr>
-                        <a:t>0</a:t>
+                        <a:t>1</a:t>
                       </a:r>
                     </a:p>
                   </a:txBody>
@@ -8544,7 +9012,7 @@
                           </a:solidFill>
                           <a:latin typeface="Calibri"/>
                         </a:rPr>
-                        <a:t>100.0%</a:t>
+                        <a:t>50.0%</a:t>
                       </a:r>
                     </a:p>
                   </a:txBody>
@@ -8567,7 +9035,7 @@
                           </a:solidFill>
                           <a:latin typeface="Calibri"/>
                         </a:rPr>
-                        <a:t>Excelente</a:t>
+                        <a:t>Atencao</a:t>
                       </a:r>
                     </a:p>
                   </a:txBody>
@@ -8615,7 +9083,7 @@
                           </a:solidFill>
                           <a:latin typeface="Calibri"/>
                         </a:rPr>
-                        <a:t>DEMARCHI S BIKE SHOP - SAO BENTO DO SUL / SC</a:t>
+                        <a:t>MARCELO MOSER - BLUMENAU / SC</a:t>
                       </a:r>
                     </a:p>
                   </a:txBody>
@@ -8778,7 +9246,7 @@
                           </a:solidFill>
                           <a:latin typeface="Calibri"/>
                         </a:rPr>
-                        <a:t>SMILE CICLES COMERCI - SAO PAULO / SP</a:t>
+                        <a:t>MATHEUS CONTATORI VO - ITAJAI / SC</a:t>
                       </a:r>
                     </a:p>
                   </a:txBody>
